--- a/slides/ch06-positive-and-neutral-messages.pptx
+++ b/slides/ch06-positive-and-neutral-messages.pptx
@@ -26,6 +26,17 @@
     <p:sldId id="274" r:id="rId26"/>
     <p:sldId id="275" r:id="rId27"/>
     <p:sldId id="276" r:id="rId28"/>
+    <p:sldId id="277" r:id="rId29"/>
+    <p:sldId id="278" r:id="rId30"/>
+    <p:sldId id="279" r:id="rId31"/>
+    <p:sldId id="280" r:id="rId32"/>
+    <p:sldId id="281" r:id="rId33"/>
+    <p:sldId id="282" r:id="rId34"/>
+    <p:sldId id="283" r:id="rId35"/>
+    <p:sldId id="284" r:id="rId36"/>
+    <p:sldId id="285" r:id="rId37"/>
+    <p:sldId id="286" r:id="rId38"/>
+    <p:sldId id="287" r:id="rId39"/>
   </p:sldIdLst>
   <p:sldSz cx="12191695" cy="6858000" type="screen4x3"/>
   <p:notesSz cx="6858000" cy="9144000"/>
@@ -1152,7 +1163,7 @@
           <a:lstStyle/>
           <a:p>
             <a:r>
-              <a:t>Recap.</a:t>
+              <a:t>Section 5: letters. Rare enough now that using one is itself a message — which is exactly why the format survives.</a:t>
             </a:r>
           </a:p>
         </p:txBody>
@@ -1222,7 +1233,7 @@
           <a:lstStyle/>
           <a:p>
             <a:r>
-              <a:t>Closing frame.</a:t>
+              <a:t>The letter didn't die; it specialized. Students will write fewer letters than emails — but the letters will matter more per document.</a:t>
             </a:r>
           </a:p>
         </p:txBody>
@@ -1362,7 +1373,7 @@
           <a:lstStyle/>
           <a:p>
             <a:r>
-              <a:t>Async-ready.</a:t>
+              <a:t>Format walk-through — block format only, since it's the modern standard. The salutation-name verification callback to Chapter 4 is deliberate.</a:t>
             </a:r>
           </a:p>
         </p:txBody>
@@ -1432,7 +1443,567 @@
           <a:lstStyle/>
           <a:p>
             <a:r>
-              <a:t>Delivery-neutral closing.</a:t>
+              <a:t>Direct setup for the assignment. The three-paragraph skeleton is the request flow from Section 1 dressed in letter format.</a:t>
+            </a:r>
+          </a:p>
+        </p:txBody>
+      </p:sp>
+      <p:sp>
+        <p:nvSpPr>
+          <p:cNvPr id="4" name="Slide Number Placeholder 3"/>
+          <p:cNvSpPr>
+            <a:spLocks noGrp="1"/>
+          </p:cNvSpPr>
+          <p:nvPr>
+            <p:ph type="sldNum" idx="5" sz="quarter"/>
+          </p:nvPr>
+        </p:nvSpPr>
+        <p:spPr/>
+      </p:sp>
+    </p:spTree>
+  </p:cSld>
+  <p:clrMapOvr>
+    <a:masterClrMapping/>
+  </p:clrMapOvr>
+</p:notes>
+</file>
+
+<file path=ppt/notesSlides/notesSlide22.xml><?xml version="1.0" encoding="utf-8"?>
+<p:notes xmlns:a="http://schemas.openxmlformats.org/drawingml/2006/main" xmlns:p="http://schemas.openxmlformats.org/presentationml/2006/main" xmlns:r="http://schemas.openxmlformats.org/officeDocument/2006/relationships">
+  <p:cSld>
+    <p:spTree>
+      <p:nvGrpSpPr>
+        <p:cNvPr id="1" name=""/>
+        <p:cNvGrpSpPr/>
+        <p:nvPr/>
+      </p:nvGrpSpPr>
+      <p:grpSpPr>
+        <a:xfrm>
+          <a:off x="0" y="0"/>
+          <a:ext cx="0" cy="0"/>
+          <a:chOff x="0" y="0"/>
+          <a:chExt cx="0" cy="0"/>
+        </a:xfrm>
+      </p:grpSpPr>
+      <p:sp>
+        <p:nvSpPr>
+          <p:cNvPr id="2" name="Slide Image Placeholder 1"/>
+          <p:cNvSpPr>
+            <a:spLocks noGrp="1"/>
+          </p:cNvSpPr>
+          <p:nvPr>
+            <p:ph type="sldImg" idx="2"/>
+          </p:nvPr>
+        </p:nvSpPr>
+        <p:spPr/>
+      </p:sp>
+      <p:sp>
+        <p:nvSpPr>
+          <p:cNvPr id="3" name="Notes Placeholder 2"/>
+          <p:cNvSpPr>
+            <a:spLocks noGrp="1"/>
+          </p:cNvSpPr>
+          <p:nvPr>
+            <p:ph type="body" idx="3" sz="quarter"/>
+          </p:nvPr>
+        </p:nvSpPr>
+        <p:spPr/>
+        <p:txBody>
+          <a:bodyPr/>
+          <a:lstStyle/>
+          <a:p>
+            <a:r>
+              <a:t>Section 6: three routine positive genres students will send weekly for the rest of their careers.</a:t>
+            </a:r>
+          </a:p>
+        </p:txBody>
+      </p:sp>
+      <p:sp>
+        <p:nvSpPr>
+          <p:cNvPr id="4" name="Slide Number Placeholder 3"/>
+          <p:cNvSpPr>
+            <a:spLocks noGrp="1"/>
+          </p:cNvSpPr>
+          <p:nvPr>
+            <p:ph type="sldNum" idx="5" sz="quarter"/>
+          </p:nvPr>
+        </p:nvSpPr>
+        <p:spPr/>
+      </p:sp>
+    </p:spTree>
+  </p:cSld>
+  <p:clrMapOvr>
+    <a:masterClrMapping/>
+  </p:clrMapOvr>
+</p:notes>
+</file>
+
+<file path=ppt/notesSlides/notesSlide23.xml><?xml version="1.0" encoding="utf-8"?>
+<p:notes xmlns:a="http://schemas.openxmlformats.org/drawingml/2006/main" xmlns:p="http://schemas.openxmlformats.org/presentationml/2006/main" xmlns:r="http://schemas.openxmlformats.org/officeDocument/2006/relationships">
+  <p:cSld>
+    <p:spTree>
+      <p:nvGrpSpPr>
+        <p:cNvPr id="1" name=""/>
+        <p:cNvGrpSpPr/>
+        <p:nvPr/>
+      </p:nvGrpSpPr>
+      <p:grpSpPr>
+        <a:xfrm>
+          <a:off x="0" y="0"/>
+          <a:ext cx="0" cy="0"/>
+          <a:chOff x="0" y="0"/>
+          <a:chExt cx="0" cy="0"/>
+        </a:xfrm>
+      </p:grpSpPr>
+      <p:sp>
+        <p:nvSpPr>
+          <p:cNvPr id="2" name="Slide Image Placeholder 1"/>
+          <p:cNvSpPr>
+            <a:spLocks noGrp="1"/>
+          </p:cNvSpPr>
+          <p:nvPr>
+            <p:ph type="sldImg" idx="2"/>
+          </p:nvPr>
+        </p:nvSpPr>
+        <p:spPr/>
+      </p:sp>
+      <p:sp>
+        <p:nvSpPr>
+          <p:cNvPr id="3" name="Notes Placeholder 2"/>
+          <p:cNvSpPr>
+            <a:spLocks noGrp="1"/>
+          </p:cNvSpPr>
+          <p:nvPr>
+            <p:ph type="body" idx="3" sz="quarter"/>
+          </p:nvPr>
+        </p:nvSpPr>
+        <p:spPr/>
+        <p:txBody>
+          <a:bodyPr/>
+          <a:lstStyle/>
+          <a:p>
+            <a:r>
+              <a:t>Announcements are downward communication (Chapter 1) at its most routine — and the genre where corporate throat-clearing is most epidemic.</a:t>
+            </a:r>
+          </a:p>
+        </p:txBody>
+      </p:sp>
+      <p:sp>
+        <p:nvSpPr>
+          <p:cNvPr id="4" name="Slide Number Placeholder 3"/>
+          <p:cNvSpPr>
+            <a:spLocks noGrp="1"/>
+          </p:cNvSpPr>
+          <p:nvPr>
+            <p:ph type="sldNum" idx="5" sz="quarter"/>
+          </p:nvPr>
+        </p:nvSpPr>
+        <p:spPr/>
+      </p:sp>
+    </p:spTree>
+  </p:cSld>
+  <p:clrMapOvr>
+    <a:masterClrMapping/>
+  </p:clrMapOvr>
+</p:notes>
+</file>
+
+<file path=ppt/notesSlides/notesSlide24.xml><?xml version="1.0" encoding="utf-8"?>
+<p:notes xmlns:a="http://schemas.openxmlformats.org/drawingml/2006/main" xmlns:p="http://schemas.openxmlformats.org/presentationml/2006/main" xmlns:r="http://schemas.openxmlformats.org/officeDocument/2006/relationships">
+  <p:cSld>
+    <p:spTree>
+      <p:nvGrpSpPr>
+        <p:cNvPr id="1" name=""/>
+        <p:cNvGrpSpPr/>
+        <p:nvPr/>
+      </p:nvGrpSpPr>
+      <p:grpSpPr>
+        <a:xfrm>
+          <a:off x="0" y="0"/>
+          <a:ext cx="0" cy="0"/>
+          <a:chOff x="0" y="0"/>
+          <a:chExt cx="0" cy="0"/>
+        </a:xfrm>
+      </p:grpSpPr>
+      <p:sp>
+        <p:nvSpPr>
+          <p:cNvPr id="2" name="Slide Image Placeholder 1"/>
+          <p:cNvSpPr>
+            <a:spLocks noGrp="1"/>
+          </p:cNvSpPr>
+          <p:nvPr>
+            <p:ph type="sldImg" idx="2"/>
+          </p:nvPr>
+        </p:nvSpPr>
+        <p:spPr/>
+      </p:sp>
+      <p:sp>
+        <p:nvSpPr>
+          <p:cNvPr id="3" name="Notes Placeholder 2"/>
+          <p:cNvSpPr>
+            <a:spLocks noGrp="1"/>
+          </p:cNvSpPr>
+          <p:nvPr>
+            <p:ph type="body" idx="3" sz="quarter"/>
+          </p:nvPr>
+        </p:nvSpPr>
+        <p:spPr/>
+        <p:txBody>
+          <a:bodyPr/>
+          <a:lstStyle/>
+          <a:p>
+            <a:r>
+              <a:t>The confirmation is the cheapest litigation insurance ever invented, and it doubles as courtesy. The explicit correction window is the professional touch.</a:t>
+            </a:r>
+          </a:p>
+        </p:txBody>
+      </p:sp>
+      <p:sp>
+        <p:nvSpPr>
+          <p:cNvPr id="4" name="Slide Number Placeholder 3"/>
+          <p:cNvSpPr>
+            <a:spLocks noGrp="1"/>
+          </p:cNvSpPr>
+          <p:nvPr>
+            <p:ph type="sldNum" idx="5" sz="quarter"/>
+          </p:nvPr>
+        </p:nvSpPr>
+        <p:spPr/>
+      </p:sp>
+    </p:spTree>
+  </p:cSld>
+  <p:clrMapOvr>
+    <a:masterClrMapping/>
+  </p:clrMapOvr>
+</p:notes>
+</file>
+
+<file path=ppt/notesSlides/notesSlide25.xml><?xml version="1.0" encoding="utf-8"?>
+<p:notes xmlns:a="http://schemas.openxmlformats.org/drawingml/2006/main" xmlns:p="http://schemas.openxmlformats.org/presentationml/2006/main" xmlns:r="http://schemas.openxmlformats.org/officeDocument/2006/relationships">
+  <p:cSld>
+    <p:spTree>
+      <p:nvGrpSpPr>
+        <p:cNvPr id="1" name=""/>
+        <p:cNvGrpSpPr/>
+        <p:nvPr/>
+      </p:nvGrpSpPr>
+      <p:grpSpPr>
+        <a:xfrm>
+          <a:off x="0" y="0"/>
+          <a:ext cx="0" cy="0"/>
+          <a:chOff x="0" y="0"/>
+          <a:chExt cx="0" cy="0"/>
+        </a:xfrm>
+      </p:grpSpPr>
+      <p:sp>
+        <p:nvSpPr>
+          <p:cNvPr id="2" name="Slide Image Placeholder 1"/>
+          <p:cNvSpPr>
+            <a:spLocks noGrp="1"/>
+          </p:cNvSpPr>
+          <p:nvPr>
+            <p:ph type="sldImg" idx="2"/>
+          </p:nvPr>
+        </p:nvSpPr>
+        <p:spPr/>
+      </p:sp>
+      <p:sp>
+        <p:nvSpPr>
+          <p:cNvPr id="3" name="Notes Placeholder 2"/>
+          <p:cNvSpPr>
+            <a:spLocks noGrp="1"/>
+          </p:cNvSpPr>
+          <p:nvPr>
+            <p:ph type="body" idx="3" sz="quarter"/>
+          </p:nvPr>
+        </p:nvSpPr>
+        <p:spPr/>
+        <p:txBody>
+          <a:bodyPr/>
+          <a:lstStyle/>
+          <a:p>
+            <a:r>
+              <a:t>Welcomes are goodwill messages with an operations payload. The named-human rule echoes the OOO slide in Chapter 5.</a:t>
+            </a:r>
+          </a:p>
+        </p:txBody>
+      </p:sp>
+      <p:sp>
+        <p:nvSpPr>
+          <p:cNvPr id="4" name="Slide Number Placeholder 3"/>
+          <p:cNvSpPr>
+            <a:spLocks noGrp="1"/>
+          </p:cNvSpPr>
+          <p:nvPr>
+            <p:ph type="sldNum" idx="5" sz="quarter"/>
+          </p:nvPr>
+        </p:nvSpPr>
+        <p:spPr/>
+      </p:sp>
+    </p:spTree>
+  </p:cSld>
+  <p:clrMapOvr>
+    <a:masterClrMapping/>
+  </p:clrMapOvr>
+</p:notes>
+</file>
+
+<file path=ppt/notesSlides/notesSlide26.xml><?xml version="1.0" encoding="utf-8"?>
+<p:notes xmlns:a="http://schemas.openxmlformats.org/drawingml/2006/main" xmlns:p="http://schemas.openxmlformats.org/presentationml/2006/main" xmlns:r="http://schemas.openxmlformats.org/officeDocument/2006/relationships">
+  <p:cSld>
+    <p:spTree>
+      <p:nvGrpSpPr>
+        <p:cNvPr id="1" name=""/>
+        <p:cNvGrpSpPr/>
+        <p:nvPr/>
+      </p:nvGrpSpPr>
+      <p:grpSpPr>
+        <a:xfrm>
+          <a:off x="0" y="0"/>
+          <a:ext cx="0" cy="0"/>
+          <a:chOff x="0" y="0"/>
+          <a:chExt cx="0" cy="0"/>
+        </a:xfrm>
+      </p:grpSpPr>
+      <p:sp>
+        <p:nvSpPr>
+          <p:cNvPr id="2" name="Slide Image Placeholder 1"/>
+          <p:cNvSpPr>
+            <a:spLocks noGrp="1"/>
+          </p:cNvSpPr>
+          <p:nvPr>
+            <p:ph type="sldImg" idx="2"/>
+          </p:nvPr>
+        </p:nvSpPr>
+        <p:spPr/>
+      </p:sp>
+      <p:sp>
+        <p:nvSpPr>
+          <p:cNvPr id="3" name="Notes Placeholder 2"/>
+          <p:cNvSpPr>
+            <a:spLocks noGrp="1"/>
+          </p:cNvSpPr>
+          <p:nvPr>
+            <p:ph type="body" idx="3" sz="quarter"/>
+          </p:nvPr>
+        </p:nvSpPr>
+        <p:spPr/>
+        <p:txBody>
+          <a:bodyPr/>
+          <a:lstStyle/>
+          <a:p>
+            <a:r>
+              <a:t>Recommendations sit at the boundary of goodwill and risk: generous by nature, but written on the recommender's credit. The tepid-letter point matters — damning with faint praise is a real signal recipients decode.</a:t>
+            </a:r>
+          </a:p>
+        </p:txBody>
+      </p:sp>
+      <p:sp>
+        <p:nvSpPr>
+          <p:cNvPr id="4" name="Slide Number Placeholder 3"/>
+          <p:cNvSpPr>
+            <a:spLocks noGrp="1"/>
+          </p:cNvSpPr>
+          <p:nvPr>
+            <p:ph type="sldNum" idx="5" sz="quarter"/>
+          </p:nvPr>
+        </p:nvSpPr>
+        <p:spPr/>
+      </p:sp>
+    </p:spTree>
+  </p:cSld>
+  <p:clrMapOvr>
+    <a:masterClrMapping/>
+  </p:clrMapOvr>
+</p:notes>
+</file>
+
+<file path=ppt/notesSlides/notesSlide27.xml><?xml version="1.0" encoding="utf-8"?>
+<p:notes xmlns:a="http://schemas.openxmlformats.org/drawingml/2006/main" xmlns:p="http://schemas.openxmlformats.org/presentationml/2006/main" xmlns:r="http://schemas.openxmlformats.org/officeDocument/2006/relationships">
+  <p:cSld>
+    <p:spTree>
+      <p:nvGrpSpPr>
+        <p:cNvPr id="1" name=""/>
+        <p:cNvGrpSpPr/>
+        <p:nvPr/>
+      </p:nvGrpSpPr>
+      <p:grpSpPr>
+        <a:xfrm>
+          <a:off x="0" y="0"/>
+          <a:ext cx="0" cy="0"/>
+          <a:chOff x="0" y="0"/>
+          <a:chExt cx="0" cy="0"/>
+        </a:xfrm>
+      </p:grpSpPr>
+      <p:sp>
+        <p:nvSpPr>
+          <p:cNvPr id="2" name="Slide Image Placeholder 1"/>
+          <p:cNvSpPr>
+            <a:spLocks noGrp="1"/>
+          </p:cNvSpPr>
+          <p:nvPr>
+            <p:ph type="sldImg" idx="2"/>
+          </p:nvPr>
+        </p:nvSpPr>
+        <p:spPr/>
+      </p:sp>
+      <p:sp>
+        <p:nvSpPr>
+          <p:cNvPr id="3" name="Notes Placeholder 2"/>
+          <p:cNvSpPr>
+            <a:spLocks noGrp="1"/>
+          </p:cNvSpPr>
+          <p:nvPr>
+            <p:ph type="body" idx="3" sz="quarter"/>
+          </p:nvPr>
+        </p:nvSpPr>
+        <p:spPr/>
+        <p:txBody>
+          <a:bodyPr/>
+          <a:lstStyle/>
+          <a:p>
+            <a:r>
+              <a:t>The routing rules of goodwill: direction and visibility multiply the same five minutes of writing. Ties to Grant's giver research from the stat slide.</a:t>
+            </a:r>
+          </a:p>
+        </p:txBody>
+      </p:sp>
+      <p:sp>
+        <p:nvSpPr>
+          <p:cNvPr id="4" name="Slide Number Placeholder 3"/>
+          <p:cNvSpPr>
+            <a:spLocks noGrp="1"/>
+          </p:cNvSpPr>
+          <p:nvPr>
+            <p:ph type="sldNum" idx="5" sz="quarter"/>
+          </p:nvPr>
+        </p:nvSpPr>
+        <p:spPr/>
+      </p:sp>
+    </p:spTree>
+  </p:cSld>
+  <p:clrMapOvr>
+    <a:masterClrMapping/>
+  </p:clrMapOvr>
+</p:notes>
+</file>
+
+<file path=ppt/notesSlides/notesSlide28.xml><?xml version="1.0" encoding="utf-8"?>
+<p:notes xmlns:a="http://schemas.openxmlformats.org/drawingml/2006/main" xmlns:p="http://schemas.openxmlformats.org/presentationml/2006/main" xmlns:r="http://schemas.openxmlformats.org/officeDocument/2006/relationships">
+  <p:cSld>
+    <p:spTree>
+      <p:nvGrpSpPr>
+        <p:cNvPr id="1" name=""/>
+        <p:cNvGrpSpPr/>
+        <p:nvPr/>
+      </p:nvGrpSpPr>
+      <p:grpSpPr>
+        <a:xfrm>
+          <a:off x="0" y="0"/>
+          <a:ext cx="0" cy="0"/>
+          <a:chOff x="0" y="0"/>
+          <a:chExt cx="0" cy="0"/>
+        </a:xfrm>
+      </p:grpSpPr>
+      <p:sp>
+        <p:nvSpPr>
+          <p:cNvPr id="2" name="Slide Image Placeholder 1"/>
+          <p:cNvSpPr>
+            <a:spLocks noGrp="1"/>
+          </p:cNvSpPr>
+          <p:nvPr>
+            <p:ph type="sldImg" idx="2"/>
+          </p:nvPr>
+        </p:nvSpPr>
+        <p:spPr/>
+      </p:sp>
+      <p:sp>
+        <p:nvSpPr>
+          <p:cNvPr id="3" name="Notes Placeholder 2"/>
+          <p:cNvSpPr>
+            <a:spLocks noGrp="1"/>
+          </p:cNvSpPr>
+          <p:nvPr>
+            <p:ph type="body" idx="3" sz="quarter"/>
+          </p:nvPr>
+        </p:nvSpPr>
+        <p:spPr/>
+        <p:txBody>
+          <a:bodyPr/>
+          <a:lstStyle/>
+          <a:p>
+            <a:r>
+              <a:t>The case argues the habit: confirm while it's friendly, because you can't confirm after it isn't. Links Chapter 5's permanence section to a positive outcome.</a:t>
+            </a:r>
+          </a:p>
+        </p:txBody>
+      </p:sp>
+      <p:sp>
+        <p:nvSpPr>
+          <p:cNvPr id="4" name="Slide Number Placeholder 3"/>
+          <p:cNvSpPr>
+            <a:spLocks noGrp="1"/>
+          </p:cNvSpPr>
+          <p:nvPr>
+            <p:ph type="sldNum" idx="5" sz="quarter"/>
+          </p:nvPr>
+        </p:nvSpPr>
+        <p:spPr/>
+      </p:sp>
+    </p:spTree>
+  </p:cSld>
+  <p:clrMapOvr>
+    <a:masterClrMapping/>
+  </p:clrMapOvr>
+</p:notes>
+</file>
+
+<file path=ppt/notesSlides/notesSlide29.xml><?xml version="1.0" encoding="utf-8"?>
+<p:notes xmlns:a="http://schemas.openxmlformats.org/drawingml/2006/main" xmlns:p="http://schemas.openxmlformats.org/presentationml/2006/main" xmlns:r="http://schemas.openxmlformats.org/officeDocument/2006/relationships">
+  <p:cSld>
+    <p:spTree>
+      <p:nvGrpSpPr>
+        <p:cNvPr id="1" name=""/>
+        <p:cNvGrpSpPr/>
+        <p:nvPr/>
+      </p:nvGrpSpPr>
+      <p:grpSpPr>
+        <a:xfrm>
+          <a:off x="0" y="0"/>
+          <a:ext cx="0" cy="0"/>
+          <a:chOff x="0" y="0"/>
+          <a:chExt cx="0" cy="0"/>
+        </a:xfrm>
+      </p:grpSpPr>
+      <p:sp>
+        <p:nvSpPr>
+          <p:cNvPr id="2" name="Slide Image Placeholder 1"/>
+          <p:cNvSpPr>
+            <a:spLocks noGrp="1"/>
+          </p:cNvSpPr>
+          <p:nvPr>
+            <p:ph type="sldImg" idx="2"/>
+          </p:nvPr>
+        </p:nvSpPr>
+        <p:spPr/>
+      </p:sp>
+      <p:sp>
+        <p:nvSpPr>
+          <p:cNvPr id="3" name="Notes Placeholder 2"/>
+          <p:cNvSpPr>
+            <a:spLocks noGrp="1"/>
+          </p:cNvSpPr>
+          <p:nvPr>
+            <p:ph type="body" idx="3" sz="quarter"/>
+          </p:nvPr>
+        </p:nvSpPr>
+        <p:spPr/>
+        <p:txBody>
+          <a:bodyPr/>
+          <a:lstStyle/>
+          <a:p>
+            <a:r>
+              <a:t>Recap.</a:t>
             </a:r>
           </a:p>
         </p:txBody>
@@ -1503,6 +2074,216 @@
           <a:p>
             <a:r>
               <a:t>Section 1.</a:t>
+            </a:r>
+          </a:p>
+        </p:txBody>
+      </p:sp>
+      <p:sp>
+        <p:nvSpPr>
+          <p:cNvPr id="4" name="Slide Number Placeholder 3"/>
+          <p:cNvSpPr>
+            <a:spLocks noGrp="1"/>
+          </p:cNvSpPr>
+          <p:nvPr>
+            <p:ph type="sldNum" idx="5" sz="quarter"/>
+          </p:nvPr>
+        </p:nvSpPr>
+        <p:spPr/>
+      </p:sp>
+    </p:spTree>
+  </p:cSld>
+  <p:clrMapOvr>
+    <a:masterClrMapping/>
+  </p:clrMapOvr>
+</p:notes>
+</file>
+
+<file path=ppt/notesSlides/notesSlide30.xml><?xml version="1.0" encoding="utf-8"?>
+<p:notes xmlns:a="http://schemas.openxmlformats.org/drawingml/2006/main" xmlns:p="http://schemas.openxmlformats.org/presentationml/2006/main" xmlns:r="http://schemas.openxmlformats.org/officeDocument/2006/relationships">
+  <p:cSld>
+    <p:spTree>
+      <p:nvGrpSpPr>
+        <p:cNvPr id="1" name=""/>
+        <p:cNvGrpSpPr/>
+        <p:nvPr/>
+      </p:nvGrpSpPr>
+      <p:grpSpPr>
+        <a:xfrm>
+          <a:off x="0" y="0"/>
+          <a:ext cx="0" cy="0"/>
+          <a:chOff x="0" y="0"/>
+          <a:chExt cx="0" cy="0"/>
+        </a:xfrm>
+      </p:grpSpPr>
+      <p:sp>
+        <p:nvSpPr>
+          <p:cNvPr id="2" name="Slide Image Placeholder 1"/>
+          <p:cNvSpPr>
+            <a:spLocks noGrp="1"/>
+          </p:cNvSpPr>
+          <p:nvPr>
+            <p:ph type="sldImg" idx="2"/>
+          </p:nvPr>
+        </p:nvSpPr>
+        <p:spPr/>
+      </p:sp>
+      <p:sp>
+        <p:nvSpPr>
+          <p:cNvPr id="3" name="Notes Placeholder 2"/>
+          <p:cNvSpPr>
+            <a:spLocks noGrp="1"/>
+          </p:cNvSpPr>
+          <p:nvPr>
+            <p:ph type="body" idx="3" sz="quarter"/>
+          </p:nvPr>
+        </p:nvSpPr>
+        <p:spPr/>
+        <p:txBody>
+          <a:bodyPr/>
+          <a:lstStyle/>
+          <a:p>
+            <a:r>
+              <a:t>Closing frame.</a:t>
+            </a:r>
+          </a:p>
+        </p:txBody>
+      </p:sp>
+      <p:sp>
+        <p:nvSpPr>
+          <p:cNvPr id="4" name="Slide Number Placeholder 3"/>
+          <p:cNvSpPr>
+            <a:spLocks noGrp="1"/>
+          </p:cNvSpPr>
+          <p:nvPr>
+            <p:ph type="sldNum" idx="5" sz="quarter"/>
+          </p:nvPr>
+        </p:nvSpPr>
+        <p:spPr/>
+      </p:sp>
+    </p:spTree>
+  </p:cSld>
+  <p:clrMapOvr>
+    <a:masterClrMapping/>
+  </p:clrMapOvr>
+</p:notes>
+</file>
+
+<file path=ppt/notesSlides/notesSlide31.xml><?xml version="1.0" encoding="utf-8"?>
+<p:notes xmlns:a="http://schemas.openxmlformats.org/drawingml/2006/main" xmlns:p="http://schemas.openxmlformats.org/presentationml/2006/main" xmlns:r="http://schemas.openxmlformats.org/officeDocument/2006/relationships">
+  <p:cSld>
+    <p:spTree>
+      <p:nvGrpSpPr>
+        <p:cNvPr id="1" name=""/>
+        <p:cNvGrpSpPr/>
+        <p:nvPr/>
+      </p:nvGrpSpPr>
+      <p:grpSpPr>
+        <a:xfrm>
+          <a:off x="0" y="0"/>
+          <a:ext cx="0" cy="0"/>
+          <a:chOff x="0" y="0"/>
+          <a:chExt cx="0" cy="0"/>
+        </a:xfrm>
+      </p:grpSpPr>
+      <p:sp>
+        <p:nvSpPr>
+          <p:cNvPr id="2" name="Slide Image Placeholder 1"/>
+          <p:cNvSpPr>
+            <a:spLocks noGrp="1"/>
+          </p:cNvSpPr>
+          <p:nvPr>
+            <p:ph type="sldImg" idx="2"/>
+          </p:nvPr>
+        </p:nvSpPr>
+        <p:spPr/>
+      </p:sp>
+      <p:sp>
+        <p:nvSpPr>
+          <p:cNvPr id="3" name="Notes Placeholder 2"/>
+          <p:cNvSpPr>
+            <a:spLocks noGrp="1"/>
+          </p:cNvSpPr>
+          <p:nvPr>
+            <p:ph type="body" idx="3" sz="quarter"/>
+          </p:nvPr>
+        </p:nvSpPr>
+        <p:spPr/>
+        <p:txBody>
+          <a:bodyPr/>
+          <a:lstStyle/>
+          <a:p>
+            <a:r>
+              <a:t>Async-ready.</a:t>
+            </a:r>
+          </a:p>
+        </p:txBody>
+      </p:sp>
+      <p:sp>
+        <p:nvSpPr>
+          <p:cNvPr id="4" name="Slide Number Placeholder 3"/>
+          <p:cNvSpPr>
+            <a:spLocks noGrp="1"/>
+          </p:cNvSpPr>
+          <p:nvPr>
+            <p:ph type="sldNum" idx="5" sz="quarter"/>
+          </p:nvPr>
+        </p:nvSpPr>
+        <p:spPr/>
+      </p:sp>
+    </p:spTree>
+  </p:cSld>
+  <p:clrMapOvr>
+    <a:masterClrMapping/>
+  </p:clrMapOvr>
+</p:notes>
+</file>
+
+<file path=ppt/notesSlides/notesSlide32.xml><?xml version="1.0" encoding="utf-8"?>
+<p:notes xmlns:a="http://schemas.openxmlformats.org/drawingml/2006/main" xmlns:p="http://schemas.openxmlformats.org/presentationml/2006/main" xmlns:r="http://schemas.openxmlformats.org/officeDocument/2006/relationships">
+  <p:cSld>
+    <p:spTree>
+      <p:nvGrpSpPr>
+        <p:cNvPr id="1" name=""/>
+        <p:cNvGrpSpPr/>
+        <p:nvPr/>
+      </p:nvGrpSpPr>
+      <p:grpSpPr>
+        <a:xfrm>
+          <a:off x="0" y="0"/>
+          <a:ext cx="0" cy="0"/>
+          <a:chOff x="0" y="0"/>
+          <a:chExt cx="0" cy="0"/>
+        </a:xfrm>
+      </p:grpSpPr>
+      <p:sp>
+        <p:nvSpPr>
+          <p:cNvPr id="2" name="Slide Image Placeholder 1"/>
+          <p:cNvSpPr>
+            <a:spLocks noGrp="1"/>
+          </p:cNvSpPr>
+          <p:nvPr>
+            <p:ph type="sldImg" idx="2"/>
+          </p:nvPr>
+        </p:nvSpPr>
+        <p:spPr/>
+      </p:sp>
+      <p:sp>
+        <p:nvSpPr>
+          <p:cNvPr id="3" name="Notes Placeholder 2"/>
+          <p:cNvSpPr>
+            <a:spLocks noGrp="1"/>
+          </p:cNvSpPr>
+          <p:nvPr>
+            <p:ph type="body" idx="3" sz="quarter"/>
+          </p:nvPr>
+        </p:nvSpPr>
+        <p:spPr/>
+        <p:txBody>
+          <a:bodyPr/>
+          <a:lstStyle/>
+          <a:p>
+            <a:r>
+              <a:t>Delivery-neutral closing.</a:t>
             </a:r>
           </a:p>
         </p:txBody>
@@ -8199,7 +8980,7 @@
     <p:bg>
       <p:bgPr>
         <a:solidFill>
-          <a:srgbClr val="FFFFFF"/>
+          <a:srgbClr val="0E4D33"/>
         </a:solidFill>
         <a:effectLst/>
       </p:bgPr>
@@ -8213,7 +8994,7 @@
       <p:grpSpPr/>
       <p:sp>
         <p:nvSpPr>
-          <p:cNvPr id="2" name="Title 1" descr="Slide title: Key takeaways"/>
+          <p:cNvPr id="2" name="Title 1" descr="Slide title: The business letter"/>
           <p:cNvSpPr>
             <a:spLocks noGrp="1"/>
           </p:cNvSpPr>
@@ -8223,8 +9004,8 @@
         </p:nvSpPr>
         <p:spPr>
           <a:xfrm>
-            <a:off x="502920" y="411480"/>
-            <a:ext cx="11155680" cy="914400"/>
+            <a:off x="822960" y="2834640"/>
+            <a:ext cx="10515600" cy="914400"/>
           </a:xfrm>
         </p:spPr>
         <p:txBody>
@@ -8233,149 +9014,27 @@
           <a:p>
             <a:pPr algn="l"/>
             <a:r>
-              <a:rPr sz="3200" b="1">
-                <a:solidFill>
-                  <a:srgbClr val="0E4D33"/>
+              <a:rPr sz="4000" b="1">
+                <a:solidFill>
+                  <a:srgbClr val="FFFFFF"/>
                 </a:solidFill>
                 <a:latin typeface="Cambria"/>
               </a:rPr>
-              <a:t>Key takeaways</a:t>
-            </a:r>
-          </a:p>
-        </p:txBody>
-      </p:sp>
-      <p:sp>
-        <p:nvSpPr>
-          <p:cNvPr id="3" name="TextBox 2" descr="Footer: BADM 225 · Chapter 6"/>
+              <a:t>The business letter</a:t>
+            </a:r>
+          </a:p>
+        </p:txBody>
+      </p:sp>
+      <p:sp>
+        <p:nvSpPr>
+          <p:cNvPr id="3" name="TextBox 2" descr="Section number 05"/>
           <p:cNvSpPr txBox="1"/>
           <p:nvPr/>
         </p:nvSpPr>
         <p:spPr>
           <a:xfrm>
-            <a:off x="502920" y="6446520"/>
-            <a:ext cx="5486400" cy="320040"/>
-          </a:xfrm>
-          <a:prstGeom prst="rect">
-            <a:avLst/>
-          </a:prstGeom>
-          <a:noFill/>
-        </p:spPr>
-        <p:txBody>
-          <a:bodyPr wrap="none">
-            <a:spAutoFit/>
-          </a:bodyPr>
-          <a:lstStyle/>
-          <a:p>
-            <a:r>
-              <a:rPr sz="1000">
-                <a:solidFill>
-                  <a:srgbClr val="5E6B64"/>
-                </a:solidFill>
-                <a:latin typeface="Calibri"/>
-              </a:rPr>
-              <a:t>BADM 225 · Chapter 6</a:t>
-            </a:r>
-          </a:p>
-        </p:txBody>
-      </p:sp>
-      <p:sp>
-        <p:nvSpPr>
-          <p:cNvPr id="4" name="TextBox 3" descr="Slide number 18"/>
-          <p:cNvSpPr txBox="1"/>
-          <p:nvPr/>
-        </p:nvSpPr>
-        <p:spPr>
-          <a:xfrm>
-            <a:off x="11247120" y="6446520"/>
-            <a:ext cx="640080" cy="320040"/>
-          </a:xfrm>
-          <a:prstGeom prst="rect">
-            <a:avLst/>
-          </a:prstGeom>
-          <a:noFill/>
-        </p:spPr>
-        <p:txBody>
-          <a:bodyPr wrap="none">
-            <a:spAutoFit/>
-          </a:bodyPr>
-          <a:lstStyle/>
-          <a:p>
-            <a:pPr algn="r"/>
-            <a:r>
-              <a:rPr sz="1000">
-                <a:solidFill>
-                  <a:srgbClr val="5E6B64"/>
-                </a:solidFill>
-                <a:latin typeface="Calibri"/>
-              </a:rPr>
-              <a:t>18</a:t>
-            </a:r>
-          </a:p>
-        </p:txBody>
-      </p:sp>
-      <p:sp>
-        <p:nvSpPr>
-          <p:cNvPr id="5" name="Oval 4" descr="Checkmark"/>
-          <p:cNvSpPr/>
-          <p:nvPr/>
-        </p:nvSpPr>
-        <p:spPr>
-          <a:xfrm>
-            <a:off x="640080" y="1572768"/>
-            <a:ext cx="420624" cy="420624"/>
-          </a:xfrm>
-          <a:prstGeom prst="ellipse">
-            <a:avLst/>
-          </a:prstGeom>
-          <a:solidFill>
-            <a:srgbClr val="0E4D33"/>
-          </a:solidFill>
-          <a:ln>
-            <a:noFill/>
-          </a:ln>
-          <a:effectLst/>
-        </p:spPr>
-        <p:style>
-          <a:lnRef idx="1">
-            <a:schemeClr val="accent1"/>
-          </a:lnRef>
-          <a:fillRef idx="3">
-            <a:schemeClr val="accent1"/>
-          </a:fillRef>
-          <a:effectRef idx="2">
-            <a:schemeClr val="accent1"/>
-          </a:effectRef>
-          <a:fontRef idx="minor">
-            <a:schemeClr val="lt1"/>
-          </a:fontRef>
-        </p:style>
-        <p:txBody>
-          <a:bodyPr rtlCol="0" anchor="ctr" lIns="0" rIns="0" tIns="0" bIns="0"/>
-          <a:lstStyle/>
-          <a:p>
-            <a:pPr algn="ctr"/>
-            <a:r>
-              <a:rPr sz="1100" b="1">
-                <a:solidFill>
-                  <a:srgbClr val="FFFFFF"/>
-                </a:solidFill>
-                <a:latin typeface="Calibri"/>
-              </a:rPr>
-              <a:t>✓</a:t>
-            </a:r>
-          </a:p>
-        </p:txBody>
-      </p:sp>
-      <p:sp>
-        <p:nvSpPr>
-          <p:cNvPr id="6" name="TextBox 5" descr="Takeaway 1"/>
-          <p:cNvSpPr txBox="1"/>
-          <p:nvPr/>
-        </p:nvSpPr>
-        <p:spPr>
-          <a:xfrm>
-            <a:off x="1325880" y="1554480"/>
-            <a:ext cx="10332720" cy="640080"/>
+            <a:off x="822960" y="1188720"/>
+            <a:ext cx="2743200" cy="1463040"/>
           </a:xfrm>
           <a:prstGeom prst="rect">
             <a:avLst/>
@@ -8394,80 +9053,27 @@
               </a:spcAft>
             </a:pPr>
             <a:r>
-              <a:rPr sz="1550" b="0" i="0">
-                <a:solidFill>
-                  <a:srgbClr val="212A26"/>
-                </a:solidFill>
-                <a:latin typeface="Calibri"/>
-              </a:rPr>
-              <a:t>Ask first, in question form; detail to the complete-ask standard; close with a dated reason.</a:t>
-            </a:r>
-          </a:p>
-        </p:txBody>
-      </p:sp>
-      <p:sp>
-        <p:nvSpPr>
-          <p:cNvPr id="7" name="Oval 6" descr="Checkmark"/>
-          <p:cNvSpPr/>
-          <p:nvPr/>
-        </p:nvSpPr>
-        <p:spPr>
-          <a:xfrm>
-            <a:off x="640080" y="2212848"/>
-            <a:ext cx="420624" cy="420624"/>
-          </a:xfrm>
-          <a:prstGeom prst="ellipse">
-            <a:avLst/>
-          </a:prstGeom>
-          <a:solidFill>
-            <a:srgbClr val="0E4D33"/>
-          </a:solidFill>
-          <a:ln>
-            <a:noFill/>
-          </a:ln>
-          <a:effectLst/>
-        </p:spPr>
-        <p:style>
-          <a:lnRef idx="1">
-            <a:schemeClr val="accent1"/>
-          </a:lnRef>
-          <a:fillRef idx="3">
-            <a:schemeClr val="accent1"/>
-          </a:fillRef>
-          <a:effectRef idx="2">
-            <a:schemeClr val="accent1"/>
-          </a:effectRef>
-          <a:fontRef idx="minor">
-            <a:schemeClr val="lt1"/>
-          </a:fontRef>
-        </p:style>
-        <p:txBody>
-          <a:bodyPr rtlCol="0" anchor="ctr" lIns="0" rIns="0" tIns="0" bIns="0"/>
-          <a:lstStyle/>
-          <a:p>
-            <a:pPr algn="ctr"/>
-            <a:r>
-              <a:rPr sz="1100" b="1">
-                <a:solidFill>
-                  <a:srgbClr val="FFFFFF"/>
-                </a:solidFill>
-                <a:latin typeface="Calibri"/>
-              </a:rPr>
-              <a:t>✓</a:t>
-            </a:r>
-          </a:p>
-        </p:txBody>
-      </p:sp>
-      <p:sp>
-        <p:nvSpPr>
-          <p:cNvPr id="8" name="TextBox 7" descr="Takeaway 2"/>
+              <a:rPr sz="8000" b="1" i="0">
+                <a:solidFill>
+                  <a:srgbClr val="C9931A"/>
+                </a:solidFill>
+                <a:latin typeface="Cambria"/>
+              </a:rPr>
+              <a:t>05</a:t>
+            </a:r>
+          </a:p>
+        </p:txBody>
+      </p:sp>
+      <p:sp>
+        <p:nvSpPr>
+          <p:cNvPr id="4" name="TextBox 3" descr="Section note"/>
           <p:cNvSpPr txBox="1"/>
           <p:nvPr/>
         </p:nvSpPr>
         <p:spPr>
           <a:xfrm>
-            <a:off x="1325880" y="2194560"/>
-            <a:ext cx="10332720" cy="640080"/>
+            <a:off x="822960" y="4023360"/>
+            <a:ext cx="9601200" cy="1097280"/>
           </a:xfrm>
           <a:prstGeom prst="rect">
             <a:avLst/>
@@ -8486,80 +9092,27 @@
               </a:spcAft>
             </a:pPr>
             <a:r>
-              <a:rPr sz="1550" b="0" i="0">
-                <a:solidFill>
-                  <a:srgbClr val="212A26"/>
-                </a:solidFill>
-                <a:latin typeface="Calibri"/>
-              </a:rPr>
-              <a:t>Answer in the first word; anticipate the next question; end the thread.</a:t>
-            </a:r>
-          </a:p>
-        </p:txBody>
-      </p:sp>
-      <p:sp>
-        <p:nvSpPr>
-          <p:cNvPr id="9" name="Oval 8" descr="Checkmark"/>
-          <p:cNvSpPr/>
-          <p:nvPr/>
-        </p:nvSpPr>
-        <p:spPr>
-          <a:xfrm>
-            <a:off x="640080" y="2852928"/>
-            <a:ext cx="420624" cy="420624"/>
-          </a:xfrm>
-          <a:prstGeom prst="ellipse">
-            <a:avLst/>
-          </a:prstGeom>
-          <a:solidFill>
-            <a:srgbClr val="0E4D33"/>
-          </a:solidFill>
-          <a:ln>
-            <a:noFill/>
-          </a:ln>
-          <a:effectLst/>
-        </p:spPr>
-        <p:style>
-          <a:lnRef idx="1">
-            <a:schemeClr val="accent1"/>
-          </a:lnRef>
-          <a:fillRef idx="3">
-            <a:schemeClr val="accent1"/>
-          </a:fillRef>
-          <a:effectRef idx="2">
-            <a:schemeClr val="accent1"/>
-          </a:effectRef>
-          <a:fontRef idx="minor">
-            <a:schemeClr val="lt1"/>
-          </a:fontRef>
-        </p:style>
-        <p:txBody>
-          <a:bodyPr rtlCol="0" anchor="ctr" lIns="0" rIns="0" tIns="0" bIns="0"/>
-          <a:lstStyle/>
-          <a:p>
-            <a:pPr algn="ctr"/>
-            <a:r>
-              <a:rPr sz="1100" b="1">
-                <a:solidFill>
-                  <a:srgbClr val="FFFFFF"/>
-                </a:solidFill>
-                <a:latin typeface="Calibri"/>
-              </a:rPr>
-              <a:t>✓</a:t>
-            </a:r>
-          </a:p>
-        </p:txBody>
-      </p:sp>
-      <p:sp>
-        <p:nvSpPr>
-          <p:cNvPr id="10" name="TextBox 9" descr="Takeaway 3"/>
+              <a:rPr sz="1700" b="0" i="0">
+                <a:solidFill>
+                  <a:srgbClr val="EAF1EB"/>
+                </a:solidFill>
+                <a:latin typeface="Calibri"/>
+              </a:rPr>
+              <a:t>The formal channel that signals: this one counts.</a:t>
+            </a:r>
+          </a:p>
+        </p:txBody>
+      </p:sp>
+      <p:sp>
+        <p:nvSpPr>
+          <p:cNvPr id="5" name="TextBox 4" descr="Footer: BADM 225 · Chapter 6"/>
           <p:cNvSpPr txBox="1"/>
           <p:nvPr/>
         </p:nvSpPr>
         <p:spPr>
           <a:xfrm>
-            <a:off x="1325880" y="2834640"/>
-            <a:ext cx="10332720" cy="640080"/>
+            <a:off x="502920" y="6446520"/>
+            <a:ext cx="5486400" cy="320040"/>
           </a:xfrm>
           <a:prstGeom prst="rect">
             <a:avLst/>
@@ -8567,91 +9120,33 @@
           <a:noFill/>
         </p:spPr>
         <p:txBody>
-          <a:bodyPr wrap="square">
+          <a:bodyPr wrap="none">
             <a:spAutoFit/>
           </a:bodyPr>
           <a:lstStyle/>
           <a:p>
-            <a:pPr algn="l">
-              <a:spcAft>
-                <a:spcPts val="800"/>
-              </a:spcAft>
-            </a:pPr>
-            <a:r>
-              <a:rPr sz="1550" b="0" i="0">
-                <a:solidFill>
-                  <a:srgbClr val="212A26"/>
-                </a:solidFill>
-                <a:latin typeface="Calibri"/>
-              </a:rPr>
-              <a:t>Claims: record, facts, specific remedy, deadline — confidence recruits an advocate.</a:t>
-            </a:r>
-          </a:p>
-        </p:txBody>
-      </p:sp>
-      <p:sp>
-        <p:nvSpPr>
-          <p:cNvPr id="11" name="Oval 10" descr="Checkmark"/>
-          <p:cNvSpPr/>
-          <p:nvPr/>
-        </p:nvSpPr>
-        <p:spPr>
-          <a:xfrm>
-            <a:off x="640080" y="3493008"/>
-            <a:ext cx="420624" cy="420624"/>
-          </a:xfrm>
-          <a:prstGeom prst="ellipse">
-            <a:avLst/>
-          </a:prstGeom>
-          <a:solidFill>
-            <a:srgbClr val="0E4D33"/>
-          </a:solidFill>
-          <a:ln>
-            <a:noFill/>
-          </a:ln>
-          <a:effectLst/>
-        </p:spPr>
-        <p:style>
-          <a:lnRef idx="1">
-            <a:schemeClr val="accent1"/>
-          </a:lnRef>
-          <a:fillRef idx="3">
-            <a:schemeClr val="accent1"/>
-          </a:fillRef>
-          <a:effectRef idx="2">
-            <a:schemeClr val="accent1"/>
-          </a:effectRef>
-          <a:fontRef idx="minor">
-            <a:schemeClr val="lt1"/>
-          </a:fontRef>
-        </p:style>
-        <p:txBody>
-          <a:bodyPr rtlCol="0" anchor="ctr" lIns="0" rIns="0" tIns="0" bIns="0"/>
-          <a:lstStyle/>
-          <a:p>
-            <a:pPr algn="ctr"/>
-            <a:r>
-              <a:rPr sz="1100" b="1">
-                <a:solidFill>
-                  <a:srgbClr val="FFFFFF"/>
-                </a:solidFill>
-                <a:latin typeface="Calibri"/>
-              </a:rPr>
-              <a:t>✓</a:t>
-            </a:r>
-          </a:p>
-        </p:txBody>
-      </p:sp>
-      <p:sp>
-        <p:nvSpPr>
-          <p:cNvPr id="12" name="TextBox 11" descr="Takeaway 4"/>
+            <a:r>
+              <a:rPr sz="1000">
+                <a:solidFill>
+                  <a:srgbClr val="5E6B64"/>
+                </a:solidFill>
+                <a:latin typeface="Calibri"/>
+              </a:rPr>
+              <a:t>BADM 225 · Chapter 6</a:t>
+            </a:r>
+          </a:p>
+        </p:txBody>
+      </p:sp>
+      <p:sp>
+        <p:nvSpPr>
+          <p:cNvPr id="6" name="TextBox 5" descr="Slide number 18"/>
           <p:cNvSpPr txBox="1"/>
           <p:nvPr/>
         </p:nvSpPr>
         <p:spPr>
           <a:xfrm>
-            <a:off x="1325880" y="3474720"/>
-            <a:ext cx="10332720" cy="640080"/>
+            <a:off x="11247120" y="6446520"/>
+            <a:ext cx="640080" cy="320040"/>
           </a:xfrm>
           <a:prstGeom prst="rect">
             <a:avLst/>
@@ -8659,265 +9154,20 @@
           <a:noFill/>
         </p:spPr>
         <p:txBody>
-          <a:bodyPr wrap="square">
+          <a:bodyPr wrap="none">
             <a:spAutoFit/>
           </a:bodyPr>
           <a:lstStyle/>
           <a:p>
-            <a:pPr algn="l">
-              <a:spcAft>
-                <a:spcPts val="800"/>
-              </a:spcAft>
-            </a:pPr>
-            <a:r>
-              <a:rPr sz="1550" b="0" i="0">
-                <a:solidFill>
-                  <a:srgbClr val="212A26"/>
-                </a:solidFill>
-                <a:latin typeface="Calibri"/>
-              </a:rPr>
-              <a:t>Adjustments: grant first, explain without opera, include the prevention sentence.</a:t>
-            </a:r>
-          </a:p>
-        </p:txBody>
-      </p:sp>
-      <p:sp>
-        <p:nvSpPr>
-          <p:cNvPr id="13" name="Oval 12" descr="Checkmark"/>
-          <p:cNvSpPr/>
-          <p:nvPr/>
-        </p:nvSpPr>
-        <p:spPr>
-          <a:xfrm>
-            <a:off x="640080" y="4133088"/>
-            <a:ext cx="420624" cy="420624"/>
-          </a:xfrm>
-          <a:prstGeom prst="ellipse">
-            <a:avLst/>
-          </a:prstGeom>
-          <a:solidFill>
-            <a:srgbClr val="0E4D33"/>
-          </a:solidFill>
-          <a:ln>
-            <a:noFill/>
-          </a:ln>
-          <a:effectLst/>
-        </p:spPr>
-        <p:style>
-          <a:lnRef idx="1">
-            <a:schemeClr val="accent1"/>
-          </a:lnRef>
-          <a:fillRef idx="3">
-            <a:schemeClr val="accent1"/>
-          </a:fillRef>
-          <a:effectRef idx="2">
-            <a:schemeClr val="accent1"/>
-          </a:effectRef>
-          <a:fontRef idx="minor">
-            <a:schemeClr val="lt1"/>
-          </a:fontRef>
-        </p:style>
-        <p:txBody>
-          <a:bodyPr rtlCol="0" anchor="ctr" lIns="0" rIns="0" tIns="0" bIns="0"/>
-          <a:lstStyle/>
-          <a:p>
-            <a:pPr algn="ctr"/>
-            <a:r>
-              <a:rPr sz="1100" b="1">
-                <a:solidFill>
-                  <a:srgbClr val="FFFFFF"/>
-                </a:solidFill>
-                <a:latin typeface="Calibri"/>
-              </a:rPr>
-              <a:t>✓</a:t>
-            </a:r>
-          </a:p>
-        </p:txBody>
-      </p:sp>
-      <p:sp>
-        <p:nvSpPr>
-          <p:cNvPr id="14" name="TextBox 13" descr="Takeaway 5"/>
-          <p:cNvSpPr txBox="1"/>
-          <p:nvPr/>
-        </p:nvSpPr>
-        <p:spPr>
-          <a:xfrm>
-            <a:off x="1325880" y="4114800"/>
-            <a:ext cx="10332720" cy="640080"/>
-          </a:xfrm>
-          <a:prstGeom prst="rect">
-            <a:avLst/>
-          </a:prstGeom>
-          <a:noFill/>
-        </p:spPr>
-        <p:txBody>
-          <a:bodyPr wrap="square">
-            <a:spAutoFit/>
-          </a:bodyPr>
-          <a:lstStyle/>
-          <a:p>
-            <a:pPr algn="l">
-              <a:spcAft>
-                <a:spcPts val="800"/>
-              </a:spcAft>
-            </a:pPr>
-            <a:r>
-              <a:rPr sz="1550" b="0" i="0">
-                <a:solidFill>
-                  <a:srgbClr val="212A26"/>
-                </a:solidFill>
-                <a:latin typeface="Calibri"/>
-              </a:rPr>
-              <a:t>Goodwill passes five-S; ink for milestones; never AI — the pause is the message.</a:t>
-            </a:r>
-          </a:p>
-        </p:txBody>
-      </p:sp>
-      <p:sp>
-        <p:nvSpPr>
-          <p:cNvPr id="15" name="Oval 14" descr="Checkmark"/>
-          <p:cNvSpPr/>
-          <p:nvPr/>
-        </p:nvSpPr>
-        <p:spPr>
-          <a:xfrm>
-            <a:off x="640080" y="4773168"/>
-            <a:ext cx="420624" cy="420624"/>
-          </a:xfrm>
-          <a:prstGeom prst="ellipse">
-            <a:avLst/>
-          </a:prstGeom>
-          <a:solidFill>
-            <a:srgbClr val="0E4D33"/>
-          </a:solidFill>
-          <a:ln>
-            <a:noFill/>
-          </a:ln>
-          <a:effectLst/>
-        </p:spPr>
-        <p:style>
-          <a:lnRef idx="1">
-            <a:schemeClr val="accent1"/>
-          </a:lnRef>
-          <a:fillRef idx="3">
-            <a:schemeClr val="accent1"/>
-          </a:fillRef>
-          <a:effectRef idx="2">
-            <a:schemeClr val="accent1"/>
-          </a:effectRef>
-          <a:fontRef idx="minor">
-            <a:schemeClr val="lt1"/>
-          </a:fontRef>
-        </p:style>
-        <p:txBody>
-          <a:bodyPr rtlCol="0" anchor="ctr" lIns="0" rIns="0" tIns="0" bIns="0"/>
-          <a:lstStyle/>
-          <a:p>
-            <a:pPr algn="ctr"/>
-            <a:r>
-              <a:rPr sz="1100" b="1">
-                <a:solidFill>
-                  <a:srgbClr val="FFFFFF"/>
-                </a:solidFill>
-                <a:latin typeface="Calibri"/>
-              </a:rPr>
-              <a:t>✓</a:t>
-            </a:r>
-          </a:p>
-        </p:txBody>
-      </p:sp>
-      <p:sp>
-        <p:nvSpPr>
-          <p:cNvPr id="16" name="TextBox 15" descr="Takeaway 6"/>
-          <p:cNvSpPr txBox="1"/>
-          <p:nvPr/>
-        </p:nvSpPr>
-        <p:spPr>
-          <a:xfrm>
-            <a:off x="1325880" y="4754880"/>
-            <a:ext cx="10332720" cy="640080"/>
-          </a:xfrm>
-          <a:prstGeom prst="rect">
-            <a:avLst/>
-          </a:prstGeom>
-          <a:noFill/>
-        </p:spPr>
-        <p:txBody>
-          <a:bodyPr wrap="square">
-            <a:spAutoFit/>
-          </a:bodyPr>
-          <a:lstStyle/>
-          <a:p>
-            <a:pPr algn="l">
-              <a:spcAft>
-                <a:spcPts val="800"/>
-              </a:spcAft>
-            </a:pPr>
-            <a:r>
-              <a:rPr sz="1550" b="0" i="0">
-                <a:solidFill>
-                  <a:srgbClr val="212A26"/>
-                </a:solidFill>
-                <a:latin typeface="Calibri"/>
-              </a:rPr>
-              <a:t>Instructions: numbered, imperative, preconditions first, warnings before their steps, tested on a novice.</a:t>
-            </a:r>
-          </a:p>
-        </p:txBody>
-      </p:sp>
-      <p:sp>
-        <p:nvSpPr>
-          <p:cNvPr id="17" name="Rounded Rectangle 16" descr="Practice reminder"/>
-          <p:cNvSpPr/>
-          <p:nvPr/>
-        </p:nvSpPr>
-        <p:spPr>
-          <a:xfrm>
-            <a:off x="548640" y="5468112"/>
-            <a:ext cx="10424160" cy="685800"/>
-          </a:xfrm>
-          <a:prstGeom prst="roundRect">
-            <a:avLst/>
-          </a:prstGeom>
-          <a:solidFill>
-            <a:srgbClr val="0E4D33"/>
-          </a:solidFill>
-          <a:ln>
-            <a:noFill/>
-          </a:ln>
-          <a:effectLst/>
-        </p:spPr>
-        <p:style>
-          <a:lnRef idx="1">
-            <a:schemeClr val="accent1"/>
-          </a:lnRef>
-          <a:fillRef idx="3">
-            <a:schemeClr val="accent1"/>
-          </a:fillRef>
-          <a:effectRef idx="2">
-            <a:schemeClr val="accent1"/>
-          </a:effectRef>
-          <a:fontRef idx="minor">
-            <a:schemeClr val="lt1"/>
-          </a:fontRef>
-        </p:style>
-        <p:txBody>
-          <a:bodyPr rtlCol="0" anchor="t" wrap="square" lIns="164592" rIns="164592" tIns="128016" bIns="109728"/>
-          <a:lstStyle/>
-          <a:p>
-            <a:pPr algn="l">
-              <a:spcAft>
-                <a:spcPts val="0"/>
-              </a:spcAft>
-            </a:pPr>
-            <a:r>
-              <a:rPr sz="1450" b="1" i="0">
-                <a:solidFill>
-                  <a:srgbClr val="FFFFFF"/>
-                </a:solidFill>
-                <a:latin typeface="Calibri"/>
-              </a:rPr>
-              <a:t>Practice now: course site → Chapter 6 → Practice, then the graded homework before the weekly deadline.</a:t>
+            <a:pPr algn="r"/>
+            <a:r>
+              <a:rPr sz="1000">
+                <a:solidFill>
+                  <a:srgbClr val="5E6B64"/>
+                </a:solidFill>
+                <a:latin typeface="Calibri"/>
+              </a:rPr>
+              <a:t>18</a:t>
             </a:r>
           </a:p>
         </p:txBody>
@@ -8936,7 +9186,7 @@
     <p:bg>
       <p:bgPr>
         <a:solidFill>
-          <a:srgbClr val="EAF1EB"/>
+          <a:srgbClr val="FFFFFF"/>
         </a:solidFill>
         <a:effectLst/>
       </p:bgPr>
@@ -8950,7 +9200,7 @@
       <p:grpSpPr/>
       <p:sp>
         <p:nvSpPr>
-          <p:cNvPr id="2" name="Title 1" descr="Slide title: Worth keeping"/>
+          <p:cNvPr id="2" name="Title 1" descr="Slide title: When a letter is the right channel"/>
           <p:cNvSpPr>
             <a:spLocks noGrp="1"/>
           </p:cNvSpPr>
@@ -8970,27 +9220,96 @@
           <a:p>
             <a:pPr algn="l"/>
             <a:r>
-              <a:rPr sz="3400" b="1">
+              <a:rPr sz="3200" b="1">
                 <a:solidFill>
                   <a:srgbClr val="0E4D33"/>
                 </a:solidFill>
                 <a:latin typeface="Cambria"/>
               </a:rPr>
-              <a:t>Worth keeping</a:t>
-            </a:r>
-          </a:p>
-        </p:txBody>
-      </p:sp>
-      <p:sp>
-        <p:nvSpPr>
-          <p:cNvPr id="3" name="TextBox 2" descr="Quotation"/>
+              <a:t>When a letter is the right channel</a:t>
+            </a:r>
+          </a:p>
+        </p:txBody>
+      </p:sp>
+      <p:sp>
+        <p:nvSpPr>
+          <p:cNvPr id="3" name="TextBox 2" descr="Footer: BADM 225 · Chapter 6"/>
           <p:cNvSpPr txBox="1"/>
           <p:nvPr/>
         </p:nvSpPr>
         <p:spPr>
           <a:xfrm>
-            <a:off x="1280160" y="2194560"/>
-            <a:ext cx="9601200" cy="2377440"/>
+            <a:off x="502920" y="6446520"/>
+            <a:ext cx="5486400" cy="320040"/>
+          </a:xfrm>
+          <a:prstGeom prst="rect">
+            <a:avLst/>
+          </a:prstGeom>
+          <a:noFill/>
+        </p:spPr>
+        <p:txBody>
+          <a:bodyPr wrap="none">
+            <a:spAutoFit/>
+          </a:bodyPr>
+          <a:lstStyle/>
+          <a:p>
+            <a:r>
+              <a:rPr sz="1000">
+                <a:solidFill>
+                  <a:srgbClr val="5E6B64"/>
+                </a:solidFill>
+                <a:latin typeface="Calibri"/>
+              </a:rPr>
+              <a:t>BADM 225 · Chapter 6</a:t>
+            </a:r>
+          </a:p>
+        </p:txBody>
+      </p:sp>
+      <p:sp>
+        <p:nvSpPr>
+          <p:cNvPr id="4" name="TextBox 3" descr="Slide number 19"/>
+          <p:cNvSpPr txBox="1"/>
+          <p:nvPr/>
+        </p:nvSpPr>
+        <p:spPr>
+          <a:xfrm>
+            <a:off x="11247120" y="6446520"/>
+            <a:ext cx="640080" cy="320040"/>
+          </a:xfrm>
+          <a:prstGeom prst="rect">
+            <a:avLst/>
+          </a:prstGeom>
+          <a:noFill/>
+        </p:spPr>
+        <p:txBody>
+          <a:bodyPr wrap="none">
+            <a:spAutoFit/>
+          </a:bodyPr>
+          <a:lstStyle/>
+          <a:p>
+            <a:pPr algn="r"/>
+            <a:r>
+              <a:rPr sz="1000">
+                <a:solidFill>
+                  <a:srgbClr val="5E6B64"/>
+                </a:solidFill>
+                <a:latin typeface="Calibri"/>
+              </a:rPr>
+              <a:t>19</a:t>
+            </a:r>
+          </a:p>
+        </p:txBody>
+      </p:sp>
+      <p:sp>
+        <p:nvSpPr>
+          <p:cNvPr id="5" name="TextBox 4" descr="Key points"/>
+          <p:cNvSpPr txBox="1"/>
+          <p:nvPr/>
+        </p:nvSpPr>
+        <p:spPr>
+          <a:xfrm>
+            <a:off x="548640" y="1554480"/>
+            <a:ext cx="11064240" cy="4663440"/>
           </a:xfrm>
           <a:prstGeom prst="rect">
             <a:avLst/>
@@ -9005,125 +9324,137 @@
           <a:p>
             <a:pPr algn="l">
               <a:spcAft>
-                <a:spcPts val="800"/>
+                <a:spcPts val="1200"/>
               </a:spcAft>
             </a:pPr>
             <a:r>
-              <a:rPr sz="2700" b="0" i="1">
+              <a:rPr sz="1700">
+                <a:solidFill>
+                  <a:srgbClr val="8A6410"/>
+                </a:solidFill>
+                <a:latin typeface="Calibri"/>
+              </a:rPr>
+              <a:t>▪  </a:t>
+            </a:r>
+            <a:r>
+              <a:rPr sz="1700" b="1">
+                <a:solidFill>
+                  <a:srgbClr val="0E4D33"/>
+                </a:solidFill>
+                <a:latin typeface="Calibri"/>
+              </a:rPr>
+              <a:t>Crossing the organizational boundary.  </a:t>
+            </a:r>
+            <a:r>
+              <a:rPr sz="1700" b="0" i="0">
                 <a:solidFill>
                   <a:srgbClr val="212A26"/>
                 </a:solidFill>
-                <a:latin typeface="Cambria"/>
-              </a:rPr>
-              <a:t>“Nobody remembers who answered routine mail adequately. Everybody remembers who made things easy — and who said thank you.”</a:t>
-            </a:r>
-          </a:p>
-        </p:txBody>
-      </p:sp>
-      <p:sp>
-        <p:nvSpPr>
-          <p:cNvPr id="4" name="TextBox 3" descr="Attribution"/>
-          <p:cNvSpPr txBox="1"/>
-          <p:nvPr/>
-        </p:nvSpPr>
-        <p:spPr>
-          <a:xfrm>
-            <a:off x="1280160" y="4754880"/>
-            <a:ext cx="9601200" cy="548640"/>
-          </a:xfrm>
-          <a:prstGeom prst="rect">
-            <a:avLst/>
-          </a:prstGeom>
-          <a:noFill/>
-        </p:spPr>
-        <p:txBody>
-          <a:bodyPr wrap="square">
-            <a:spAutoFit/>
-          </a:bodyPr>
-          <a:lstStyle/>
+                <a:latin typeface="Calibri"/>
+              </a:rPr>
+              <a:t>Customers, officials, other firms — the letter is the org-to-org and person-to-org register.</a:t>
+            </a:r>
+          </a:p>
           <a:p>
             <a:pPr algn="l">
               <a:spcAft>
-                <a:spcPts val="800"/>
+                <a:spcPts val="1200"/>
               </a:spcAft>
             </a:pPr>
             <a:r>
-              <a:rPr sz="1600" b="0" i="0">
-                <a:solidFill>
-                  <a:srgbClr val="5E6B64"/>
-                </a:solidFill>
-                <a:latin typeface="Calibri"/>
-              </a:rPr>
-              <a:t>— this chapter, compressed</a:t>
-            </a:r>
-          </a:p>
-        </p:txBody>
-      </p:sp>
-      <p:sp>
-        <p:nvSpPr>
-          <p:cNvPr id="5" name="TextBox 4" descr="Footer: BADM 225 · Chapter 6"/>
-          <p:cNvSpPr txBox="1"/>
-          <p:nvPr/>
-        </p:nvSpPr>
-        <p:spPr>
-          <a:xfrm>
-            <a:off x="502920" y="6446520"/>
-            <a:ext cx="5486400" cy="320040"/>
-          </a:xfrm>
-          <a:prstGeom prst="rect">
-            <a:avLst/>
-          </a:prstGeom>
-          <a:noFill/>
-        </p:spPr>
-        <p:txBody>
-          <a:bodyPr wrap="none">
-            <a:spAutoFit/>
-          </a:bodyPr>
-          <a:lstStyle/>
-          <a:p>
-            <a:r>
-              <a:rPr sz="1000">
-                <a:solidFill>
-                  <a:srgbClr val="5E6B64"/>
-                </a:solidFill>
-                <a:latin typeface="Calibri"/>
-              </a:rPr>
-              <a:t>BADM 225 · Chapter 6</a:t>
-            </a:r>
-          </a:p>
-        </p:txBody>
-      </p:sp>
-      <p:sp>
-        <p:nvSpPr>
-          <p:cNvPr id="6" name="TextBox 5" descr="Slide number 19"/>
-          <p:cNvSpPr txBox="1"/>
-          <p:nvPr/>
-        </p:nvSpPr>
-        <p:spPr>
-          <a:xfrm>
-            <a:off x="11247120" y="6446520"/>
-            <a:ext cx="640080" cy="320040"/>
-          </a:xfrm>
-          <a:prstGeom prst="rect">
-            <a:avLst/>
-          </a:prstGeom>
-          <a:noFill/>
-        </p:spPr>
-        <p:txBody>
-          <a:bodyPr wrap="none">
-            <a:spAutoFit/>
-          </a:bodyPr>
-          <a:lstStyle/>
-          <a:p>
-            <a:pPr algn="r"/>
-            <a:r>
-              <a:rPr sz="1000">
-                <a:solidFill>
-                  <a:srgbClr val="5E6B64"/>
-                </a:solidFill>
-                <a:latin typeface="Calibri"/>
-              </a:rPr>
-              <a:t>19</a:t>
+              <a:rPr sz="1700">
+                <a:solidFill>
+                  <a:srgbClr val="8A6410"/>
+                </a:solidFill>
+                <a:latin typeface="Calibri"/>
+              </a:rPr>
+              <a:t>▪  </a:t>
+            </a:r>
+            <a:r>
+              <a:rPr sz="1700" b="1">
+                <a:solidFill>
+                  <a:srgbClr val="0E4D33"/>
+                </a:solidFill>
+                <a:latin typeface="Calibri"/>
+              </a:rPr>
+              <a:t>Ceremony is part of the content.  </a:t>
+            </a:r>
+            <a:r>
+              <a:rPr sz="1700" b="0" i="0">
+                <a:solidFill>
+                  <a:srgbClr val="212A26"/>
+                </a:solidFill>
+                <a:latin typeface="Calibri"/>
+              </a:rPr>
+              <a:t>Offers, awards, formal thanks, resignations — the formality honors the moment.</a:t>
+            </a:r>
+          </a:p>
+          <a:p>
+            <a:pPr algn="l">
+              <a:spcAft>
+                <a:spcPts val="1200"/>
+              </a:spcAft>
+            </a:pPr>
+            <a:r>
+              <a:rPr sz="1700">
+                <a:solidFill>
+                  <a:srgbClr val="8A6410"/>
+                </a:solidFill>
+                <a:latin typeface="Calibri"/>
+              </a:rPr>
+              <a:t>▪  </a:t>
+            </a:r>
+            <a:r>
+              <a:rPr sz="1700" b="1">
+                <a:solidFill>
+                  <a:srgbClr val="0E4D33"/>
+                </a:solidFill>
+                <a:latin typeface="Calibri"/>
+              </a:rPr>
+              <a:t>Legal and contractual weight.  </a:t>
+            </a:r>
+            <a:r>
+              <a:rPr sz="1700" b="0" i="0">
+                <a:solidFill>
+                  <a:srgbClr val="212A26"/>
+                </a:solidFill>
+                <a:latin typeface="Calibri"/>
+              </a:rPr>
+              <a:t>Notices, agreements, and anything a lawyer may one day wave — letters are built to be exhibits.</a:t>
+            </a:r>
+          </a:p>
+          <a:p>
+            <a:pPr algn="l">
+              <a:spcAft>
+                <a:spcPts val="1200"/>
+              </a:spcAft>
+            </a:pPr>
+            <a:r>
+              <a:rPr sz="1700">
+                <a:solidFill>
+                  <a:srgbClr val="8A6410"/>
+                </a:solidFill>
+                <a:latin typeface="Calibri"/>
+              </a:rPr>
+              <a:t>▪  </a:t>
+            </a:r>
+            <a:r>
+              <a:rPr sz="1700" b="1">
+                <a:solidFill>
+                  <a:srgbClr val="0E4D33"/>
+                </a:solidFill>
+                <a:latin typeface="Calibri"/>
+              </a:rPr>
+              <a:t>The scarcity works for you.  </a:t>
+            </a:r>
+            <a:r>
+              <a:rPr sz="1700" b="0" i="0">
+                <a:solidFill>
+                  <a:srgbClr val="212A26"/>
+                </a:solidFill>
+                <a:latin typeface="Calibri"/>
+              </a:rPr>
+              <a:t>In an inbox century, letterhead is the costly signal: someone composed, printed, and signed this.</a:t>
             </a:r>
           </a:p>
         </p:txBody>
@@ -9463,7 +9794,7 @@
     <p:bg>
       <p:bgPr>
         <a:solidFill>
-          <a:srgbClr val="0E4D33"/>
+          <a:srgbClr val="FFFFFF"/>
         </a:solidFill>
         <a:effectLst/>
       </p:bgPr>
@@ -9477,7 +9808,7 @@
       <p:grpSpPr/>
       <p:sp>
         <p:nvSpPr>
-          <p:cNvPr id="2" name="Title 1" descr="Slide title: Discussion questions"/>
+          <p:cNvPr id="2" name="Title 1" descr="Slide title: Letter anatomy, top to bottom"/>
           <p:cNvSpPr>
             <a:spLocks noGrp="1"/>
           </p:cNvSpPr>
@@ -9497,27 +9828,149 @@
           <a:p>
             <a:pPr algn="l"/>
             <a:r>
-              <a:rPr sz="3400" b="1">
-                <a:solidFill>
-                  <a:srgbClr val="FFFFFF"/>
+              <a:rPr sz="3200" b="1">
+                <a:solidFill>
+                  <a:srgbClr val="0E4D33"/>
                 </a:solidFill>
                 <a:latin typeface="Cambria"/>
               </a:rPr>
-              <a:t>Discussion questions</a:t>
-            </a:r>
-          </a:p>
-        </p:txBody>
-      </p:sp>
-      <p:sp>
-        <p:nvSpPr>
-          <p:cNvPr id="3" name="TextBox 2" descr="Discussion questions"/>
+              <a:t>Letter anatomy, top to bottom</a:t>
+            </a:r>
+          </a:p>
+        </p:txBody>
+      </p:sp>
+      <p:sp>
+        <p:nvSpPr>
+          <p:cNvPr id="3" name="TextBox 2" descr="Footer: BADM 225 · Chapter 6"/>
           <p:cNvSpPr txBox="1"/>
           <p:nvPr/>
         </p:nvSpPr>
         <p:spPr>
           <a:xfrm>
-            <a:off x="731520" y="1737360"/>
-            <a:ext cx="10698480" cy="4480560"/>
+            <a:off x="502920" y="6446520"/>
+            <a:ext cx="5486400" cy="320040"/>
+          </a:xfrm>
+          <a:prstGeom prst="rect">
+            <a:avLst/>
+          </a:prstGeom>
+          <a:noFill/>
+        </p:spPr>
+        <p:txBody>
+          <a:bodyPr wrap="none">
+            <a:spAutoFit/>
+          </a:bodyPr>
+          <a:lstStyle/>
+          <a:p>
+            <a:r>
+              <a:rPr sz="1000">
+                <a:solidFill>
+                  <a:srgbClr val="5E6B64"/>
+                </a:solidFill>
+                <a:latin typeface="Calibri"/>
+              </a:rPr>
+              <a:t>BADM 225 · Chapter 6</a:t>
+            </a:r>
+          </a:p>
+        </p:txBody>
+      </p:sp>
+      <p:sp>
+        <p:nvSpPr>
+          <p:cNvPr id="4" name="TextBox 3" descr="Slide number 20"/>
+          <p:cNvSpPr txBox="1"/>
+          <p:nvPr/>
+        </p:nvSpPr>
+        <p:spPr>
+          <a:xfrm>
+            <a:off x="11247120" y="6446520"/>
+            <a:ext cx="640080" cy="320040"/>
+          </a:xfrm>
+          <a:prstGeom prst="rect">
+            <a:avLst/>
+          </a:prstGeom>
+          <a:noFill/>
+        </p:spPr>
+        <p:txBody>
+          <a:bodyPr wrap="none">
+            <a:spAutoFit/>
+          </a:bodyPr>
+          <a:lstStyle/>
+          <a:p>
+            <a:pPr algn="r"/>
+            <a:r>
+              <a:rPr sz="1000">
+                <a:solidFill>
+                  <a:srgbClr val="5E6B64"/>
+                </a:solidFill>
+                <a:latin typeface="Calibri"/>
+              </a:rPr>
+              <a:t>20</a:t>
+            </a:r>
+          </a:p>
+        </p:txBody>
+      </p:sp>
+      <p:sp>
+        <p:nvSpPr>
+          <p:cNvPr id="5" name="Oval 4" descr="Letterhead + date icon"/>
+          <p:cNvSpPr/>
+          <p:nvPr/>
+        </p:nvSpPr>
+        <p:spPr>
+          <a:xfrm>
+            <a:off x="640080" y="1655064"/>
+            <a:ext cx="566928" cy="566928"/>
+          </a:xfrm>
+          <a:prstGeom prst="ellipse">
+            <a:avLst/>
+          </a:prstGeom>
+          <a:solidFill>
+            <a:srgbClr val="0E4D33"/>
+          </a:solidFill>
+          <a:ln>
+            <a:noFill/>
+          </a:ln>
+          <a:effectLst/>
+        </p:spPr>
+        <p:style>
+          <a:lnRef idx="1">
+            <a:schemeClr val="accent1"/>
+          </a:lnRef>
+          <a:fillRef idx="3">
+            <a:schemeClr val="accent1"/>
+          </a:fillRef>
+          <a:effectRef idx="2">
+            <a:schemeClr val="accent1"/>
+          </a:effectRef>
+          <a:fontRef idx="minor">
+            <a:schemeClr val="lt1"/>
+          </a:fontRef>
+        </p:style>
+        <p:txBody>
+          <a:bodyPr rtlCol="0" anchor="ctr" lIns="0" rIns="0" tIns="0" bIns="0"/>
+          <a:lstStyle/>
+          <a:p>
+            <a:pPr algn="ctr"/>
+            <a:r>
+              <a:rPr sz="1600" b="1">
+                <a:solidFill>
+                  <a:srgbClr val="FFFFFF"/>
+                </a:solidFill>
+                <a:latin typeface="Calibri"/>
+              </a:rPr>
+              <a:t>🏛</a:t>
+            </a:r>
+          </a:p>
+        </p:txBody>
+      </p:sp>
+      <p:sp>
+        <p:nvSpPr>
+          <p:cNvPr id="6" name="TextBox 5" descr="Letterhead + date"/>
+          <p:cNvSpPr txBox="1"/>
+          <p:nvPr/>
+        </p:nvSpPr>
+        <p:spPr>
+          <a:xfrm>
+            <a:off x="1417320" y="1600200"/>
+            <a:ext cx="10241280" cy="914400"/>
           </a:xfrm>
           <a:prstGeom prst="rect">
             <a:avLst/>
@@ -9532,140 +9985,316 @@
           <a:p>
             <a:pPr algn="l">
               <a:spcAft>
-                <a:spcPts val="1800"/>
+                <a:spcPts val="200"/>
               </a:spcAft>
             </a:pPr>
             <a:r>
-              <a:rPr sz="1800" b="1">
-                <a:solidFill>
-                  <a:srgbClr val="C9931A"/>
-                </a:solidFill>
-                <a:latin typeface="Calibri"/>
-              </a:rPr>
-              <a:t>1.  </a:t>
-            </a:r>
-            <a:r>
-              <a:rPr sz="1800" b="0" i="0">
-                <a:solidFill>
-                  <a:srgbClr val="FFFFFF"/>
-                </a:solidFill>
-                <a:latin typeface="Calibri"/>
-              </a:rPr>
-              <a:t>Bring a request that failed the complete-ask test. What did the round trips cost?</a:t>
+              <a:rPr sz="1650" b="1" i="0">
+                <a:solidFill>
+                  <a:srgbClr val="0E4D33"/>
+                </a:solidFill>
+                <a:latin typeface="Cambria"/>
+              </a:rPr>
+              <a:t>Letterhead + date</a:t>
             </a:r>
           </a:p>
           <a:p>
             <a:pPr algn="l">
               <a:spcAft>
-                <a:spcPts val="1800"/>
+                <a:spcPts val="0"/>
               </a:spcAft>
             </a:pPr>
             <a:r>
-              <a:rPr sz="1800" b="1">
-                <a:solidFill>
-                  <a:srgbClr val="C9931A"/>
-                </a:solidFill>
-                <a:latin typeface="Calibri"/>
-              </a:rPr>
-              <a:t>2.  </a:t>
-            </a:r>
-            <a:r>
-              <a:rPr sz="1800" b="0" i="0">
+              <a:rPr sz="1550" b="0" i="0">
+                <a:solidFill>
+                  <a:srgbClr val="212A26"/>
+                </a:solidFill>
+                <a:latin typeface="Calibri"/>
+              </a:rPr>
+              <a:t>Who's writing and when — the date matters legally; write it unambiguously (July 15, 2026).</a:t>
+            </a:r>
+          </a:p>
+        </p:txBody>
+      </p:sp>
+      <p:sp>
+        <p:nvSpPr>
+          <p:cNvPr id="7" name="Oval 6" descr="Inside address + salutation icon"/>
+          <p:cNvSpPr/>
+          <p:nvPr/>
+        </p:nvSpPr>
+        <p:spPr>
+          <a:xfrm>
+            <a:off x="640080" y="2679192"/>
+            <a:ext cx="566928" cy="566928"/>
+          </a:xfrm>
+          <a:prstGeom prst="ellipse">
+            <a:avLst/>
+          </a:prstGeom>
+          <a:solidFill>
+            <a:srgbClr val="0E4D33"/>
+          </a:solidFill>
+          <a:ln>
+            <a:noFill/>
+          </a:ln>
+          <a:effectLst/>
+        </p:spPr>
+        <p:style>
+          <a:lnRef idx="1">
+            <a:schemeClr val="accent1"/>
+          </a:lnRef>
+          <a:fillRef idx="3">
+            <a:schemeClr val="accent1"/>
+          </a:fillRef>
+          <a:effectRef idx="2">
+            <a:schemeClr val="accent1"/>
+          </a:effectRef>
+          <a:fontRef idx="minor">
+            <a:schemeClr val="lt1"/>
+          </a:fontRef>
+        </p:style>
+        <p:txBody>
+          <a:bodyPr rtlCol="0" anchor="ctr" lIns="0" rIns="0" tIns="0" bIns="0"/>
+          <a:lstStyle/>
+          <a:p>
+            <a:pPr algn="ctr"/>
+            <a:r>
+              <a:rPr sz="1600" b="1">
                 <a:solidFill>
                   <a:srgbClr val="FFFFFF"/>
                 </a:solidFill>
                 <a:latin typeface="Calibri"/>
               </a:rPr>
-              <a:t>When did a company's complaint handling change your loyalty — either direction? Map it against the adjustment flow.</a:t>
-            </a:r>
-          </a:p>
+              <a:t>📍</a:t>
+            </a:r>
+          </a:p>
+        </p:txBody>
+      </p:sp>
+      <p:sp>
+        <p:nvSpPr>
+          <p:cNvPr id="8" name="TextBox 7" descr="Inside address + salutation"/>
+          <p:cNvSpPr txBox="1"/>
+          <p:nvPr/>
+        </p:nvSpPr>
+        <p:spPr>
+          <a:xfrm>
+            <a:off x="1417320" y="2624328"/>
+            <a:ext cx="10241280" cy="914400"/>
+          </a:xfrm>
+          <a:prstGeom prst="rect">
+            <a:avLst/>
+          </a:prstGeom>
+          <a:noFill/>
+        </p:spPr>
+        <p:txBody>
+          <a:bodyPr wrap="square">
+            <a:spAutoFit/>
+          </a:bodyPr>
+          <a:lstStyle/>
           <a:p>
             <a:pPr algn="l">
               <a:spcAft>
-                <a:spcPts val="1800"/>
+                <a:spcPts val="200"/>
               </a:spcAft>
             </a:pPr>
             <a:r>
-              <a:rPr sz="1800" b="1">
-                <a:solidFill>
-                  <a:srgbClr val="C9931A"/>
-                </a:solidFill>
-                <a:latin typeface="Calibri"/>
-              </a:rPr>
-              <a:t>3.  </a:t>
-            </a:r>
-            <a:r>
-              <a:rPr sz="1800" b="0" i="0">
-                <a:solidFill>
-                  <a:srgbClr val="FFFFFF"/>
-                </a:solidFill>
-                <a:latin typeface="Calibri"/>
-              </a:rPr>
-              <a:t>Everyone agrees goodwill notes matter; almost nobody sends them. Name the frictions — and the one you'll remove.</a:t>
+              <a:rPr sz="1650" b="1" i="0">
+                <a:solidFill>
+                  <a:srgbClr val="0E4D33"/>
+                </a:solidFill>
+                <a:latin typeface="Cambria"/>
+              </a:rPr>
+              <a:t>Inside address + salutation</a:t>
             </a:r>
           </a:p>
           <a:p>
             <a:pPr algn="l">
               <a:spcAft>
-                <a:spcPts val="1800"/>
+                <a:spcPts val="0"/>
               </a:spcAft>
             </a:pPr>
             <a:r>
-              <a:rPr sz="1800" b="1">
-                <a:solidFill>
-                  <a:srgbClr val="C9931A"/>
-                </a:solidFill>
-                <a:latin typeface="Calibri"/>
-              </a:rPr>
-              <a:t>4.  </a:t>
-            </a:r>
-            <a:r>
-              <a:rPr sz="1800" b="0" i="0">
+              <a:rPr sz="1550" b="0" i="0">
+                <a:solidFill>
+                  <a:srgbClr val="212A26"/>
+                </a:solidFill>
+                <a:latin typeface="Calibri"/>
+              </a:rPr>
+              <a:t>The recipient's name, title, organization, address — then 'Dear Ms. Okafor:' with the name verified (Chapter 4).</a:t>
+            </a:r>
+          </a:p>
+        </p:txBody>
+      </p:sp>
+      <p:sp>
+        <p:nvSpPr>
+          <p:cNvPr id="9" name="Oval 8" descr="Body in block format icon"/>
+          <p:cNvSpPr/>
+          <p:nvPr/>
+        </p:nvSpPr>
+        <p:spPr>
+          <a:xfrm>
+            <a:off x="640080" y="3703320"/>
+            <a:ext cx="566928" cy="566928"/>
+          </a:xfrm>
+          <a:prstGeom prst="ellipse">
+            <a:avLst/>
+          </a:prstGeom>
+          <a:solidFill>
+            <a:srgbClr val="0E4D33"/>
+          </a:solidFill>
+          <a:ln>
+            <a:noFill/>
+          </a:ln>
+          <a:effectLst/>
+        </p:spPr>
+        <p:style>
+          <a:lnRef idx="1">
+            <a:schemeClr val="accent1"/>
+          </a:lnRef>
+          <a:fillRef idx="3">
+            <a:schemeClr val="accent1"/>
+          </a:fillRef>
+          <a:effectRef idx="2">
+            <a:schemeClr val="accent1"/>
+          </a:effectRef>
+          <a:fontRef idx="minor">
+            <a:schemeClr val="lt1"/>
+          </a:fontRef>
+        </p:style>
+        <p:txBody>
+          <a:bodyPr rtlCol="0" anchor="ctr" lIns="0" rIns="0" tIns="0" bIns="0"/>
+          <a:lstStyle/>
+          <a:p>
+            <a:pPr algn="ctr"/>
+            <a:r>
+              <a:rPr sz="1600" b="1">
                 <a:solidFill>
                   <a:srgbClr val="FFFFFF"/>
                 </a:solidFill>
                 <a:latin typeface="Calibri"/>
               </a:rPr>
-              <a:t>Autopsy instructions that generate repeated questions where you work or study. Which element is missing?</a:t>
-            </a:r>
-          </a:p>
+              <a:t>¶</a:t>
+            </a:r>
+          </a:p>
+        </p:txBody>
+      </p:sp>
+      <p:sp>
+        <p:nvSpPr>
+          <p:cNvPr id="10" name="TextBox 9" descr="Body in block format"/>
+          <p:cNvSpPr txBox="1"/>
+          <p:nvPr/>
+        </p:nvSpPr>
+        <p:spPr>
+          <a:xfrm>
+            <a:off x="1417320" y="3648456"/>
+            <a:ext cx="10241280" cy="914400"/>
+          </a:xfrm>
+          <a:prstGeom prst="rect">
+            <a:avLst/>
+          </a:prstGeom>
+          <a:noFill/>
+        </p:spPr>
+        <p:txBody>
+          <a:bodyPr wrap="square">
+            <a:spAutoFit/>
+          </a:bodyPr>
+          <a:lstStyle/>
           <a:p>
             <a:pPr algn="l">
               <a:spcAft>
-                <a:spcPts val="1800"/>
+                <a:spcPts val="200"/>
               </a:spcAft>
             </a:pPr>
             <a:r>
-              <a:rPr sz="1800" b="1">
-                <a:solidFill>
-                  <a:srgbClr val="C9931A"/>
-                </a:solidFill>
-                <a:latin typeface="Calibri"/>
-              </a:rPr>
-              <a:t>5.  </a:t>
-            </a:r>
-            <a:r>
-              <a:rPr sz="1800" b="0" i="0">
+              <a:rPr sz="1650" b="1" i="0">
+                <a:solidFill>
+                  <a:srgbClr val="0E4D33"/>
+                </a:solidFill>
+                <a:latin typeface="Cambria"/>
+              </a:rPr>
+              <a:t>Body in block format</a:t>
+            </a:r>
+          </a:p>
+          <a:p>
+            <a:pPr algn="l">
+              <a:spcAft>
+                <a:spcPts val="0"/>
+              </a:spcAft>
+            </a:pPr>
+            <a:r>
+              <a:rPr sz="1550" b="0" i="0">
+                <a:solidFill>
+                  <a:srgbClr val="212A26"/>
+                </a:solidFill>
+                <a:latin typeface="Calibri"/>
+              </a:rPr>
+              <a:t>Everything flush left, blank line between paragraphs — the modern default. Direct pattern applies: point in paragraph one.</a:t>
+            </a:r>
+          </a:p>
+        </p:txBody>
+      </p:sp>
+      <p:sp>
+        <p:nvSpPr>
+          <p:cNvPr id="11" name="Oval 10" descr="Complimentary close + signature block icon"/>
+          <p:cNvSpPr/>
+          <p:nvPr/>
+        </p:nvSpPr>
+        <p:spPr>
+          <a:xfrm>
+            <a:off x="640080" y="4727448"/>
+            <a:ext cx="566928" cy="566928"/>
+          </a:xfrm>
+          <a:prstGeom prst="ellipse">
+            <a:avLst/>
+          </a:prstGeom>
+          <a:solidFill>
+            <a:srgbClr val="0E4D33"/>
+          </a:solidFill>
+          <a:ln>
+            <a:noFill/>
+          </a:ln>
+          <a:effectLst/>
+        </p:spPr>
+        <p:style>
+          <a:lnRef idx="1">
+            <a:schemeClr val="accent1"/>
+          </a:lnRef>
+          <a:fillRef idx="3">
+            <a:schemeClr val="accent1"/>
+          </a:fillRef>
+          <a:effectRef idx="2">
+            <a:schemeClr val="accent1"/>
+          </a:effectRef>
+          <a:fontRef idx="minor">
+            <a:schemeClr val="lt1"/>
+          </a:fontRef>
+        </p:style>
+        <p:txBody>
+          <a:bodyPr rtlCol="0" anchor="ctr" lIns="0" rIns="0" tIns="0" bIns="0"/>
+          <a:lstStyle/>
+          <a:p>
+            <a:pPr algn="ctr"/>
+            <a:r>
+              <a:rPr sz="1600" b="1">
                 <a:solidFill>
                   <a:srgbClr val="FFFFFF"/>
                 </a:solidFill>
                 <a:latin typeface="Calibri"/>
               </a:rPr>
-              <a:t>Should front-line staff grant borderline claims without approval? Argue the reciprocity math.</a:t>
-            </a:r>
-          </a:p>
-        </p:txBody>
-      </p:sp>
-      <p:sp>
-        <p:nvSpPr>
-          <p:cNvPr id="4" name="TextBox 3" descr="Footer"/>
+              <a:t>✒</a:t>
+            </a:r>
+          </a:p>
+        </p:txBody>
+      </p:sp>
+      <p:sp>
+        <p:nvSpPr>
+          <p:cNvPr id="12" name="TextBox 11" descr="Complimentary close + signature block"/>
           <p:cNvSpPr txBox="1"/>
           <p:nvPr/>
         </p:nvSpPr>
         <p:spPr>
           <a:xfrm>
-            <a:off x="502920" y="6446520"/>
-            <a:ext cx="5486400" cy="320040"/>
+            <a:off x="1417320" y="4672584"/>
+            <a:ext cx="10241280" cy="914400"/>
           </a:xfrm>
           <a:prstGeom prst="rect">
             <a:avLst/>
@@ -9673,19 +10302,148 @@
           <a:noFill/>
         </p:spPr>
         <p:txBody>
-          <a:bodyPr wrap="none">
+          <a:bodyPr wrap="square">
             <a:spAutoFit/>
           </a:bodyPr>
           <a:lstStyle/>
           <a:p>
-            <a:r>
-              <a:rPr sz="1000">
-                <a:solidFill>
-                  <a:srgbClr val="A8C4B2"/>
-                </a:solidFill>
-                <a:latin typeface="Calibri"/>
-              </a:rPr>
-              <a:t>BADM 225 · Chapter 6</a:t>
+            <a:pPr algn="l">
+              <a:spcAft>
+                <a:spcPts val="200"/>
+              </a:spcAft>
+            </a:pPr>
+            <a:r>
+              <a:rPr sz="1650" b="1" i="0">
+                <a:solidFill>
+                  <a:srgbClr val="0E4D33"/>
+                </a:solidFill>
+                <a:latin typeface="Cambria"/>
+              </a:rPr>
+              <a:t>Complimentary close + signature block</a:t>
+            </a:r>
+          </a:p>
+          <a:p>
+            <a:pPr algn="l">
+              <a:spcAft>
+                <a:spcPts val="0"/>
+              </a:spcAft>
+            </a:pPr>
+            <a:r>
+              <a:rPr sz="1550" b="0" i="0">
+                <a:solidFill>
+                  <a:srgbClr val="212A26"/>
+                </a:solidFill>
+                <a:latin typeface="Calibri"/>
+              </a:rPr>
+              <a:t>'Sincerely,' then four blank lines for ink, then typed name and title.</a:t>
+            </a:r>
+          </a:p>
+        </p:txBody>
+      </p:sp>
+      <p:sp>
+        <p:nvSpPr>
+          <p:cNvPr id="13" name="Oval 12" descr="Notations icon"/>
+          <p:cNvSpPr/>
+          <p:nvPr/>
+        </p:nvSpPr>
+        <p:spPr>
+          <a:xfrm>
+            <a:off x="640080" y="5751576"/>
+            <a:ext cx="566928" cy="566928"/>
+          </a:xfrm>
+          <a:prstGeom prst="ellipse">
+            <a:avLst/>
+          </a:prstGeom>
+          <a:solidFill>
+            <a:srgbClr val="0E4D33"/>
+          </a:solidFill>
+          <a:ln>
+            <a:noFill/>
+          </a:ln>
+          <a:effectLst/>
+        </p:spPr>
+        <p:style>
+          <a:lnRef idx="1">
+            <a:schemeClr val="accent1"/>
+          </a:lnRef>
+          <a:fillRef idx="3">
+            <a:schemeClr val="accent1"/>
+          </a:fillRef>
+          <a:effectRef idx="2">
+            <a:schemeClr val="accent1"/>
+          </a:effectRef>
+          <a:fontRef idx="minor">
+            <a:schemeClr val="lt1"/>
+          </a:fontRef>
+        </p:style>
+        <p:txBody>
+          <a:bodyPr rtlCol="0" anchor="ctr" lIns="0" rIns="0" tIns="0" bIns="0"/>
+          <a:lstStyle/>
+          <a:p>
+            <a:pPr algn="ctr"/>
+            <a:r>
+              <a:rPr sz="1600" b="1">
+                <a:solidFill>
+                  <a:srgbClr val="FFFFFF"/>
+                </a:solidFill>
+                <a:latin typeface="Calibri"/>
+              </a:rPr>
+              <a:t>📎</a:t>
+            </a:r>
+          </a:p>
+        </p:txBody>
+      </p:sp>
+      <p:sp>
+        <p:nvSpPr>
+          <p:cNvPr id="14" name="TextBox 13" descr="Notations"/>
+          <p:cNvSpPr txBox="1"/>
+          <p:nvPr/>
+        </p:nvSpPr>
+        <p:spPr>
+          <a:xfrm>
+            <a:off x="1417320" y="5696712"/>
+            <a:ext cx="10241280" cy="914400"/>
+          </a:xfrm>
+          <a:prstGeom prst="rect">
+            <a:avLst/>
+          </a:prstGeom>
+          <a:noFill/>
+        </p:spPr>
+        <p:txBody>
+          <a:bodyPr wrap="square">
+            <a:spAutoFit/>
+          </a:bodyPr>
+          <a:lstStyle/>
+          <a:p>
+            <a:pPr algn="l">
+              <a:spcAft>
+                <a:spcPts val="200"/>
+              </a:spcAft>
+            </a:pPr>
+            <a:r>
+              <a:rPr sz="1650" b="1" i="0">
+                <a:solidFill>
+                  <a:srgbClr val="0E4D33"/>
+                </a:solidFill>
+                <a:latin typeface="Cambria"/>
+              </a:rPr>
+              <a:t>Notations</a:t>
+            </a:r>
+          </a:p>
+          <a:p>
+            <a:pPr algn="l">
+              <a:spcAft>
+                <a:spcPts val="0"/>
+              </a:spcAft>
+            </a:pPr>
+            <a:r>
+              <a:rPr sz="1550" b="0" i="0">
+                <a:solidFill>
+                  <a:srgbClr val="212A26"/>
+                </a:solidFill>
+                <a:latin typeface="Calibri"/>
+              </a:rPr>
+              <a:t>'Enclosure' and 'cc:' lines at the bottom — the letter's version of the attachment paperclip.</a:t>
             </a:r>
           </a:p>
         </p:txBody>
@@ -9718,7 +10476,7 @@
       <p:grpSpPr/>
       <p:sp>
         <p:nvSpPr>
-          <p:cNvPr id="2" name="Title 1" descr="Slide title: Your next steps"/>
+          <p:cNvPr id="2" name="Title 1" descr="Slide title: The introductory letter — this unit's assignment"/>
           <p:cNvSpPr>
             <a:spLocks noGrp="1"/>
           </p:cNvSpPr>
@@ -9744,7 +10502,7 @@
                 </a:solidFill>
                 <a:latin typeface="Cambria"/>
               </a:rPr>
-              <a:t>Your next steps</a:t>
+              <a:t>The introductory letter — this unit's assignment</a:t>
             </a:r>
           </a:p>
         </p:txBody>
@@ -9861,7 +10619,7 @@
                 </a:solidFill>
                 <a:latin typeface="Calibri"/>
               </a:rPr>
-              <a:t>Practice:  </a:t>
+              <a:t>Paragraph one: who you are and why you're writing.  </a:t>
             </a:r>
             <a:r>
               <a:rPr sz="1700" b="0" i="0">
@@ -9870,7 +10628,7 @@
                 </a:solidFill>
                 <a:latin typeface="Calibri"/>
               </a:rPr>
-              <a:t>Course site → Chapter 6 → Practice questions (instant feedback, unlimited tries).</a:t>
+              <a:t>Both, in two sentences — the reader shouldn't finish the paragraph still wondering.</a:t>
             </a:r>
           </a:p>
           <a:p>
@@ -9895,7 +10653,7 @@
                 </a:solidFill>
                 <a:latin typeface="Calibri"/>
               </a:rPr>
-              <a:t>Graded:  </a:t>
+              <a:t>Paragraph two: the substance.  </a:t>
             </a:r>
             <a:r>
               <a:rPr sz="1700" b="0" i="0">
@@ -9904,7 +10662,7 @@
                 </a:solidFill>
                 <a:latin typeface="Calibri"/>
               </a:rPr>
-              <a:t>Complete the Chapter 6 homework on the site; paste your completion code into the Blackboard assignment before the weekly deadline.</a:t>
+              <a:t>What you offer or ask, with the specifics that make a response possible (the complete-ask standard again).</a:t>
             </a:r>
           </a:p>
           <a:p>
@@ -9929,7 +10687,7 @@
                 </a:solidFill>
                 <a:latin typeface="Calibri"/>
               </a:rPr>
-              <a:t>Write:  </a:t>
+              <a:t>Paragraph three: the forward close.  </a:t>
             </a:r>
             <a:r>
               <a:rPr sz="1700" b="0" i="0">
@@ -9938,7 +10696,7 @@
                 </a:solidFill>
                 <a:latin typeface="Calibri"/>
               </a:rPr>
-              <a:t>Your introductory letter (this unit's assignment) — Figure 1's request pattern in letter dress.</a:t>
+              <a:t>The concrete next step — who contacts whom, how, by when.</a:t>
             </a:r>
           </a:p>
           <a:p>
@@ -9963,7 +10721,7 @@
                 </a:solidFill>
                 <a:latin typeface="Calibri"/>
               </a:rPr>
-              <a:t>Send:  </a:t>
+              <a:t>The register check:  </a:t>
             </a:r>
             <a:r>
               <a:rPr sz="1700" b="0" i="0">
@@ -9972,9 +10730,366 @@
                 </a:solidFill>
                 <a:latin typeface="Calibri"/>
               </a:rPr>
-              <a:t>One real five-S goodwill note this week. Note what comes back.</a:t>
-            </a:r>
-          </a:p>
+              <a:t>warmer than a memo, tighter than a chat — professional, but a human being wrote it.</a:t>
+            </a:r>
+          </a:p>
+        </p:txBody>
+      </p:sp>
+    </p:spTree>
+  </p:cSld>
+  <p:clrMapOvr>
+    <a:masterClrMapping/>
+  </p:clrMapOvr>
+</p:sld>
+</file>
+
+<file path=ppt/slides/slide22.xml><?xml version="1.0" encoding="utf-8"?>
+<p:sld xmlns:a="http://schemas.openxmlformats.org/drawingml/2006/main" xmlns:p="http://schemas.openxmlformats.org/presentationml/2006/main" xmlns:r="http://schemas.openxmlformats.org/officeDocument/2006/relationships">
+  <p:cSld>
+    <p:bg>
+      <p:bgPr>
+        <a:solidFill>
+          <a:srgbClr val="0E4D33"/>
+        </a:solidFill>
+        <a:effectLst/>
+      </p:bgPr>
+    </p:bg>
+    <p:spTree>
+      <p:nvGrpSpPr>
+        <p:cNvPr id="1" name=""/>
+        <p:cNvGrpSpPr/>
+        <p:nvPr/>
+      </p:nvGrpSpPr>
+      <p:grpSpPr/>
+      <p:sp>
+        <p:nvSpPr>
+          <p:cNvPr id="2" name="Title 1" descr="Slide title: Announcements, confirmations, welcomes"/>
+          <p:cNvSpPr>
+            <a:spLocks noGrp="1"/>
+          </p:cNvSpPr>
+          <p:nvPr>
+            <p:ph type="title"/>
+          </p:nvPr>
+        </p:nvSpPr>
+        <p:spPr>
+          <a:xfrm>
+            <a:off x="822960" y="2834640"/>
+            <a:ext cx="10515600" cy="914400"/>
+          </a:xfrm>
+        </p:spPr>
+        <p:txBody>
+          <a:bodyPr wrap="square"/>
+          <a:lstStyle/>
+          <a:p>
+            <a:pPr algn="l"/>
+            <a:r>
+              <a:rPr sz="4000" b="1">
+                <a:solidFill>
+                  <a:srgbClr val="FFFFFF"/>
+                </a:solidFill>
+                <a:latin typeface="Cambria"/>
+              </a:rPr>
+              <a:t>Announcements, confirmations, welcomes</a:t>
+            </a:r>
+          </a:p>
+        </p:txBody>
+      </p:sp>
+      <p:sp>
+        <p:nvSpPr>
+          <p:cNvPr id="3" name="TextBox 2" descr="Section number 06"/>
+          <p:cNvSpPr txBox="1"/>
+          <p:nvPr/>
+        </p:nvSpPr>
+        <p:spPr>
+          <a:xfrm>
+            <a:off x="822960" y="1188720"/>
+            <a:ext cx="2743200" cy="1463040"/>
+          </a:xfrm>
+          <a:prstGeom prst="rect">
+            <a:avLst/>
+          </a:prstGeom>
+          <a:noFill/>
+        </p:spPr>
+        <p:txBody>
+          <a:bodyPr wrap="square">
+            <a:spAutoFit/>
+          </a:bodyPr>
+          <a:lstStyle/>
+          <a:p>
+            <a:pPr algn="l">
+              <a:spcAft>
+                <a:spcPts val="800"/>
+              </a:spcAft>
+            </a:pPr>
+            <a:r>
+              <a:rPr sz="8000" b="1" i="0">
+                <a:solidFill>
+                  <a:srgbClr val="C9931A"/>
+                </a:solidFill>
+                <a:latin typeface="Cambria"/>
+              </a:rPr>
+              <a:t>06</a:t>
+            </a:r>
+          </a:p>
+        </p:txBody>
+      </p:sp>
+      <p:sp>
+        <p:nvSpPr>
+          <p:cNvPr id="4" name="TextBox 3" descr="Section note"/>
+          <p:cNvSpPr txBox="1"/>
+          <p:nvPr/>
+        </p:nvSpPr>
+        <p:spPr>
+          <a:xfrm>
+            <a:off x="822960" y="4023360"/>
+            <a:ext cx="9601200" cy="1097280"/>
+          </a:xfrm>
+          <a:prstGeom prst="rect">
+            <a:avLst/>
+          </a:prstGeom>
+          <a:noFill/>
+        </p:spPr>
+        <p:txBody>
+          <a:bodyPr wrap="square">
+            <a:spAutoFit/>
+          </a:bodyPr>
+          <a:lstStyle/>
+          <a:p>
+            <a:pPr algn="l">
+              <a:spcAft>
+                <a:spcPts val="800"/>
+              </a:spcAft>
+            </a:pPr>
+            <a:r>
+              <a:rPr sz="1700" b="0" i="0">
+                <a:solidFill>
+                  <a:srgbClr val="EAF1EB"/>
+                </a:solidFill>
+                <a:latin typeface="Calibri"/>
+              </a:rPr>
+              <a:t>The quiet genres that keep organizations running on rails.</a:t>
+            </a:r>
+          </a:p>
+        </p:txBody>
+      </p:sp>
+      <p:sp>
+        <p:nvSpPr>
+          <p:cNvPr id="5" name="TextBox 4" descr="Footer: BADM 225 · Chapter 6"/>
+          <p:cNvSpPr txBox="1"/>
+          <p:nvPr/>
+        </p:nvSpPr>
+        <p:spPr>
+          <a:xfrm>
+            <a:off x="502920" y="6446520"/>
+            <a:ext cx="5486400" cy="320040"/>
+          </a:xfrm>
+          <a:prstGeom prst="rect">
+            <a:avLst/>
+          </a:prstGeom>
+          <a:noFill/>
+        </p:spPr>
+        <p:txBody>
+          <a:bodyPr wrap="none">
+            <a:spAutoFit/>
+          </a:bodyPr>
+          <a:lstStyle/>
+          <a:p>
+            <a:r>
+              <a:rPr sz="1000">
+                <a:solidFill>
+                  <a:srgbClr val="5E6B64"/>
+                </a:solidFill>
+                <a:latin typeface="Calibri"/>
+              </a:rPr>
+              <a:t>BADM 225 · Chapter 6</a:t>
+            </a:r>
+          </a:p>
+        </p:txBody>
+      </p:sp>
+      <p:sp>
+        <p:nvSpPr>
+          <p:cNvPr id="6" name="TextBox 5" descr="Slide number 22"/>
+          <p:cNvSpPr txBox="1"/>
+          <p:nvPr/>
+        </p:nvSpPr>
+        <p:spPr>
+          <a:xfrm>
+            <a:off x="11247120" y="6446520"/>
+            <a:ext cx="640080" cy="320040"/>
+          </a:xfrm>
+          <a:prstGeom prst="rect">
+            <a:avLst/>
+          </a:prstGeom>
+          <a:noFill/>
+        </p:spPr>
+        <p:txBody>
+          <a:bodyPr wrap="none">
+            <a:spAutoFit/>
+          </a:bodyPr>
+          <a:lstStyle/>
+          <a:p>
+            <a:pPr algn="r"/>
+            <a:r>
+              <a:rPr sz="1000">
+                <a:solidFill>
+                  <a:srgbClr val="5E6B64"/>
+                </a:solidFill>
+                <a:latin typeface="Calibri"/>
+              </a:rPr>
+              <a:t>22</a:t>
+            </a:r>
+          </a:p>
+        </p:txBody>
+      </p:sp>
+    </p:spTree>
+  </p:cSld>
+  <p:clrMapOvr>
+    <a:masterClrMapping/>
+  </p:clrMapOvr>
+</p:sld>
+</file>
+
+<file path=ppt/slides/slide23.xml><?xml version="1.0" encoding="utf-8"?>
+<p:sld xmlns:a="http://schemas.openxmlformats.org/drawingml/2006/main" xmlns:p="http://schemas.openxmlformats.org/presentationml/2006/main" xmlns:r="http://schemas.openxmlformats.org/officeDocument/2006/relationships">
+  <p:cSld>
+    <p:bg>
+      <p:bgPr>
+        <a:solidFill>
+          <a:srgbClr val="FFFFFF"/>
+        </a:solidFill>
+        <a:effectLst/>
+      </p:bgPr>
+    </p:bg>
+    <p:spTree>
+      <p:nvGrpSpPr>
+        <p:cNvPr id="1" name=""/>
+        <p:cNvGrpSpPr/>
+        <p:nvPr/>
+      </p:nvGrpSpPr>
+      <p:grpSpPr/>
+      <p:sp>
+        <p:nvSpPr>
+          <p:cNvPr id="2" name="Title 1" descr="Slide title: Good-news and neutral announcements"/>
+          <p:cNvSpPr>
+            <a:spLocks noGrp="1"/>
+          </p:cNvSpPr>
+          <p:nvPr>
+            <p:ph type="title"/>
+          </p:nvPr>
+        </p:nvSpPr>
+        <p:spPr>
+          <a:xfrm>
+            <a:off x="502920" y="411480"/>
+            <a:ext cx="11155680" cy="914400"/>
+          </a:xfrm>
+        </p:spPr>
+        <p:txBody>
+          <a:bodyPr wrap="square"/>
+          <a:lstStyle/>
+          <a:p>
+            <a:pPr algn="l"/>
+            <a:r>
+              <a:rPr sz="3200" b="1">
+                <a:solidFill>
+                  <a:srgbClr val="0E4D33"/>
+                </a:solidFill>
+                <a:latin typeface="Cambria"/>
+              </a:rPr>
+              <a:t>Good-news and neutral announcements</a:t>
+            </a:r>
+          </a:p>
+        </p:txBody>
+      </p:sp>
+      <p:sp>
+        <p:nvSpPr>
+          <p:cNvPr id="3" name="TextBox 2" descr="Footer: BADM 225 · Chapter 6"/>
+          <p:cNvSpPr txBox="1"/>
+          <p:nvPr/>
+        </p:nvSpPr>
+        <p:spPr>
+          <a:xfrm>
+            <a:off x="502920" y="6446520"/>
+            <a:ext cx="5486400" cy="320040"/>
+          </a:xfrm>
+          <a:prstGeom prst="rect">
+            <a:avLst/>
+          </a:prstGeom>
+          <a:noFill/>
+        </p:spPr>
+        <p:txBody>
+          <a:bodyPr wrap="none">
+            <a:spAutoFit/>
+          </a:bodyPr>
+          <a:lstStyle/>
+          <a:p>
+            <a:r>
+              <a:rPr sz="1000">
+                <a:solidFill>
+                  <a:srgbClr val="5E6B64"/>
+                </a:solidFill>
+                <a:latin typeface="Calibri"/>
+              </a:rPr>
+              <a:t>BADM 225 · Chapter 6</a:t>
+            </a:r>
+          </a:p>
+        </p:txBody>
+      </p:sp>
+      <p:sp>
+        <p:nvSpPr>
+          <p:cNvPr id="4" name="TextBox 3" descr="Slide number 23"/>
+          <p:cNvSpPr txBox="1"/>
+          <p:nvPr/>
+        </p:nvSpPr>
+        <p:spPr>
+          <a:xfrm>
+            <a:off x="11247120" y="6446520"/>
+            <a:ext cx="640080" cy="320040"/>
+          </a:xfrm>
+          <a:prstGeom prst="rect">
+            <a:avLst/>
+          </a:prstGeom>
+          <a:noFill/>
+        </p:spPr>
+        <p:txBody>
+          <a:bodyPr wrap="none">
+            <a:spAutoFit/>
+          </a:bodyPr>
+          <a:lstStyle/>
+          <a:p>
+            <a:pPr algn="r"/>
+            <a:r>
+              <a:rPr sz="1000">
+                <a:solidFill>
+                  <a:srgbClr val="5E6B64"/>
+                </a:solidFill>
+                <a:latin typeface="Calibri"/>
+              </a:rPr>
+              <a:t>23</a:t>
+            </a:r>
+          </a:p>
+        </p:txBody>
+      </p:sp>
+      <p:sp>
+        <p:nvSpPr>
+          <p:cNvPr id="5" name="TextBox 4" descr="Key points"/>
+          <p:cNvSpPr txBox="1"/>
+          <p:nvPr/>
+        </p:nvSpPr>
+        <p:spPr>
+          <a:xfrm>
+            <a:off x="548640" y="1554480"/>
+            <a:ext cx="11064240" cy="4663440"/>
+          </a:xfrm>
+          <a:prstGeom prst="rect">
+            <a:avLst/>
+          </a:prstGeom>
+          <a:noFill/>
+        </p:spPr>
+        <p:txBody>
+          <a:bodyPr wrap="square">
+            <a:spAutoFit/>
+          </a:bodyPr>
+          <a:lstStyle/>
           <a:p>
             <a:pPr algn="l">
               <a:spcAft>
@@ -9997,7 +11112,7 @@
                 </a:solidFill>
                 <a:latin typeface="Calibri"/>
               </a:rPr>
-              <a:t>Coming next:  </a:t>
+              <a:t>Lead with the news, not the process.  </a:t>
             </a:r>
             <a:r>
               <a:rPr sz="1700" b="0" i="0">
@@ -10006,7 +11121,2281 @@
                 </a:solidFill>
                 <a:latin typeface="Calibri"/>
               </a:rPr>
-              <a:t>Chapter 7 — negative messages: when the answer is no and the reader's day is about to get worse.</a:t>
+              <a:t>'The office closes at noon on July 3' — never 'As part of our ongoing commitment to work-life balance…'</a:t>
+            </a:r>
+          </a:p>
+          <a:p>
+            <a:pPr algn="l">
+              <a:spcAft>
+                <a:spcPts val="1200"/>
+              </a:spcAft>
+            </a:pPr>
+            <a:r>
+              <a:rPr sz="1700">
+                <a:solidFill>
+                  <a:srgbClr val="8A6410"/>
+                </a:solidFill>
+                <a:latin typeface="Calibri"/>
+              </a:rPr>
+              <a:t>▪  </a:t>
+            </a:r>
+            <a:r>
+              <a:rPr sz="1700" b="1">
+                <a:solidFill>
+                  <a:srgbClr val="0E4D33"/>
+                </a:solidFill>
+                <a:latin typeface="Calibri"/>
+              </a:rPr>
+              <a:t>Answer the reader's three questions in order:  </a:t>
+            </a:r>
+            <a:r>
+              <a:rPr sz="1700" b="0" i="0">
+                <a:solidFill>
+                  <a:srgbClr val="212A26"/>
+                </a:solidFill>
+                <a:latin typeface="Calibri"/>
+              </a:rPr>
+              <a:t>What's changing? Am I affected, and how? What do I do, by when?</a:t>
+            </a:r>
+          </a:p>
+          <a:p>
+            <a:pPr algn="l">
+              <a:spcAft>
+                <a:spcPts val="1200"/>
+              </a:spcAft>
+            </a:pPr>
+            <a:r>
+              <a:rPr sz="1700">
+                <a:solidFill>
+                  <a:srgbClr val="8A6410"/>
+                </a:solidFill>
+                <a:latin typeface="Calibri"/>
+              </a:rPr>
+              <a:t>▪  </a:t>
+            </a:r>
+            <a:r>
+              <a:rPr sz="1700" b="1">
+                <a:solidFill>
+                  <a:srgbClr val="0E4D33"/>
+                </a:solidFill>
+                <a:latin typeface="Calibri"/>
+              </a:rPr>
+              <a:t>One channel for questions, named.  </a:t>
+            </a:r>
+            <a:r>
+              <a:rPr sz="1700" b="0" i="0">
+                <a:solidFill>
+                  <a:srgbClr val="212A26"/>
+                </a:solidFill>
+                <a:latin typeface="Calibri"/>
+              </a:rPr>
+              <a:t>'Questions: reply to Dana, not all' — or the announcement becomes forty separate conversations.</a:t>
+            </a:r>
+          </a:p>
+          <a:p>
+            <a:pPr algn="l">
+              <a:spcAft>
+                <a:spcPts val="1200"/>
+              </a:spcAft>
+            </a:pPr>
+            <a:r>
+              <a:rPr sz="1700">
+                <a:solidFill>
+                  <a:srgbClr val="8A6410"/>
+                </a:solidFill>
+                <a:latin typeface="Calibri"/>
+              </a:rPr>
+              <a:t>▪  </a:t>
+            </a:r>
+            <a:r>
+              <a:rPr sz="1700" b="1">
+                <a:solidFill>
+                  <a:srgbClr val="0E4D33"/>
+                </a:solidFill>
+                <a:latin typeface="Calibri"/>
+              </a:rPr>
+              <a:t>Time it for the affected, not the announcer.  </a:t>
+            </a:r>
+            <a:r>
+              <a:rPr sz="1700" b="0" i="0">
+                <a:solidFill>
+                  <a:srgbClr val="212A26"/>
+                </a:solidFill>
+                <a:latin typeface="Calibri"/>
+              </a:rPr>
+              <a:t>News that changes Monday's work goes out Thursday, not Monday at 8:59.</a:t>
+            </a:r>
+          </a:p>
+        </p:txBody>
+      </p:sp>
+    </p:spTree>
+  </p:cSld>
+  <p:clrMapOvr>
+    <a:masterClrMapping/>
+  </p:clrMapOvr>
+</p:sld>
+</file>
+
+<file path=ppt/slides/slide24.xml><?xml version="1.0" encoding="utf-8"?>
+<p:sld xmlns:a="http://schemas.openxmlformats.org/drawingml/2006/main" xmlns:p="http://schemas.openxmlformats.org/presentationml/2006/main" xmlns:r="http://schemas.openxmlformats.org/officeDocument/2006/relationships">
+  <p:cSld>
+    <p:bg>
+      <p:bgPr>
+        <a:solidFill>
+          <a:srgbClr val="FFFFFF"/>
+        </a:solidFill>
+        <a:effectLst/>
+      </p:bgPr>
+    </p:bg>
+    <p:spTree>
+      <p:nvGrpSpPr>
+        <p:cNvPr id="1" name=""/>
+        <p:cNvGrpSpPr/>
+        <p:nvPr/>
+      </p:nvGrpSpPr>
+      <p:grpSpPr/>
+      <p:sp>
+        <p:nvSpPr>
+          <p:cNvPr id="2" name="Title 1" descr="Slide title: Confirmations: the thread-enders"/>
+          <p:cNvSpPr>
+            <a:spLocks noGrp="1"/>
+          </p:cNvSpPr>
+          <p:nvPr>
+            <p:ph type="title"/>
+          </p:nvPr>
+        </p:nvSpPr>
+        <p:spPr>
+          <a:xfrm>
+            <a:off x="502920" y="411480"/>
+            <a:ext cx="11155680" cy="914400"/>
+          </a:xfrm>
+        </p:spPr>
+        <p:txBody>
+          <a:bodyPr wrap="square"/>
+          <a:lstStyle/>
+          <a:p>
+            <a:pPr algn="l"/>
+            <a:r>
+              <a:rPr sz="3200" b="1">
+                <a:solidFill>
+                  <a:srgbClr val="0E4D33"/>
+                </a:solidFill>
+                <a:latin typeface="Cambria"/>
+              </a:rPr>
+              <a:t>Confirmations: the thread-enders</a:t>
+            </a:r>
+          </a:p>
+        </p:txBody>
+      </p:sp>
+      <p:sp>
+        <p:nvSpPr>
+          <p:cNvPr id="3" name="TextBox 2" descr="Footer: BADM 225 · Chapter 6"/>
+          <p:cNvSpPr txBox="1"/>
+          <p:nvPr/>
+        </p:nvSpPr>
+        <p:spPr>
+          <a:xfrm>
+            <a:off x="502920" y="6446520"/>
+            <a:ext cx="5486400" cy="320040"/>
+          </a:xfrm>
+          <a:prstGeom prst="rect">
+            <a:avLst/>
+          </a:prstGeom>
+          <a:noFill/>
+        </p:spPr>
+        <p:txBody>
+          <a:bodyPr wrap="none">
+            <a:spAutoFit/>
+          </a:bodyPr>
+          <a:lstStyle/>
+          <a:p>
+            <a:r>
+              <a:rPr sz="1000">
+                <a:solidFill>
+                  <a:srgbClr val="5E6B64"/>
+                </a:solidFill>
+                <a:latin typeface="Calibri"/>
+              </a:rPr>
+              <a:t>BADM 225 · Chapter 6</a:t>
+            </a:r>
+          </a:p>
+        </p:txBody>
+      </p:sp>
+      <p:sp>
+        <p:nvSpPr>
+          <p:cNvPr id="4" name="TextBox 3" descr="Slide number 24"/>
+          <p:cNvSpPr txBox="1"/>
+          <p:nvPr/>
+        </p:nvSpPr>
+        <p:spPr>
+          <a:xfrm>
+            <a:off x="11247120" y="6446520"/>
+            <a:ext cx="640080" cy="320040"/>
+          </a:xfrm>
+          <a:prstGeom prst="rect">
+            <a:avLst/>
+          </a:prstGeom>
+          <a:noFill/>
+        </p:spPr>
+        <p:txBody>
+          <a:bodyPr wrap="none">
+            <a:spAutoFit/>
+          </a:bodyPr>
+          <a:lstStyle/>
+          <a:p>
+            <a:pPr algn="r"/>
+            <a:r>
+              <a:rPr sz="1000">
+                <a:solidFill>
+                  <a:srgbClr val="5E6B64"/>
+                </a:solidFill>
+                <a:latin typeface="Calibri"/>
+              </a:rPr>
+              <a:t>24</a:t>
+            </a:r>
+          </a:p>
+        </p:txBody>
+      </p:sp>
+      <p:sp>
+        <p:nvSpPr>
+          <p:cNvPr id="5" name="TextBox 4" descr="Key points"/>
+          <p:cNvSpPr txBox="1"/>
+          <p:nvPr/>
+        </p:nvSpPr>
+        <p:spPr>
+          <a:xfrm>
+            <a:off x="548640" y="1554480"/>
+            <a:ext cx="11064240" cy="4663440"/>
+          </a:xfrm>
+          <a:prstGeom prst="rect">
+            <a:avLst/>
+          </a:prstGeom>
+          <a:noFill/>
+        </p:spPr>
+        <p:txBody>
+          <a:bodyPr wrap="square">
+            <a:spAutoFit/>
+          </a:bodyPr>
+          <a:lstStyle/>
+          <a:p>
+            <a:pPr algn="l">
+              <a:spcAft>
+                <a:spcPts val="1200"/>
+              </a:spcAft>
+            </a:pPr>
+            <a:r>
+              <a:rPr sz="1700">
+                <a:solidFill>
+                  <a:srgbClr val="8A6410"/>
+                </a:solidFill>
+                <a:latin typeface="Calibri"/>
+              </a:rPr>
+              <a:t>▪  </a:t>
+            </a:r>
+            <a:r>
+              <a:rPr sz="1700" b="1">
+                <a:solidFill>
+                  <a:srgbClr val="0E4D33"/>
+                </a:solidFill>
+                <a:latin typeface="Calibri"/>
+              </a:rPr>
+              <a:t>Restate the terms, don't reference them.  </a:t>
+            </a:r>
+            <a:r>
+              <a:rPr sz="1700" b="0" i="0">
+                <a:solidFill>
+                  <a:srgbClr val="212A26"/>
+                </a:solidFill>
+                <a:latin typeface="Calibri"/>
+              </a:rPr>
+              <a:t>'Confirming: 500 units at $12.40, delivered June 30 to the Fargo warehouse' — the numbers live IN the confirmation.</a:t>
+            </a:r>
+          </a:p>
+          <a:p>
+            <a:pPr algn="l">
+              <a:spcAft>
+                <a:spcPts val="1200"/>
+              </a:spcAft>
+            </a:pPr>
+            <a:r>
+              <a:rPr sz="1700">
+                <a:solidFill>
+                  <a:srgbClr val="8A6410"/>
+                </a:solidFill>
+                <a:latin typeface="Calibri"/>
+              </a:rPr>
+              <a:t>▪  </a:t>
+            </a:r>
+            <a:r>
+              <a:rPr sz="1700" b="1">
+                <a:solidFill>
+                  <a:srgbClr val="0E4D33"/>
+                </a:solidFill>
+                <a:latin typeface="Calibri"/>
+              </a:rPr>
+              <a:t>Send it while memory is fresh.  </a:t>
+            </a:r>
+            <a:r>
+              <a:rPr sz="1700" b="0" i="0">
+                <a:solidFill>
+                  <a:srgbClr val="212A26"/>
+                </a:solidFill>
+                <a:latin typeface="Calibri"/>
+              </a:rPr>
+              <a:t>Same day as the call or meeting; a confirmation of last week's conversation confirms nobody's memory.</a:t>
+            </a:r>
+          </a:p>
+          <a:p>
+            <a:pPr algn="l">
+              <a:spcAft>
+                <a:spcPts val="1200"/>
+              </a:spcAft>
+            </a:pPr>
+            <a:r>
+              <a:rPr sz="1700">
+                <a:solidFill>
+                  <a:srgbClr val="8A6410"/>
+                </a:solidFill>
+                <a:latin typeface="Calibri"/>
+              </a:rPr>
+              <a:t>▪  </a:t>
+            </a:r>
+            <a:r>
+              <a:rPr sz="1700" b="1">
+                <a:solidFill>
+                  <a:srgbClr val="0E4D33"/>
+                </a:solidFill>
+                <a:latin typeface="Calibri"/>
+              </a:rPr>
+              <a:t>Invite correction explicitly.  </a:t>
+            </a:r>
+            <a:r>
+              <a:rPr sz="1700" b="0" i="0">
+                <a:solidFill>
+                  <a:srgbClr val="212A26"/>
+                </a:solidFill>
+                <a:latin typeface="Calibri"/>
+              </a:rPr>
+              <a:t>'If any detail doesn't match your notes, tell me by Friday' — silence then becomes agreement, fairly.</a:t>
+            </a:r>
+          </a:p>
+          <a:p>
+            <a:pPr algn="l">
+              <a:spcAft>
+                <a:spcPts val="1200"/>
+              </a:spcAft>
+            </a:pPr>
+            <a:r>
+              <a:rPr sz="1700">
+                <a:solidFill>
+                  <a:srgbClr val="8A6410"/>
+                </a:solidFill>
+                <a:latin typeface="Calibri"/>
+              </a:rPr>
+              <a:t>▪  </a:t>
+            </a:r>
+            <a:r>
+              <a:rPr sz="1700" b="1">
+                <a:solidFill>
+                  <a:srgbClr val="0E4D33"/>
+                </a:solidFill>
+                <a:latin typeface="Calibri"/>
+              </a:rPr>
+              <a:t>This is the record being born.  </a:t>
+            </a:r>
+            <a:r>
+              <a:rPr sz="1700" b="0" i="0">
+                <a:solidFill>
+                  <a:srgbClr val="212A26"/>
+                </a:solidFill>
+                <a:latin typeface="Calibri"/>
+              </a:rPr>
+              <a:t>Chapter 5's graduation rule: spoken agreements become written ones, or they become disputes.</a:t>
+            </a:r>
+          </a:p>
+        </p:txBody>
+      </p:sp>
+    </p:spTree>
+  </p:cSld>
+  <p:clrMapOvr>
+    <a:masterClrMapping/>
+  </p:clrMapOvr>
+</p:sld>
+</file>
+
+<file path=ppt/slides/slide25.xml><?xml version="1.0" encoding="utf-8"?>
+<p:sld xmlns:a="http://schemas.openxmlformats.org/drawingml/2006/main" xmlns:p="http://schemas.openxmlformats.org/presentationml/2006/main" xmlns:r="http://schemas.openxmlformats.org/officeDocument/2006/relationships">
+  <p:cSld>
+    <p:bg>
+      <p:bgPr>
+        <a:solidFill>
+          <a:srgbClr val="FFFFFF"/>
+        </a:solidFill>
+        <a:effectLst/>
+      </p:bgPr>
+    </p:bg>
+    <p:spTree>
+      <p:nvGrpSpPr>
+        <p:cNvPr id="1" name=""/>
+        <p:cNvGrpSpPr/>
+        <p:nvPr/>
+      </p:nvGrpSpPr>
+      <p:grpSpPr/>
+      <p:sp>
+        <p:nvSpPr>
+          <p:cNvPr id="2" name="Title 1" descr="Slide title: The welcome message"/>
+          <p:cNvSpPr>
+            <a:spLocks noGrp="1"/>
+          </p:cNvSpPr>
+          <p:nvPr>
+            <p:ph type="title"/>
+          </p:nvPr>
+        </p:nvSpPr>
+        <p:spPr>
+          <a:xfrm>
+            <a:off x="502920" y="411480"/>
+            <a:ext cx="11155680" cy="914400"/>
+          </a:xfrm>
+        </p:spPr>
+        <p:txBody>
+          <a:bodyPr wrap="square"/>
+          <a:lstStyle/>
+          <a:p>
+            <a:pPr algn="l"/>
+            <a:r>
+              <a:rPr sz="3200" b="1">
+                <a:solidFill>
+                  <a:srgbClr val="0E4D33"/>
+                </a:solidFill>
+                <a:latin typeface="Cambria"/>
+              </a:rPr>
+              <a:t>The welcome message</a:t>
+            </a:r>
+          </a:p>
+        </p:txBody>
+      </p:sp>
+      <p:sp>
+        <p:nvSpPr>
+          <p:cNvPr id="3" name="TextBox 2" descr="Footer: BADM 225 · Chapter 6"/>
+          <p:cNvSpPr txBox="1"/>
+          <p:nvPr/>
+        </p:nvSpPr>
+        <p:spPr>
+          <a:xfrm>
+            <a:off x="502920" y="6446520"/>
+            <a:ext cx="5486400" cy="320040"/>
+          </a:xfrm>
+          <a:prstGeom prst="rect">
+            <a:avLst/>
+          </a:prstGeom>
+          <a:noFill/>
+        </p:spPr>
+        <p:txBody>
+          <a:bodyPr wrap="none">
+            <a:spAutoFit/>
+          </a:bodyPr>
+          <a:lstStyle/>
+          <a:p>
+            <a:r>
+              <a:rPr sz="1000">
+                <a:solidFill>
+                  <a:srgbClr val="5E6B64"/>
+                </a:solidFill>
+                <a:latin typeface="Calibri"/>
+              </a:rPr>
+              <a:t>BADM 225 · Chapter 6</a:t>
+            </a:r>
+          </a:p>
+        </p:txBody>
+      </p:sp>
+      <p:sp>
+        <p:nvSpPr>
+          <p:cNvPr id="4" name="TextBox 3" descr="Slide number 25"/>
+          <p:cNvSpPr txBox="1"/>
+          <p:nvPr/>
+        </p:nvSpPr>
+        <p:spPr>
+          <a:xfrm>
+            <a:off x="11247120" y="6446520"/>
+            <a:ext cx="640080" cy="320040"/>
+          </a:xfrm>
+          <a:prstGeom prst="rect">
+            <a:avLst/>
+          </a:prstGeom>
+          <a:noFill/>
+        </p:spPr>
+        <p:txBody>
+          <a:bodyPr wrap="none">
+            <a:spAutoFit/>
+          </a:bodyPr>
+          <a:lstStyle/>
+          <a:p>
+            <a:pPr algn="r"/>
+            <a:r>
+              <a:rPr sz="1000">
+                <a:solidFill>
+                  <a:srgbClr val="5E6B64"/>
+                </a:solidFill>
+                <a:latin typeface="Calibri"/>
+              </a:rPr>
+              <a:t>25</a:t>
+            </a:r>
+          </a:p>
+        </p:txBody>
+      </p:sp>
+      <p:sp>
+        <p:nvSpPr>
+          <p:cNvPr id="5" name="TextBox 4" descr="Key points"/>
+          <p:cNvSpPr txBox="1"/>
+          <p:nvPr/>
+        </p:nvSpPr>
+        <p:spPr>
+          <a:xfrm>
+            <a:off x="548640" y="1554480"/>
+            <a:ext cx="11064240" cy="4663440"/>
+          </a:xfrm>
+          <a:prstGeom prst="rect">
+            <a:avLst/>
+          </a:prstGeom>
+          <a:noFill/>
+        </p:spPr>
+        <p:txBody>
+          <a:bodyPr wrap="square">
+            <a:spAutoFit/>
+          </a:bodyPr>
+          <a:lstStyle/>
+          <a:p>
+            <a:pPr algn="l">
+              <a:spcAft>
+                <a:spcPts val="1200"/>
+              </a:spcAft>
+            </a:pPr>
+            <a:r>
+              <a:rPr sz="1700">
+                <a:solidFill>
+                  <a:srgbClr val="8A6410"/>
+                </a:solidFill>
+                <a:latin typeface="Calibri"/>
+              </a:rPr>
+              <a:t>▪  </a:t>
+            </a:r>
+            <a:r>
+              <a:rPr sz="1700" b="1">
+                <a:solidFill>
+                  <a:srgbClr val="0E4D33"/>
+                </a:solidFill>
+                <a:latin typeface="Calibri"/>
+              </a:rPr>
+              <a:t>To a new colleague or client, day one:  </a:t>
+            </a:r>
+            <a:r>
+              <a:rPr sz="1700" b="0" i="0">
+                <a:solidFill>
+                  <a:srgbClr val="212A26"/>
+                </a:solidFill>
+                <a:latin typeface="Calibri"/>
+              </a:rPr>
+              <a:t>warmth plus logistics — what happens next, where things live, who their humans are.</a:t>
+            </a:r>
+          </a:p>
+          <a:p>
+            <a:pPr algn="l">
+              <a:spcAft>
+                <a:spcPts val="1200"/>
+              </a:spcAft>
+            </a:pPr>
+            <a:r>
+              <a:rPr sz="1700">
+                <a:solidFill>
+                  <a:srgbClr val="8A6410"/>
+                </a:solidFill>
+                <a:latin typeface="Calibri"/>
+              </a:rPr>
+              <a:t>▪  </a:t>
+            </a:r>
+            <a:r>
+              <a:rPr sz="1700" b="1">
+                <a:solidFill>
+                  <a:srgbClr val="0E4D33"/>
+                </a:solidFill>
+                <a:latin typeface="Calibri"/>
+              </a:rPr>
+              <a:t>Name a person, not a department.  </a:t>
+            </a:r>
+            <a:r>
+              <a:rPr sz="1700" b="0" i="0">
+                <a:solidFill>
+                  <a:srgbClr val="212A26"/>
+                </a:solidFill>
+                <a:latin typeface="Calibri"/>
+              </a:rPr>
+              <a:t>'Your first stop is Maya (maya@…), who runs onboarding' beats 'contact HR with any questions.'</a:t>
+            </a:r>
+          </a:p>
+          <a:p>
+            <a:pPr algn="l">
+              <a:spcAft>
+                <a:spcPts val="1200"/>
+              </a:spcAft>
+            </a:pPr>
+            <a:r>
+              <a:rPr sz="1700">
+                <a:solidFill>
+                  <a:srgbClr val="8A6410"/>
+                </a:solidFill>
+                <a:latin typeface="Calibri"/>
+              </a:rPr>
+              <a:t>▪  </a:t>
+            </a:r>
+            <a:r>
+              <a:rPr sz="1700" b="1">
+                <a:solidFill>
+                  <a:srgbClr val="0E4D33"/>
+                </a:solidFill>
+                <a:latin typeface="Calibri"/>
+              </a:rPr>
+              <a:t>One first step, not twelve.  </a:t>
+            </a:r>
+            <a:r>
+              <a:rPr sz="1700" b="0" i="0">
+                <a:solidFill>
+                  <a:srgbClr val="212A26"/>
+                </a:solidFill>
+                <a:latin typeface="Calibri"/>
+              </a:rPr>
+              <a:t>The welcome that lists everything due in month one reads as a warning. Give the next action and the map's location.</a:t>
+            </a:r>
+          </a:p>
+          <a:p>
+            <a:pPr algn="l">
+              <a:spcAft>
+                <a:spcPts val="1200"/>
+              </a:spcAft>
+            </a:pPr>
+            <a:r>
+              <a:rPr sz="1700">
+                <a:solidFill>
+                  <a:srgbClr val="8A6410"/>
+                </a:solidFill>
+                <a:latin typeface="Calibri"/>
+              </a:rPr>
+              <a:t>▪  </a:t>
+            </a:r>
+            <a:r>
+              <a:rPr sz="1700" b="1">
+                <a:solidFill>
+                  <a:srgbClr val="0E4D33"/>
+                </a:solidFill>
+                <a:latin typeface="Calibri"/>
+              </a:rPr>
+              <a:t>It sets the relationship's tone —  </a:t>
+            </a:r>
+            <a:r>
+              <a:rPr sz="1700" b="0" i="0">
+                <a:solidFill>
+                  <a:srgbClr val="212A26"/>
+                </a:solidFill>
+                <a:latin typeface="Calibri"/>
+              </a:rPr>
+              <a:t>the first message anyone receives from you or your team is the one they'll remember as 'what this place is like.'</a:t>
+            </a:r>
+          </a:p>
+        </p:txBody>
+      </p:sp>
+    </p:spTree>
+  </p:cSld>
+  <p:clrMapOvr>
+    <a:masterClrMapping/>
+  </p:clrMapOvr>
+</p:sld>
+</file>
+
+<file path=ppt/slides/slide26.xml><?xml version="1.0" encoding="utf-8"?>
+<p:sld xmlns:a="http://schemas.openxmlformats.org/drawingml/2006/main" xmlns:p="http://schemas.openxmlformats.org/presentationml/2006/main" xmlns:r="http://schemas.openxmlformats.org/officeDocument/2006/relationships">
+  <p:cSld>
+    <p:bg>
+      <p:bgPr>
+        <a:solidFill>
+          <a:srgbClr val="FFFFFF"/>
+        </a:solidFill>
+        <a:effectLst/>
+      </p:bgPr>
+    </p:bg>
+    <p:spTree>
+      <p:nvGrpSpPr>
+        <p:cNvPr id="1" name=""/>
+        <p:cNvGrpSpPr/>
+        <p:nvPr/>
+      </p:nvGrpSpPr>
+      <p:grpSpPr/>
+      <p:sp>
+        <p:nvSpPr>
+          <p:cNvPr id="2" name="Title 1" descr="Slide title: Recommendations and referrals"/>
+          <p:cNvSpPr>
+            <a:spLocks noGrp="1"/>
+          </p:cNvSpPr>
+          <p:nvPr>
+            <p:ph type="title"/>
+          </p:nvPr>
+        </p:nvSpPr>
+        <p:spPr>
+          <a:xfrm>
+            <a:off x="502920" y="411480"/>
+            <a:ext cx="11155680" cy="914400"/>
+          </a:xfrm>
+        </p:spPr>
+        <p:txBody>
+          <a:bodyPr wrap="square"/>
+          <a:lstStyle/>
+          <a:p>
+            <a:pPr algn="l"/>
+            <a:r>
+              <a:rPr sz="3200" b="1">
+                <a:solidFill>
+                  <a:srgbClr val="0E4D33"/>
+                </a:solidFill>
+                <a:latin typeface="Cambria"/>
+              </a:rPr>
+              <a:t>Recommendations and referrals</a:t>
+            </a:r>
+          </a:p>
+        </p:txBody>
+      </p:sp>
+      <p:sp>
+        <p:nvSpPr>
+          <p:cNvPr id="3" name="TextBox 2" descr="Footer: BADM 225 · Chapter 6"/>
+          <p:cNvSpPr txBox="1"/>
+          <p:nvPr/>
+        </p:nvSpPr>
+        <p:spPr>
+          <a:xfrm>
+            <a:off x="502920" y="6446520"/>
+            <a:ext cx="5486400" cy="320040"/>
+          </a:xfrm>
+          <a:prstGeom prst="rect">
+            <a:avLst/>
+          </a:prstGeom>
+          <a:noFill/>
+        </p:spPr>
+        <p:txBody>
+          <a:bodyPr wrap="none">
+            <a:spAutoFit/>
+          </a:bodyPr>
+          <a:lstStyle/>
+          <a:p>
+            <a:r>
+              <a:rPr sz="1000">
+                <a:solidFill>
+                  <a:srgbClr val="5E6B64"/>
+                </a:solidFill>
+                <a:latin typeface="Calibri"/>
+              </a:rPr>
+              <a:t>BADM 225 · Chapter 6</a:t>
+            </a:r>
+          </a:p>
+        </p:txBody>
+      </p:sp>
+      <p:sp>
+        <p:nvSpPr>
+          <p:cNvPr id="4" name="TextBox 3" descr="Slide number 26"/>
+          <p:cNvSpPr txBox="1"/>
+          <p:nvPr/>
+        </p:nvSpPr>
+        <p:spPr>
+          <a:xfrm>
+            <a:off x="11247120" y="6446520"/>
+            <a:ext cx="640080" cy="320040"/>
+          </a:xfrm>
+          <a:prstGeom prst="rect">
+            <a:avLst/>
+          </a:prstGeom>
+          <a:noFill/>
+        </p:spPr>
+        <p:txBody>
+          <a:bodyPr wrap="none">
+            <a:spAutoFit/>
+          </a:bodyPr>
+          <a:lstStyle/>
+          <a:p>
+            <a:pPr algn="r"/>
+            <a:r>
+              <a:rPr sz="1000">
+                <a:solidFill>
+                  <a:srgbClr val="5E6B64"/>
+                </a:solidFill>
+                <a:latin typeface="Calibri"/>
+              </a:rPr>
+              <a:t>26</a:t>
+            </a:r>
+          </a:p>
+        </p:txBody>
+      </p:sp>
+      <p:sp>
+        <p:nvSpPr>
+          <p:cNvPr id="5" name="TextBox 4" descr="Key points"/>
+          <p:cNvSpPr txBox="1"/>
+          <p:nvPr/>
+        </p:nvSpPr>
+        <p:spPr>
+          <a:xfrm>
+            <a:off x="548640" y="1554480"/>
+            <a:ext cx="11064240" cy="4663440"/>
+          </a:xfrm>
+          <a:prstGeom prst="rect">
+            <a:avLst/>
+          </a:prstGeom>
+          <a:noFill/>
+        </p:spPr>
+        <p:txBody>
+          <a:bodyPr wrap="square">
+            <a:spAutoFit/>
+          </a:bodyPr>
+          <a:lstStyle/>
+          <a:p>
+            <a:pPr algn="l">
+              <a:spcAft>
+                <a:spcPts val="1200"/>
+              </a:spcAft>
+            </a:pPr>
+            <a:r>
+              <a:rPr sz="1700">
+                <a:solidFill>
+                  <a:srgbClr val="8A6410"/>
+                </a:solidFill>
+                <a:latin typeface="Calibri"/>
+              </a:rPr>
+              <a:t>▪  </a:t>
+            </a:r>
+            <a:r>
+              <a:rPr sz="1700" b="1">
+                <a:solidFill>
+                  <a:srgbClr val="0E4D33"/>
+                </a:solidFill>
+                <a:latin typeface="Calibri"/>
+              </a:rPr>
+              <a:t>Vouch only for what you observed.  </a:t>
+            </a:r>
+            <a:r>
+              <a:rPr sz="1700" b="0" i="0">
+                <a:solidFill>
+                  <a:srgbClr val="212A26"/>
+                </a:solidFill>
+                <a:latin typeface="Calibri"/>
+              </a:rPr>
+              <a:t>'She ran our audit for two years; the findings were clean twice' — specifics are the currency, adjectives are filler.</a:t>
+            </a:r>
+          </a:p>
+          <a:p>
+            <a:pPr algn="l">
+              <a:spcAft>
+                <a:spcPts val="1200"/>
+              </a:spcAft>
+            </a:pPr>
+            <a:r>
+              <a:rPr sz="1700">
+                <a:solidFill>
+                  <a:srgbClr val="8A6410"/>
+                </a:solidFill>
+                <a:latin typeface="Calibri"/>
+              </a:rPr>
+              <a:t>▪  </a:t>
+            </a:r>
+            <a:r>
+              <a:rPr sz="1700" b="1">
+                <a:solidFill>
+                  <a:srgbClr val="0E4D33"/>
+                </a:solidFill>
+                <a:latin typeface="Calibri"/>
+              </a:rPr>
+              <a:t>The genre runs on YOUR credibility.  </a:t>
+            </a:r>
+            <a:r>
+              <a:rPr sz="1700" b="0" i="0">
+                <a:solidFill>
+                  <a:srgbClr val="212A26"/>
+                </a:solidFill>
+                <a:latin typeface="Calibri"/>
+              </a:rPr>
+              <a:t>Every inflated recommendation you sign devalues the next one — recommenders get reputations too.</a:t>
+            </a:r>
+          </a:p>
+          <a:p>
+            <a:pPr algn="l">
+              <a:spcAft>
+                <a:spcPts val="1200"/>
+              </a:spcAft>
+            </a:pPr>
+            <a:r>
+              <a:rPr sz="1700">
+                <a:solidFill>
+                  <a:srgbClr val="8A6410"/>
+                </a:solidFill>
+                <a:latin typeface="Calibri"/>
+              </a:rPr>
+              <a:t>▪  </a:t>
+            </a:r>
+            <a:r>
+              <a:rPr sz="1700" b="1">
+                <a:solidFill>
+                  <a:srgbClr val="0E4D33"/>
+                </a:solidFill>
+                <a:latin typeface="Calibri"/>
+              </a:rPr>
+              <a:t>Can't recommend honestly? Decline honestly.  </a:t>
+            </a:r>
+            <a:r>
+              <a:rPr sz="1700" b="0" i="0">
+                <a:solidFill>
+                  <a:srgbClr val="212A26"/>
+                </a:solidFill>
+                <a:latin typeface="Calibri"/>
+              </a:rPr>
+              <a:t>'I don't think I'm the right reference for this role' is kinder than a visibly tepid letter — and everyone can read tepid.</a:t>
+            </a:r>
+          </a:p>
+          <a:p>
+            <a:pPr algn="l">
+              <a:spcAft>
+                <a:spcPts val="1200"/>
+              </a:spcAft>
+            </a:pPr>
+            <a:r>
+              <a:rPr sz="1700">
+                <a:solidFill>
+                  <a:srgbClr val="8A6410"/>
+                </a:solidFill>
+                <a:latin typeface="Calibri"/>
+              </a:rPr>
+              <a:t>▪  </a:t>
+            </a:r>
+            <a:r>
+              <a:rPr sz="1700" b="1">
+                <a:solidFill>
+                  <a:srgbClr val="0E4D33"/>
+                </a:solidFill>
+                <a:latin typeface="Calibri"/>
+              </a:rPr>
+              <a:t>Make referrals a warm handoff:  </a:t>
+            </a:r>
+            <a:r>
+              <a:rPr sz="1700" b="0" i="0">
+                <a:solidFill>
+                  <a:srgbClr val="212A26"/>
+                </a:solidFill>
+                <a:latin typeface="Calibri"/>
+              </a:rPr>
+              <a:t>introduce both parties, state why the match makes sense, then step out and let them work.</a:t>
+            </a:r>
+          </a:p>
+        </p:txBody>
+      </p:sp>
+    </p:spTree>
+  </p:cSld>
+  <p:clrMapOvr>
+    <a:masterClrMapping/>
+  </p:clrMapOvr>
+</p:sld>
+</file>
+
+<file path=ppt/slides/slide27.xml><?xml version="1.0" encoding="utf-8"?>
+<p:sld xmlns:a="http://schemas.openxmlformats.org/drawingml/2006/main" xmlns:p="http://schemas.openxmlformats.org/presentationml/2006/main" xmlns:r="http://schemas.openxmlformats.org/officeDocument/2006/relationships">
+  <p:cSld>
+    <p:bg>
+      <p:bgPr>
+        <a:solidFill>
+          <a:srgbClr val="FFFFFF"/>
+        </a:solidFill>
+        <a:effectLst/>
+      </p:bgPr>
+    </p:bg>
+    <p:spTree>
+      <p:nvGrpSpPr>
+        <p:cNvPr id="1" name=""/>
+        <p:cNvGrpSpPr/>
+        <p:nvPr/>
+      </p:nvGrpSpPr>
+      <p:grpSpPr/>
+      <p:sp>
+        <p:nvSpPr>
+          <p:cNvPr id="2" name="Title 1" descr="Slide title: Praise travels up, credit travels down"/>
+          <p:cNvSpPr>
+            <a:spLocks noGrp="1"/>
+          </p:cNvSpPr>
+          <p:nvPr>
+            <p:ph type="title"/>
+          </p:nvPr>
+        </p:nvSpPr>
+        <p:spPr>
+          <a:xfrm>
+            <a:off x="502920" y="411480"/>
+            <a:ext cx="11155680" cy="914400"/>
+          </a:xfrm>
+        </p:spPr>
+        <p:txBody>
+          <a:bodyPr wrap="square"/>
+          <a:lstStyle/>
+          <a:p>
+            <a:pPr algn="l"/>
+            <a:r>
+              <a:rPr sz="3200" b="1">
+                <a:solidFill>
+                  <a:srgbClr val="0E4D33"/>
+                </a:solidFill>
+                <a:latin typeface="Cambria"/>
+              </a:rPr>
+              <a:t>Praise travels up, credit travels down</a:t>
+            </a:r>
+          </a:p>
+        </p:txBody>
+      </p:sp>
+      <p:sp>
+        <p:nvSpPr>
+          <p:cNvPr id="3" name="TextBox 2" descr="Footer: BADM 225 · Chapter 6"/>
+          <p:cNvSpPr txBox="1"/>
+          <p:nvPr/>
+        </p:nvSpPr>
+        <p:spPr>
+          <a:xfrm>
+            <a:off x="502920" y="6446520"/>
+            <a:ext cx="5486400" cy="320040"/>
+          </a:xfrm>
+          <a:prstGeom prst="rect">
+            <a:avLst/>
+          </a:prstGeom>
+          <a:noFill/>
+        </p:spPr>
+        <p:txBody>
+          <a:bodyPr wrap="none">
+            <a:spAutoFit/>
+          </a:bodyPr>
+          <a:lstStyle/>
+          <a:p>
+            <a:r>
+              <a:rPr sz="1000">
+                <a:solidFill>
+                  <a:srgbClr val="5E6B64"/>
+                </a:solidFill>
+                <a:latin typeface="Calibri"/>
+              </a:rPr>
+              <a:t>BADM 225 · Chapter 6</a:t>
+            </a:r>
+          </a:p>
+        </p:txBody>
+      </p:sp>
+      <p:sp>
+        <p:nvSpPr>
+          <p:cNvPr id="4" name="TextBox 3" descr="Slide number 27"/>
+          <p:cNvSpPr txBox="1"/>
+          <p:nvPr/>
+        </p:nvSpPr>
+        <p:spPr>
+          <a:xfrm>
+            <a:off x="11247120" y="6446520"/>
+            <a:ext cx="640080" cy="320040"/>
+          </a:xfrm>
+          <a:prstGeom prst="rect">
+            <a:avLst/>
+          </a:prstGeom>
+          <a:noFill/>
+        </p:spPr>
+        <p:txBody>
+          <a:bodyPr wrap="none">
+            <a:spAutoFit/>
+          </a:bodyPr>
+          <a:lstStyle/>
+          <a:p>
+            <a:pPr algn="r"/>
+            <a:r>
+              <a:rPr sz="1000">
+                <a:solidFill>
+                  <a:srgbClr val="5E6B64"/>
+                </a:solidFill>
+                <a:latin typeface="Calibri"/>
+              </a:rPr>
+              <a:t>27</a:t>
+            </a:r>
+          </a:p>
+        </p:txBody>
+      </p:sp>
+      <p:sp>
+        <p:nvSpPr>
+          <p:cNvPr id="5" name="TextBox 4" descr="Key points"/>
+          <p:cNvSpPr txBox="1"/>
+          <p:nvPr/>
+        </p:nvSpPr>
+        <p:spPr>
+          <a:xfrm>
+            <a:off x="548640" y="1554480"/>
+            <a:ext cx="11064240" cy="4663440"/>
+          </a:xfrm>
+          <a:prstGeom prst="rect">
+            <a:avLst/>
+          </a:prstGeom>
+          <a:noFill/>
+        </p:spPr>
+        <p:txBody>
+          <a:bodyPr wrap="square">
+            <a:spAutoFit/>
+          </a:bodyPr>
+          <a:lstStyle/>
+          <a:p>
+            <a:pPr algn="l">
+              <a:spcAft>
+                <a:spcPts val="1200"/>
+              </a:spcAft>
+            </a:pPr>
+            <a:r>
+              <a:rPr sz="1700">
+                <a:solidFill>
+                  <a:srgbClr val="8A6410"/>
+                </a:solidFill>
+                <a:latin typeface="Calibri"/>
+              </a:rPr>
+              <a:t>▪  </a:t>
+            </a:r>
+            <a:r>
+              <a:rPr sz="1700" b="1">
+                <a:solidFill>
+                  <a:srgbClr val="0E4D33"/>
+                </a:solidFill>
+                <a:latin typeface="Calibri"/>
+              </a:rPr>
+              <a:t>Praise in public, correct in private.  </a:t>
+            </a:r>
+            <a:r>
+              <a:rPr sz="1700" b="0" i="0">
+                <a:solidFill>
+                  <a:srgbClr val="212A26"/>
+                </a:solidFill>
+                <a:latin typeface="Calibri"/>
+              </a:rPr>
+              <a:t>The goodwill note's public cousin: recognition in the channel, the meeting, the newsletter.</a:t>
+            </a:r>
+          </a:p>
+          <a:p>
+            <a:pPr algn="l">
+              <a:spcAft>
+                <a:spcPts val="1200"/>
+              </a:spcAft>
+            </a:pPr>
+            <a:r>
+              <a:rPr sz="1700">
+                <a:solidFill>
+                  <a:srgbClr val="8A6410"/>
+                </a:solidFill>
+                <a:latin typeface="Calibri"/>
+              </a:rPr>
+              <a:t>▪  </a:t>
+            </a:r>
+            <a:r>
+              <a:rPr sz="1700" b="1">
+                <a:solidFill>
+                  <a:srgbClr val="0E4D33"/>
+                </a:solidFill>
+                <a:latin typeface="Calibri"/>
+              </a:rPr>
+              <a:t>CC the manager — as a gift.  </a:t>
+            </a:r>
+            <a:r>
+              <a:rPr sz="1700" b="0" i="0">
+                <a:solidFill>
+                  <a:srgbClr val="212A26"/>
+                </a:solidFill>
+                <a:latin typeface="Calibri"/>
+              </a:rPr>
+              <a:t>'CCing Dr. Reyes so she knows what your triage saved us' turns a thank-you into a career artifact.</a:t>
+            </a:r>
+          </a:p>
+          <a:p>
+            <a:pPr algn="l">
+              <a:spcAft>
+                <a:spcPts val="1200"/>
+              </a:spcAft>
+            </a:pPr>
+            <a:r>
+              <a:rPr sz="1700">
+                <a:solidFill>
+                  <a:srgbClr val="8A6410"/>
+                </a:solidFill>
+                <a:latin typeface="Calibri"/>
+              </a:rPr>
+              <a:t>▪  </a:t>
+            </a:r>
+            <a:r>
+              <a:rPr sz="1700" b="1">
+                <a:solidFill>
+                  <a:srgbClr val="0E4D33"/>
+                </a:solidFill>
+                <a:latin typeface="Calibri"/>
+              </a:rPr>
+              <a:t>Pass credit downward relentlessly.  </a:t>
+            </a:r>
+            <a:r>
+              <a:rPr sz="1700" b="0" i="0">
+                <a:solidFill>
+                  <a:srgbClr val="212A26"/>
+                </a:solidFill>
+                <a:latin typeface="Calibri"/>
+              </a:rPr>
+              <a:t>'The analysis is Maya's' costs nothing and is remembered forever — hoarded credit is remembered too.</a:t>
+            </a:r>
+          </a:p>
+          <a:p>
+            <a:pPr algn="l">
+              <a:spcAft>
+                <a:spcPts val="1200"/>
+              </a:spcAft>
+            </a:pPr>
+            <a:r>
+              <a:rPr sz="1700">
+                <a:solidFill>
+                  <a:srgbClr val="8A6410"/>
+                </a:solidFill>
+                <a:latin typeface="Calibri"/>
+              </a:rPr>
+              <a:t>▪  </a:t>
+            </a:r>
+            <a:r>
+              <a:rPr sz="1700" b="1">
+                <a:solidFill>
+                  <a:srgbClr val="0E4D33"/>
+                </a:solidFill>
+                <a:latin typeface="Calibri"/>
+              </a:rPr>
+              <a:t>Written praise is permanent praise.  </a:t>
+            </a:r>
+            <a:r>
+              <a:rPr sz="1700" b="0" i="0">
+                <a:solidFill>
+                  <a:srgbClr val="212A26"/>
+                </a:solidFill>
+                <a:latin typeface="Calibri"/>
+              </a:rPr>
+              <a:t>The five-S note that reaches a personnel file outlives every hallway compliment.</a:t>
+            </a:r>
+          </a:p>
+        </p:txBody>
+      </p:sp>
+    </p:spTree>
+  </p:cSld>
+  <p:clrMapOvr>
+    <a:masterClrMapping/>
+  </p:clrMapOvr>
+</p:sld>
+</file>
+
+<file path=ppt/slides/slide28.xml><?xml version="1.0" encoding="utf-8"?>
+<p:sld xmlns:a="http://schemas.openxmlformats.org/drawingml/2006/main" xmlns:p="http://schemas.openxmlformats.org/presentationml/2006/main" xmlns:r="http://schemas.openxmlformats.org/officeDocument/2006/relationships">
+  <p:cSld>
+    <p:bg>
+      <p:bgPr>
+        <a:solidFill>
+          <a:srgbClr val="FFFFFF"/>
+        </a:solidFill>
+        <a:effectLst/>
+      </p:bgPr>
+    </p:bg>
+    <p:spTree>
+      <p:nvGrpSpPr>
+        <p:cNvPr id="1" name=""/>
+        <p:cNvGrpSpPr/>
+        <p:nvPr/>
+      </p:nvGrpSpPr>
+      <p:grpSpPr/>
+      <p:sp>
+        <p:nvSpPr>
+          <p:cNvPr id="2" name="Title 1" descr="Slide title: Case: the confirmation that settled the dispute"/>
+          <p:cNvSpPr>
+            <a:spLocks noGrp="1"/>
+          </p:cNvSpPr>
+          <p:nvPr>
+            <p:ph type="title"/>
+          </p:nvPr>
+        </p:nvSpPr>
+        <p:spPr>
+          <a:xfrm>
+            <a:off x="502920" y="411480"/>
+            <a:ext cx="11155680" cy="914400"/>
+          </a:xfrm>
+        </p:spPr>
+        <p:txBody>
+          <a:bodyPr wrap="square"/>
+          <a:lstStyle/>
+          <a:p>
+            <a:pPr algn="l"/>
+            <a:r>
+              <a:rPr sz="3200" b="1">
+                <a:solidFill>
+                  <a:srgbClr val="0E4D33"/>
+                </a:solidFill>
+                <a:latin typeface="Cambria"/>
+              </a:rPr>
+              <a:t>Case: the confirmation that settled the dispute</a:t>
+            </a:r>
+          </a:p>
+        </p:txBody>
+      </p:sp>
+      <p:sp>
+        <p:nvSpPr>
+          <p:cNvPr id="3" name="TextBox 2" descr="Footer: BADM 225 · Chapter 6"/>
+          <p:cNvSpPr txBox="1"/>
+          <p:nvPr/>
+        </p:nvSpPr>
+        <p:spPr>
+          <a:xfrm>
+            <a:off x="502920" y="6446520"/>
+            <a:ext cx="5486400" cy="320040"/>
+          </a:xfrm>
+          <a:prstGeom prst="rect">
+            <a:avLst/>
+          </a:prstGeom>
+          <a:noFill/>
+        </p:spPr>
+        <p:txBody>
+          <a:bodyPr wrap="none">
+            <a:spAutoFit/>
+          </a:bodyPr>
+          <a:lstStyle/>
+          <a:p>
+            <a:r>
+              <a:rPr sz="1000">
+                <a:solidFill>
+                  <a:srgbClr val="5E6B64"/>
+                </a:solidFill>
+                <a:latin typeface="Calibri"/>
+              </a:rPr>
+              <a:t>BADM 225 · Chapter 6</a:t>
+            </a:r>
+          </a:p>
+        </p:txBody>
+      </p:sp>
+      <p:sp>
+        <p:nvSpPr>
+          <p:cNvPr id="4" name="TextBox 3" descr="Slide number 28"/>
+          <p:cNvSpPr txBox="1"/>
+          <p:nvPr/>
+        </p:nvSpPr>
+        <p:spPr>
+          <a:xfrm>
+            <a:off x="11247120" y="6446520"/>
+            <a:ext cx="640080" cy="320040"/>
+          </a:xfrm>
+          <a:prstGeom prst="rect">
+            <a:avLst/>
+          </a:prstGeom>
+          <a:noFill/>
+        </p:spPr>
+        <p:txBody>
+          <a:bodyPr wrap="none">
+            <a:spAutoFit/>
+          </a:bodyPr>
+          <a:lstStyle/>
+          <a:p>
+            <a:pPr algn="r"/>
+            <a:r>
+              <a:rPr sz="1000">
+                <a:solidFill>
+                  <a:srgbClr val="5E6B64"/>
+                </a:solidFill>
+                <a:latin typeface="Calibri"/>
+              </a:rPr>
+              <a:t>28</a:t>
+            </a:r>
+          </a:p>
+        </p:txBody>
+      </p:sp>
+      <p:sp>
+        <p:nvSpPr>
+          <p:cNvPr id="5" name="TextBox 4" descr="Key points"/>
+          <p:cNvSpPr txBox="1"/>
+          <p:nvPr/>
+        </p:nvSpPr>
+        <p:spPr>
+          <a:xfrm>
+            <a:off x="548640" y="1554480"/>
+            <a:ext cx="11064240" cy="4663440"/>
+          </a:xfrm>
+          <a:prstGeom prst="rect">
+            <a:avLst/>
+          </a:prstGeom>
+          <a:noFill/>
+        </p:spPr>
+        <p:txBody>
+          <a:bodyPr wrap="square">
+            <a:spAutoFit/>
+          </a:bodyPr>
+          <a:lstStyle/>
+          <a:p>
+            <a:pPr algn="l">
+              <a:spcAft>
+                <a:spcPts val="1200"/>
+              </a:spcAft>
+            </a:pPr>
+            <a:r>
+              <a:rPr sz="1700">
+                <a:solidFill>
+                  <a:srgbClr val="8A6410"/>
+                </a:solidFill>
+                <a:latin typeface="Calibri"/>
+              </a:rPr>
+              <a:t>▪  </a:t>
+            </a:r>
+            <a:r>
+              <a:rPr sz="1700" b="1">
+                <a:solidFill>
+                  <a:srgbClr val="0E4D33"/>
+                </a:solidFill>
+                <a:latin typeface="Calibri"/>
+              </a:rPr>
+              <a:t>A phone agreement on custom terms:  </a:t>
+            </a:r>
+            <a:r>
+              <a:rPr sz="1700" b="0" i="0">
+                <a:solidFill>
+                  <a:srgbClr val="212A26"/>
+                </a:solidFill>
+                <a:latin typeface="Calibri"/>
+              </a:rPr>
+              <a:t>extended payment window in exchange for a larger order — nothing signed, deal moving fast.</a:t>
+            </a:r>
+          </a:p>
+          <a:p>
+            <a:pPr algn="l">
+              <a:spcAft>
+                <a:spcPts val="1200"/>
+              </a:spcAft>
+            </a:pPr>
+            <a:r>
+              <a:rPr sz="1700">
+                <a:solidFill>
+                  <a:srgbClr val="8A6410"/>
+                </a:solidFill>
+                <a:latin typeface="Calibri"/>
+              </a:rPr>
+              <a:t>▪  </a:t>
+            </a:r>
+            <a:r>
+              <a:rPr sz="1700" b="1">
+                <a:solidFill>
+                  <a:srgbClr val="0E4D33"/>
+                </a:solidFill>
+                <a:latin typeface="Calibri"/>
+              </a:rPr>
+              <a:t>The account manager sent a five-line confirmation  </a:t>
+            </a:r>
+            <a:r>
+              <a:rPr sz="1700" b="0" i="0">
+                <a:solidFill>
+                  <a:srgbClr val="212A26"/>
+                </a:solidFill>
+                <a:latin typeface="Calibri"/>
+              </a:rPr>
+              <a:t>same afternoon: quantities, prices, the nonstandard window, and 'flag anything that doesn't match by Thursday.'</a:t>
+            </a:r>
+          </a:p>
+          <a:p>
+            <a:pPr algn="l">
+              <a:spcAft>
+                <a:spcPts val="1200"/>
+              </a:spcAft>
+            </a:pPr>
+            <a:r>
+              <a:rPr sz="1700">
+                <a:solidFill>
+                  <a:srgbClr val="8A6410"/>
+                </a:solidFill>
+                <a:latin typeface="Calibri"/>
+              </a:rPr>
+              <a:t>▪  </a:t>
+            </a:r>
+            <a:r>
+              <a:rPr sz="1700" b="1">
+                <a:solidFill>
+                  <a:srgbClr val="0E4D33"/>
+                </a:solidFill>
+                <a:latin typeface="Calibri"/>
+              </a:rPr>
+              <a:t>Eight months later, new management disputed the terms.  </a:t>
+            </a:r>
+            <a:r>
+              <a:rPr sz="1700" b="0" i="0">
+                <a:solidFill>
+                  <a:srgbClr val="212A26"/>
+                </a:solidFill>
+                <a:latin typeface="Calibri"/>
+              </a:rPr>
+              <a:t>The email — dated, acknowledged, uncorrected — ended the argument in one meeting.</a:t>
+            </a:r>
+          </a:p>
+          <a:p>
+            <a:pPr algn="l">
+              <a:spcAft>
+                <a:spcPts val="1200"/>
+              </a:spcAft>
+            </a:pPr>
+            <a:r>
+              <a:rPr sz="1700">
+                <a:solidFill>
+                  <a:srgbClr val="8A6410"/>
+                </a:solidFill>
+                <a:latin typeface="Calibri"/>
+              </a:rPr>
+              <a:t>▪  </a:t>
+            </a:r>
+            <a:r>
+              <a:rPr sz="1700" b="1">
+                <a:solidFill>
+                  <a:srgbClr val="0E4D33"/>
+                </a:solidFill>
+                <a:latin typeface="Calibri"/>
+              </a:rPr>
+              <a:t>The lesson:  </a:t>
+            </a:r>
+            <a:r>
+              <a:rPr sz="1700" b="0" i="0">
+                <a:solidFill>
+                  <a:srgbClr val="212A26"/>
+                </a:solidFill>
+                <a:latin typeface="Calibri"/>
+              </a:rPr>
+              <a:t>confirmations feel like busywork on the day you send them. They are the only version of events that survives personnel changes.</a:t>
+            </a:r>
+          </a:p>
+        </p:txBody>
+      </p:sp>
+    </p:spTree>
+  </p:cSld>
+  <p:clrMapOvr>
+    <a:masterClrMapping/>
+  </p:clrMapOvr>
+</p:sld>
+</file>
+
+<file path=ppt/slides/slide29.xml><?xml version="1.0" encoding="utf-8"?>
+<p:sld xmlns:a="http://schemas.openxmlformats.org/drawingml/2006/main" xmlns:p="http://schemas.openxmlformats.org/presentationml/2006/main" xmlns:r="http://schemas.openxmlformats.org/officeDocument/2006/relationships">
+  <p:cSld>
+    <p:bg>
+      <p:bgPr>
+        <a:solidFill>
+          <a:srgbClr val="FFFFFF"/>
+        </a:solidFill>
+        <a:effectLst/>
+      </p:bgPr>
+    </p:bg>
+    <p:spTree>
+      <p:nvGrpSpPr>
+        <p:cNvPr id="1" name=""/>
+        <p:cNvGrpSpPr/>
+        <p:nvPr/>
+      </p:nvGrpSpPr>
+      <p:grpSpPr/>
+      <p:sp>
+        <p:nvSpPr>
+          <p:cNvPr id="2" name="Title 1" descr="Slide title: Key takeaways"/>
+          <p:cNvSpPr>
+            <a:spLocks noGrp="1"/>
+          </p:cNvSpPr>
+          <p:nvPr>
+            <p:ph type="title"/>
+          </p:nvPr>
+        </p:nvSpPr>
+        <p:spPr>
+          <a:xfrm>
+            <a:off x="502920" y="411480"/>
+            <a:ext cx="11155680" cy="914400"/>
+          </a:xfrm>
+        </p:spPr>
+        <p:txBody>
+          <a:bodyPr wrap="square"/>
+          <a:lstStyle/>
+          <a:p>
+            <a:pPr algn="l"/>
+            <a:r>
+              <a:rPr sz="3200" b="1">
+                <a:solidFill>
+                  <a:srgbClr val="0E4D33"/>
+                </a:solidFill>
+                <a:latin typeface="Cambria"/>
+              </a:rPr>
+              <a:t>Key takeaways</a:t>
+            </a:r>
+          </a:p>
+        </p:txBody>
+      </p:sp>
+      <p:sp>
+        <p:nvSpPr>
+          <p:cNvPr id="3" name="TextBox 2" descr="Footer: BADM 225 · Chapter 6"/>
+          <p:cNvSpPr txBox="1"/>
+          <p:nvPr/>
+        </p:nvSpPr>
+        <p:spPr>
+          <a:xfrm>
+            <a:off x="502920" y="6446520"/>
+            <a:ext cx="5486400" cy="320040"/>
+          </a:xfrm>
+          <a:prstGeom prst="rect">
+            <a:avLst/>
+          </a:prstGeom>
+          <a:noFill/>
+        </p:spPr>
+        <p:txBody>
+          <a:bodyPr wrap="none">
+            <a:spAutoFit/>
+          </a:bodyPr>
+          <a:lstStyle/>
+          <a:p>
+            <a:r>
+              <a:rPr sz="1000">
+                <a:solidFill>
+                  <a:srgbClr val="5E6B64"/>
+                </a:solidFill>
+                <a:latin typeface="Calibri"/>
+              </a:rPr>
+              <a:t>BADM 225 · Chapter 6</a:t>
+            </a:r>
+          </a:p>
+        </p:txBody>
+      </p:sp>
+      <p:sp>
+        <p:nvSpPr>
+          <p:cNvPr id="4" name="TextBox 3" descr="Slide number 29"/>
+          <p:cNvSpPr txBox="1"/>
+          <p:nvPr/>
+        </p:nvSpPr>
+        <p:spPr>
+          <a:xfrm>
+            <a:off x="11247120" y="6446520"/>
+            <a:ext cx="640080" cy="320040"/>
+          </a:xfrm>
+          <a:prstGeom prst="rect">
+            <a:avLst/>
+          </a:prstGeom>
+          <a:noFill/>
+        </p:spPr>
+        <p:txBody>
+          <a:bodyPr wrap="none">
+            <a:spAutoFit/>
+          </a:bodyPr>
+          <a:lstStyle/>
+          <a:p>
+            <a:pPr algn="r"/>
+            <a:r>
+              <a:rPr sz="1000">
+                <a:solidFill>
+                  <a:srgbClr val="5E6B64"/>
+                </a:solidFill>
+                <a:latin typeface="Calibri"/>
+              </a:rPr>
+              <a:t>29</a:t>
+            </a:r>
+          </a:p>
+        </p:txBody>
+      </p:sp>
+      <p:sp>
+        <p:nvSpPr>
+          <p:cNvPr id="5" name="Oval 4" descr="Checkmark"/>
+          <p:cNvSpPr/>
+          <p:nvPr/>
+        </p:nvSpPr>
+        <p:spPr>
+          <a:xfrm>
+            <a:off x="640080" y="1572768"/>
+            <a:ext cx="420624" cy="420624"/>
+          </a:xfrm>
+          <a:prstGeom prst="ellipse">
+            <a:avLst/>
+          </a:prstGeom>
+          <a:solidFill>
+            <a:srgbClr val="0E4D33"/>
+          </a:solidFill>
+          <a:ln>
+            <a:noFill/>
+          </a:ln>
+          <a:effectLst/>
+        </p:spPr>
+        <p:style>
+          <a:lnRef idx="1">
+            <a:schemeClr val="accent1"/>
+          </a:lnRef>
+          <a:fillRef idx="3">
+            <a:schemeClr val="accent1"/>
+          </a:fillRef>
+          <a:effectRef idx="2">
+            <a:schemeClr val="accent1"/>
+          </a:effectRef>
+          <a:fontRef idx="minor">
+            <a:schemeClr val="lt1"/>
+          </a:fontRef>
+        </p:style>
+        <p:txBody>
+          <a:bodyPr rtlCol="0" anchor="ctr" lIns="0" rIns="0" tIns="0" bIns="0"/>
+          <a:lstStyle/>
+          <a:p>
+            <a:pPr algn="ctr"/>
+            <a:r>
+              <a:rPr sz="1100" b="1">
+                <a:solidFill>
+                  <a:srgbClr val="FFFFFF"/>
+                </a:solidFill>
+                <a:latin typeface="Calibri"/>
+              </a:rPr>
+              <a:t>✓</a:t>
+            </a:r>
+          </a:p>
+        </p:txBody>
+      </p:sp>
+      <p:sp>
+        <p:nvSpPr>
+          <p:cNvPr id="6" name="TextBox 5" descr="Takeaway 1"/>
+          <p:cNvSpPr txBox="1"/>
+          <p:nvPr/>
+        </p:nvSpPr>
+        <p:spPr>
+          <a:xfrm>
+            <a:off x="1325880" y="1554480"/>
+            <a:ext cx="10332720" cy="640080"/>
+          </a:xfrm>
+          <a:prstGeom prst="rect">
+            <a:avLst/>
+          </a:prstGeom>
+          <a:noFill/>
+        </p:spPr>
+        <p:txBody>
+          <a:bodyPr wrap="square">
+            <a:spAutoFit/>
+          </a:bodyPr>
+          <a:lstStyle/>
+          <a:p>
+            <a:pPr algn="l">
+              <a:spcAft>
+                <a:spcPts val="800"/>
+              </a:spcAft>
+            </a:pPr>
+            <a:r>
+              <a:rPr sz="1550" b="0" i="0">
+                <a:solidFill>
+                  <a:srgbClr val="212A26"/>
+                </a:solidFill>
+                <a:latin typeface="Calibri"/>
+              </a:rPr>
+              <a:t>Ask first, in question form; detail to the complete-ask standard; close with a dated reason.</a:t>
+            </a:r>
+          </a:p>
+        </p:txBody>
+      </p:sp>
+      <p:sp>
+        <p:nvSpPr>
+          <p:cNvPr id="7" name="Oval 6" descr="Checkmark"/>
+          <p:cNvSpPr/>
+          <p:nvPr/>
+        </p:nvSpPr>
+        <p:spPr>
+          <a:xfrm>
+            <a:off x="640080" y="2212848"/>
+            <a:ext cx="420624" cy="420624"/>
+          </a:xfrm>
+          <a:prstGeom prst="ellipse">
+            <a:avLst/>
+          </a:prstGeom>
+          <a:solidFill>
+            <a:srgbClr val="0E4D33"/>
+          </a:solidFill>
+          <a:ln>
+            <a:noFill/>
+          </a:ln>
+          <a:effectLst/>
+        </p:spPr>
+        <p:style>
+          <a:lnRef idx="1">
+            <a:schemeClr val="accent1"/>
+          </a:lnRef>
+          <a:fillRef idx="3">
+            <a:schemeClr val="accent1"/>
+          </a:fillRef>
+          <a:effectRef idx="2">
+            <a:schemeClr val="accent1"/>
+          </a:effectRef>
+          <a:fontRef idx="minor">
+            <a:schemeClr val="lt1"/>
+          </a:fontRef>
+        </p:style>
+        <p:txBody>
+          <a:bodyPr rtlCol="0" anchor="ctr" lIns="0" rIns="0" tIns="0" bIns="0"/>
+          <a:lstStyle/>
+          <a:p>
+            <a:pPr algn="ctr"/>
+            <a:r>
+              <a:rPr sz="1100" b="1">
+                <a:solidFill>
+                  <a:srgbClr val="FFFFFF"/>
+                </a:solidFill>
+                <a:latin typeface="Calibri"/>
+              </a:rPr>
+              <a:t>✓</a:t>
+            </a:r>
+          </a:p>
+        </p:txBody>
+      </p:sp>
+      <p:sp>
+        <p:nvSpPr>
+          <p:cNvPr id="8" name="TextBox 7" descr="Takeaway 2"/>
+          <p:cNvSpPr txBox="1"/>
+          <p:nvPr/>
+        </p:nvSpPr>
+        <p:spPr>
+          <a:xfrm>
+            <a:off x="1325880" y="2194560"/>
+            <a:ext cx="10332720" cy="640080"/>
+          </a:xfrm>
+          <a:prstGeom prst="rect">
+            <a:avLst/>
+          </a:prstGeom>
+          <a:noFill/>
+        </p:spPr>
+        <p:txBody>
+          <a:bodyPr wrap="square">
+            <a:spAutoFit/>
+          </a:bodyPr>
+          <a:lstStyle/>
+          <a:p>
+            <a:pPr algn="l">
+              <a:spcAft>
+                <a:spcPts val="800"/>
+              </a:spcAft>
+            </a:pPr>
+            <a:r>
+              <a:rPr sz="1550" b="0" i="0">
+                <a:solidFill>
+                  <a:srgbClr val="212A26"/>
+                </a:solidFill>
+                <a:latin typeface="Calibri"/>
+              </a:rPr>
+              <a:t>Answer in the first word; anticipate the next question; end the thread.</a:t>
+            </a:r>
+          </a:p>
+        </p:txBody>
+      </p:sp>
+      <p:sp>
+        <p:nvSpPr>
+          <p:cNvPr id="9" name="Oval 8" descr="Checkmark"/>
+          <p:cNvSpPr/>
+          <p:nvPr/>
+        </p:nvSpPr>
+        <p:spPr>
+          <a:xfrm>
+            <a:off x="640080" y="2852928"/>
+            <a:ext cx="420624" cy="420624"/>
+          </a:xfrm>
+          <a:prstGeom prst="ellipse">
+            <a:avLst/>
+          </a:prstGeom>
+          <a:solidFill>
+            <a:srgbClr val="0E4D33"/>
+          </a:solidFill>
+          <a:ln>
+            <a:noFill/>
+          </a:ln>
+          <a:effectLst/>
+        </p:spPr>
+        <p:style>
+          <a:lnRef idx="1">
+            <a:schemeClr val="accent1"/>
+          </a:lnRef>
+          <a:fillRef idx="3">
+            <a:schemeClr val="accent1"/>
+          </a:fillRef>
+          <a:effectRef idx="2">
+            <a:schemeClr val="accent1"/>
+          </a:effectRef>
+          <a:fontRef idx="minor">
+            <a:schemeClr val="lt1"/>
+          </a:fontRef>
+        </p:style>
+        <p:txBody>
+          <a:bodyPr rtlCol="0" anchor="ctr" lIns="0" rIns="0" tIns="0" bIns="0"/>
+          <a:lstStyle/>
+          <a:p>
+            <a:pPr algn="ctr"/>
+            <a:r>
+              <a:rPr sz="1100" b="1">
+                <a:solidFill>
+                  <a:srgbClr val="FFFFFF"/>
+                </a:solidFill>
+                <a:latin typeface="Calibri"/>
+              </a:rPr>
+              <a:t>✓</a:t>
+            </a:r>
+          </a:p>
+        </p:txBody>
+      </p:sp>
+      <p:sp>
+        <p:nvSpPr>
+          <p:cNvPr id="10" name="TextBox 9" descr="Takeaway 3"/>
+          <p:cNvSpPr txBox="1"/>
+          <p:nvPr/>
+        </p:nvSpPr>
+        <p:spPr>
+          <a:xfrm>
+            <a:off x="1325880" y="2834640"/>
+            <a:ext cx="10332720" cy="640080"/>
+          </a:xfrm>
+          <a:prstGeom prst="rect">
+            <a:avLst/>
+          </a:prstGeom>
+          <a:noFill/>
+        </p:spPr>
+        <p:txBody>
+          <a:bodyPr wrap="square">
+            <a:spAutoFit/>
+          </a:bodyPr>
+          <a:lstStyle/>
+          <a:p>
+            <a:pPr algn="l">
+              <a:spcAft>
+                <a:spcPts val="800"/>
+              </a:spcAft>
+            </a:pPr>
+            <a:r>
+              <a:rPr sz="1550" b="0" i="0">
+                <a:solidFill>
+                  <a:srgbClr val="212A26"/>
+                </a:solidFill>
+                <a:latin typeface="Calibri"/>
+              </a:rPr>
+              <a:t>Claims: record, facts, specific remedy, deadline — confidence recruits an advocate.</a:t>
+            </a:r>
+          </a:p>
+        </p:txBody>
+      </p:sp>
+      <p:sp>
+        <p:nvSpPr>
+          <p:cNvPr id="11" name="Oval 10" descr="Checkmark"/>
+          <p:cNvSpPr/>
+          <p:nvPr/>
+        </p:nvSpPr>
+        <p:spPr>
+          <a:xfrm>
+            <a:off x="640080" y="3493008"/>
+            <a:ext cx="420624" cy="420624"/>
+          </a:xfrm>
+          <a:prstGeom prst="ellipse">
+            <a:avLst/>
+          </a:prstGeom>
+          <a:solidFill>
+            <a:srgbClr val="0E4D33"/>
+          </a:solidFill>
+          <a:ln>
+            <a:noFill/>
+          </a:ln>
+          <a:effectLst/>
+        </p:spPr>
+        <p:style>
+          <a:lnRef idx="1">
+            <a:schemeClr val="accent1"/>
+          </a:lnRef>
+          <a:fillRef idx="3">
+            <a:schemeClr val="accent1"/>
+          </a:fillRef>
+          <a:effectRef idx="2">
+            <a:schemeClr val="accent1"/>
+          </a:effectRef>
+          <a:fontRef idx="minor">
+            <a:schemeClr val="lt1"/>
+          </a:fontRef>
+        </p:style>
+        <p:txBody>
+          <a:bodyPr rtlCol="0" anchor="ctr" lIns="0" rIns="0" tIns="0" bIns="0"/>
+          <a:lstStyle/>
+          <a:p>
+            <a:pPr algn="ctr"/>
+            <a:r>
+              <a:rPr sz="1100" b="1">
+                <a:solidFill>
+                  <a:srgbClr val="FFFFFF"/>
+                </a:solidFill>
+                <a:latin typeface="Calibri"/>
+              </a:rPr>
+              <a:t>✓</a:t>
+            </a:r>
+          </a:p>
+        </p:txBody>
+      </p:sp>
+      <p:sp>
+        <p:nvSpPr>
+          <p:cNvPr id="12" name="TextBox 11" descr="Takeaway 4"/>
+          <p:cNvSpPr txBox="1"/>
+          <p:nvPr/>
+        </p:nvSpPr>
+        <p:spPr>
+          <a:xfrm>
+            <a:off x="1325880" y="3474720"/>
+            <a:ext cx="10332720" cy="640080"/>
+          </a:xfrm>
+          <a:prstGeom prst="rect">
+            <a:avLst/>
+          </a:prstGeom>
+          <a:noFill/>
+        </p:spPr>
+        <p:txBody>
+          <a:bodyPr wrap="square">
+            <a:spAutoFit/>
+          </a:bodyPr>
+          <a:lstStyle/>
+          <a:p>
+            <a:pPr algn="l">
+              <a:spcAft>
+                <a:spcPts val="800"/>
+              </a:spcAft>
+            </a:pPr>
+            <a:r>
+              <a:rPr sz="1550" b="0" i="0">
+                <a:solidFill>
+                  <a:srgbClr val="212A26"/>
+                </a:solidFill>
+                <a:latin typeface="Calibri"/>
+              </a:rPr>
+              <a:t>Adjustments: grant first, explain without opera, include the prevention sentence.</a:t>
+            </a:r>
+          </a:p>
+        </p:txBody>
+      </p:sp>
+      <p:sp>
+        <p:nvSpPr>
+          <p:cNvPr id="13" name="Oval 12" descr="Checkmark"/>
+          <p:cNvSpPr/>
+          <p:nvPr/>
+        </p:nvSpPr>
+        <p:spPr>
+          <a:xfrm>
+            <a:off x="640080" y="4133088"/>
+            <a:ext cx="420624" cy="420624"/>
+          </a:xfrm>
+          <a:prstGeom prst="ellipse">
+            <a:avLst/>
+          </a:prstGeom>
+          <a:solidFill>
+            <a:srgbClr val="0E4D33"/>
+          </a:solidFill>
+          <a:ln>
+            <a:noFill/>
+          </a:ln>
+          <a:effectLst/>
+        </p:spPr>
+        <p:style>
+          <a:lnRef idx="1">
+            <a:schemeClr val="accent1"/>
+          </a:lnRef>
+          <a:fillRef idx="3">
+            <a:schemeClr val="accent1"/>
+          </a:fillRef>
+          <a:effectRef idx="2">
+            <a:schemeClr val="accent1"/>
+          </a:effectRef>
+          <a:fontRef idx="minor">
+            <a:schemeClr val="lt1"/>
+          </a:fontRef>
+        </p:style>
+        <p:txBody>
+          <a:bodyPr rtlCol="0" anchor="ctr" lIns="0" rIns="0" tIns="0" bIns="0"/>
+          <a:lstStyle/>
+          <a:p>
+            <a:pPr algn="ctr"/>
+            <a:r>
+              <a:rPr sz="1100" b="1">
+                <a:solidFill>
+                  <a:srgbClr val="FFFFFF"/>
+                </a:solidFill>
+                <a:latin typeface="Calibri"/>
+              </a:rPr>
+              <a:t>✓</a:t>
+            </a:r>
+          </a:p>
+        </p:txBody>
+      </p:sp>
+      <p:sp>
+        <p:nvSpPr>
+          <p:cNvPr id="14" name="TextBox 13" descr="Takeaway 5"/>
+          <p:cNvSpPr txBox="1"/>
+          <p:nvPr/>
+        </p:nvSpPr>
+        <p:spPr>
+          <a:xfrm>
+            <a:off x="1325880" y="4114800"/>
+            <a:ext cx="10332720" cy="640080"/>
+          </a:xfrm>
+          <a:prstGeom prst="rect">
+            <a:avLst/>
+          </a:prstGeom>
+          <a:noFill/>
+        </p:spPr>
+        <p:txBody>
+          <a:bodyPr wrap="square">
+            <a:spAutoFit/>
+          </a:bodyPr>
+          <a:lstStyle/>
+          <a:p>
+            <a:pPr algn="l">
+              <a:spcAft>
+                <a:spcPts val="800"/>
+              </a:spcAft>
+            </a:pPr>
+            <a:r>
+              <a:rPr sz="1550" b="0" i="0">
+                <a:solidFill>
+                  <a:srgbClr val="212A26"/>
+                </a:solidFill>
+                <a:latin typeface="Calibri"/>
+              </a:rPr>
+              <a:t>Goodwill passes five-S; ink for milestones; never AI — the pause is the message.</a:t>
+            </a:r>
+          </a:p>
+        </p:txBody>
+      </p:sp>
+      <p:sp>
+        <p:nvSpPr>
+          <p:cNvPr id="15" name="Oval 14" descr="Checkmark"/>
+          <p:cNvSpPr/>
+          <p:nvPr/>
+        </p:nvSpPr>
+        <p:spPr>
+          <a:xfrm>
+            <a:off x="640080" y="4773168"/>
+            <a:ext cx="420624" cy="420624"/>
+          </a:xfrm>
+          <a:prstGeom prst="ellipse">
+            <a:avLst/>
+          </a:prstGeom>
+          <a:solidFill>
+            <a:srgbClr val="0E4D33"/>
+          </a:solidFill>
+          <a:ln>
+            <a:noFill/>
+          </a:ln>
+          <a:effectLst/>
+        </p:spPr>
+        <p:style>
+          <a:lnRef idx="1">
+            <a:schemeClr val="accent1"/>
+          </a:lnRef>
+          <a:fillRef idx="3">
+            <a:schemeClr val="accent1"/>
+          </a:fillRef>
+          <a:effectRef idx="2">
+            <a:schemeClr val="accent1"/>
+          </a:effectRef>
+          <a:fontRef idx="minor">
+            <a:schemeClr val="lt1"/>
+          </a:fontRef>
+        </p:style>
+        <p:txBody>
+          <a:bodyPr rtlCol="0" anchor="ctr" lIns="0" rIns="0" tIns="0" bIns="0"/>
+          <a:lstStyle/>
+          <a:p>
+            <a:pPr algn="ctr"/>
+            <a:r>
+              <a:rPr sz="1100" b="1">
+                <a:solidFill>
+                  <a:srgbClr val="FFFFFF"/>
+                </a:solidFill>
+                <a:latin typeface="Calibri"/>
+              </a:rPr>
+              <a:t>✓</a:t>
+            </a:r>
+          </a:p>
+        </p:txBody>
+      </p:sp>
+      <p:sp>
+        <p:nvSpPr>
+          <p:cNvPr id="16" name="TextBox 15" descr="Takeaway 6"/>
+          <p:cNvSpPr txBox="1"/>
+          <p:nvPr/>
+        </p:nvSpPr>
+        <p:spPr>
+          <a:xfrm>
+            <a:off x="1325880" y="4754880"/>
+            <a:ext cx="10332720" cy="640080"/>
+          </a:xfrm>
+          <a:prstGeom prst="rect">
+            <a:avLst/>
+          </a:prstGeom>
+          <a:noFill/>
+        </p:spPr>
+        <p:txBody>
+          <a:bodyPr wrap="square">
+            <a:spAutoFit/>
+          </a:bodyPr>
+          <a:lstStyle/>
+          <a:p>
+            <a:pPr algn="l">
+              <a:spcAft>
+                <a:spcPts val="800"/>
+              </a:spcAft>
+            </a:pPr>
+            <a:r>
+              <a:rPr sz="1550" b="0" i="0">
+                <a:solidFill>
+                  <a:srgbClr val="212A26"/>
+                </a:solidFill>
+                <a:latin typeface="Calibri"/>
+              </a:rPr>
+              <a:t>Instructions: numbered, imperative, preconditions first, warnings before their steps, tested on a novice.</a:t>
+            </a:r>
+          </a:p>
+        </p:txBody>
+      </p:sp>
+      <p:sp>
+        <p:nvSpPr>
+          <p:cNvPr id="17" name="Rounded Rectangle 16" descr="Practice reminder"/>
+          <p:cNvSpPr/>
+          <p:nvPr/>
+        </p:nvSpPr>
+        <p:spPr>
+          <a:xfrm>
+            <a:off x="548640" y="5468112"/>
+            <a:ext cx="10424160" cy="685800"/>
+          </a:xfrm>
+          <a:prstGeom prst="roundRect">
+            <a:avLst/>
+          </a:prstGeom>
+          <a:solidFill>
+            <a:srgbClr val="0E4D33"/>
+          </a:solidFill>
+          <a:ln>
+            <a:noFill/>
+          </a:ln>
+          <a:effectLst/>
+        </p:spPr>
+        <p:style>
+          <a:lnRef idx="1">
+            <a:schemeClr val="accent1"/>
+          </a:lnRef>
+          <a:fillRef idx="3">
+            <a:schemeClr val="accent1"/>
+          </a:fillRef>
+          <a:effectRef idx="2">
+            <a:schemeClr val="accent1"/>
+          </a:effectRef>
+          <a:fontRef idx="minor">
+            <a:schemeClr val="lt1"/>
+          </a:fontRef>
+        </p:style>
+        <p:txBody>
+          <a:bodyPr rtlCol="0" anchor="t" wrap="square" lIns="164592" rIns="164592" tIns="128016" bIns="109728"/>
+          <a:lstStyle/>
+          <a:p>
+            <a:pPr algn="l">
+              <a:spcAft>
+                <a:spcPts val="0"/>
+              </a:spcAft>
+            </a:pPr>
+            <a:r>
+              <a:rPr sz="1450" b="1" i="0">
+                <a:solidFill>
+                  <a:srgbClr val="FFFFFF"/>
+                </a:solidFill>
+                <a:latin typeface="Calibri"/>
+              </a:rPr>
+              <a:t>Practice now: course site → Chapter 6 → Practice, then the graded homework before the weekly deadline.</a:t>
             </a:r>
           </a:p>
         </p:txBody>
@@ -10213,6 +13602,774 @@
                 <a:latin typeface="Calibri"/>
               </a:rPr>
               <a:t>3</a:t>
+            </a:r>
+          </a:p>
+        </p:txBody>
+      </p:sp>
+    </p:spTree>
+  </p:cSld>
+  <p:clrMapOvr>
+    <a:masterClrMapping/>
+  </p:clrMapOvr>
+</p:sld>
+</file>
+
+<file path=ppt/slides/slide30.xml><?xml version="1.0" encoding="utf-8"?>
+<p:sld xmlns:a="http://schemas.openxmlformats.org/drawingml/2006/main" xmlns:p="http://schemas.openxmlformats.org/presentationml/2006/main" xmlns:r="http://schemas.openxmlformats.org/officeDocument/2006/relationships">
+  <p:cSld>
+    <p:bg>
+      <p:bgPr>
+        <a:solidFill>
+          <a:srgbClr val="EAF1EB"/>
+        </a:solidFill>
+        <a:effectLst/>
+      </p:bgPr>
+    </p:bg>
+    <p:spTree>
+      <p:nvGrpSpPr>
+        <p:cNvPr id="1" name=""/>
+        <p:cNvGrpSpPr/>
+        <p:nvPr/>
+      </p:nvGrpSpPr>
+      <p:grpSpPr/>
+      <p:sp>
+        <p:nvSpPr>
+          <p:cNvPr id="2" name="Title 1" descr="Slide title: Worth keeping"/>
+          <p:cNvSpPr>
+            <a:spLocks noGrp="1"/>
+          </p:cNvSpPr>
+          <p:nvPr>
+            <p:ph type="title"/>
+          </p:nvPr>
+        </p:nvSpPr>
+        <p:spPr>
+          <a:xfrm>
+            <a:off x="502920" y="411480"/>
+            <a:ext cx="11155680" cy="914400"/>
+          </a:xfrm>
+        </p:spPr>
+        <p:txBody>
+          <a:bodyPr wrap="square"/>
+          <a:lstStyle/>
+          <a:p>
+            <a:pPr algn="l"/>
+            <a:r>
+              <a:rPr sz="3400" b="1">
+                <a:solidFill>
+                  <a:srgbClr val="0E4D33"/>
+                </a:solidFill>
+                <a:latin typeface="Cambria"/>
+              </a:rPr>
+              <a:t>Worth keeping</a:t>
+            </a:r>
+          </a:p>
+        </p:txBody>
+      </p:sp>
+      <p:sp>
+        <p:nvSpPr>
+          <p:cNvPr id="3" name="TextBox 2" descr="Quotation"/>
+          <p:cNvSpPr txBox="1"/>
+          <p:nvPr/>
+        </p:nvSpPr>
+        <p:spPr>
+          <a:xfrm>
+            <a:off x="1280160" y="2194560"/>
+            <a:ext cx="9601200" cy="2377440"/>
+          </a:xfrm>
+          <a:prstGeom prst="rect">
+            <a:avLst/>
+          </a:prstGeom>
+          <a:noFill/>
+        </p:spPr>
+        <p:txBody>
+          <a:bodyPr wrap="square">
+            <a:spAutoFit/>
+          </a:bodyPr>
+          <a:lstStyle/>
+          <a:p>
+            <a:pPr algn="l">
+              <a:spcAft>
+                <a:spcPts val="800"/>
+              </a:spcAft>
+            </a:pPr>
+            <a:r>
+              <a:rPr sz="2700" b="0" i="1">
+                <a:solidFill>
+                  <a:srgbClr val="212A26"/>
+                </a:solidFill>
+                <a:latin typeface="Cambria"/>
+              </a:rPr>
+              <a:t>“Nobody remembers who answered routine mail adequately. Everybody remembers who made things easy — and who said thank you.”</a:t>
+            </a:r>
+          </a:p>
+        </p:txBody>
+      </p:sp>
+      <p:sp>
+        <p:nvSpPr>
+          <p:cNvPr id="4" name="TextBox 3" descr="Attribution"/>
+          <p:cNvSpPr txBox="1"/>
+          <p:nvPr/>
+        </p:nvSpPr>
+        <p:spPr>
+          <a:xfrm>
+            <a:off x="1280160" y="4754880"/>
+            <a:ext cx="9601200" cy="548640"/>
+          </a:xfrm>
+          <a:prstGeom prst="rect">
+            <a:avLst/>
+          </a:prstGeom>
+          <a:noFill/>
+        </p:spPr>
+        <p:txBody>
+          <a:bodyPr wrap="square">
+            <a:spAutoFit/>
+          </a:bodyPr>
+          <a:lstStyle/>
+          <a:p>
+            <a:pPr algn="l">
+              <a:spcAft>
+                <a:spcPts val="800"/>
+              </a:spcAft>
+            </a:pPr>
+            <a:r>
+              <a:rPr sz="1600" b="0" i="0">
+                <a:solidFill>
+                  <a:srgbClr val="5E6B64"/>
+                </a:solidFill>
+                <a:latin typeface="Calibri"/>
+              </a:rPr>
+              <a:t>— this chapter, compressed</a:t>
+            </a:r>
+          </a:p>
+        </p:txBody>
+      </p:sp>
+      <p:sp>
+        <p:nvSpPr>
+          <p:cNvPr id="5" name="TextBox 4" descr="Footer: BADM 225 · Chapter 6"/>
+          <p:cNvSpPr txBox="1"/>
+          <p:nvPr/>
+        </p:nvSpPr>
+        <p:spPr>
+          <a:xfrm>
+            <a:off x="502920" y="6446520"/>
+            <a:ext cx="5486400" cy="320040"/>
+          </a:xfrm>
+          <a:prstGeom prst="rect">
+            <a:avLst/>
+          </a:prstGeom>
+          <a:noFill/>
+        </p:spPr>
+        <p:txBody>
+          <a:bodyPr wrap="none">
+            <a:spAutoFit/>
+          </a:bodyPr>
+          <a:lstStyle/>
+          <a:p>
+            <a:r>
+              <a:rPr sz="1000">
+                <a:solidFill>
+                  <a:srgbClr val="5E6B64"/>
+                </a:solidFill>
+                <a:latin typeface="Calibri"/>
+              </a:rPr>
+              <a:t>BADM 225 · Chapter 6</a:t>
+            </a:r>
+          </a:p>
+        </p:txBody>
+      </p:sp>
+      <p:sp>
+        <p:nvSpPr>
+          <p:cNvPr id="6" name="TextBox 5" descr="Slide number 30"/>
+          <p:cNvSpPr txBox="1"/>
+          <p:nvPr/>
+        </p:nvSpPr>
+        <p:spPr>
+          <a:xfrm>
+            <a:off x="11247120" y="6446520"/>
+            <a:ext cx="640080" cy="320040"/>
+          </a:xfrm>
+          <a:prstGeom prst="rect">
+            <a:avLst/>
+          </a:prstGeom>
+          <a:noFill/>
+        </p:spPr>
+        <p:txBody>
+          <a:bodyPr wrap="none">
+            <a:spAutoFit/>
+          </a:bodyPr>
+          <a:lstStyle/>
+          <a:p>
+            <a:pPr algn="r"/>
+            <a:r>
+              <a:rPr sz="1000">
+                <a:solidFill>
+                  <a:srgbClr val="5E6B64"/>
+                </a:solidFill>
+                <a:latin typeface="Calibri"/>
+              </a:rPr>
+              <a:t>30</a:t>
+            </a:r>
+          </a:p>
+        </p:txBody>
+      </p:sp>
+    </p:spTree>
+  </p:cSld>
+  <p:clrMapOvr>
+    <a:masterClrMapping/>
+  </p:clrMapOvr>
+</p:sld>
+</file>
+
+<file path=ppt/slides/slide31.xml><?xml version="1.0" encoding="utf-8"?>
+<p:sld xmlns:a="http://schemas.openxmlformats.org/drawingml/2006/main" xmlns:p="http://schemas.openxmlformats.org/presentationml/2006/main" xmlns:r="http://schemas.openxmlformats.org/officeDocument/2006/relationships">
+  <p:cSld>
+    <p:bg>
+      <p:bgPr>
+        <a:solidFill>
+          <a:srgbClr val="0E4D33"/>
+        </a:solidFill>
+        <a:effectLst/>
+      </p:bgPr>
+    </p:bg>
+    <p:spTree>
+      <p:nvGrpSpPr>
+        <p:cNvPr id="1" name=""/>
+        <p:cNvGrpSpPr/>
+        <p:nvPr/>
+      </p:nvGrpSpPr>
+      <p:grpSpPr/>
+      <p:sp>
+        <p:nvSpPr>
+          <p:cNvPr id="2" name="Title 1" descr="Slide title: Discussion questions"/>
+          <p:cNvSpPr>
+            <a:spLocks noGrp="1"/>
+          </p:cNvSpPr>
+          <p:nvPr>
+            <p:ph type="title"/>
+          </p:nvPr>
+        </p:nvSpPr>
+        <p:spPr>
+          <a:xfrm>
+            <a:off x="502920" y="411480"/>
+            <a:ext cx="11155680" cy="914400"/>
+          </a:xfrm>
+        </p:spPr>
+        <p:txBody>
+          <a:bodyPr wrap="square"/>
+          <a:lstStyle/>
+          <a:p>
+            <a:pPr algn="l"/>
+            <a:r>
+              <a:rPr sz="3400" b="1">
+                <a:solidFill>
+                  <a:srgbClr val="FFFFFF"/>
+                </a:solidFill>
+                <a:latin typeface="Cambria"/>
+              </a:rPr>
+              <a:t>Discussion questions</a:t>
+            </a:r>
+          </a:p>
+        </p:txBody>
+      </p:sp>
+      <p:sp>
+        <p:nvSpPr>
+          <p:cNvPr id="3" name="TextBox 2" descr="Discussion questions"/>
+          <p:cNvSpPr txBox="1"/>
+          <p:nvPr/>
+        </p:nvSpPr>
+        <p:spPr>
+          <a:xfrm>
+            <a:off x="731520" y="1737360"/>
+            <a:ext cx="10698480" cy="4480560"/>
+          </a:xfrm>
+          <a:prstGeom prst="rect">
+            <a:avLst/>
+          </a:prstGeom>
+          <a:noFill/>
+        </p:spPr>
+        <p:txBody>
+          <a:bodyPr wrap="square">
+            <a:spAutoFit/>
+          </a:bodyPr>
+          <a:lstStyle/>
+          <a:p>
+            <a:pPr algn="l">
+              <a:spcAft>
+                <a:spcPts val="1800"/>
+              </a:spcAft>
+            </a:pPr>
+            <a:r>
+              <a:rPr sz="1800" b="1">
+                <a:solidFill>
+                  <a:srgbClr val="C9931A"/>
+                </a:solidFill>
+                <a:latin typeface="Calibri"/>
+              </a:rPr>
+              <a:t>1.  </a:t>
+            </a:r>
+            <a:r>
+              <a:rPr sz="1800" b="0" i="0">
+                <a:solidFill>
+                  <a:srgbClr val="FFFFFF"/>
+                </a:solidFill>
+                <a:latin typeface="Calibri"/>
+              </a:rPr>
+              <a:t>Bring a request that failed the complete-ask test. What did the round trips cost?</a:t>
+            </a:r>
+          </a:p>
+          <a:p>
+            <a:pPr algn="l">
+              <a:spcAft>
+                <a:spcPts val="1800"/>
+              </a:spcAft>
+            </a:pPr>
+            <a:r>
+              <a:rPr sz="1800" b="1">
+                <a:solidFill>
+                  <a:srgbClr val="C9931A"/>
+                </a:solidFill>
+                <a:latin typeface="Calibri"/>
+              </a:rPr>
+              <a:t>2.  </a:t>
+            </a:r>
+            <a:r>
+              <a:rPr sz="1800" b="0" i="0">
+                <a:solidFill>
+                  <a:srgbClr val="FFFFFF"/>
+                </a:solidFill>
+                <a:latin typeface="Calibri"/>
+              </a:rPr>
+              <a:t>When did a company's complaint handling change your loyalty — either direction? Map it against the adjustment flow.</a:t>
+            </a:r>
+          </a:p>
+          <a:p>
+            <a:pPr algn="l">
+              <a:spcAft>
+                <a:spcPts val="1800"/>
+              </a:spcAft>
+            </a:pPr>
+            <a:r>
+              <a:rPr sz="1800" b="1">
+                <a:solidFill>
+                  <a:srgbClr val="C9931A"/>
+                </a:solidFill>
+                <a:latin typeface="Calibri"/>
+              </a:rPr>
+              <a:t>3.  </a:t>
+            </a:r>
+            <a:r>
+              <a:rPr sz="1800" b="0" i="0">
+                <a:solidFill>
+                  <a:srgbClr val="FFFFFF"/>
+                </a:solidFill>
+                <a:latin typeface="Calibri"/>
+              </a:rPr>
+              <a:t>Everyone agrees goodwill notes matter; almost nobody sends them. Name the frictions — and the one you'll remove.</a:t>
+            </a:r>
+          </a:p>
+          <a:p>
+            <a:pPr algn="l">
+              <a:spcAft>
+                <a:spcPts val="1800"/>
+              </a:spcAft>
+            </a:pPr>
+            <a:r>
+              <a:rPr sz="1800" b="1">
+                <a:solidFill>
+                  <a:srgbClr val="C9931A"/>
+                </a:solidFill>
+                <a:latin typeface="Calibri"/>
+              </a:rPr>
+              <a:t>4.  </a:t>
+            </a:r>
+            <a:r>
+              <a:rPr sz="1800" b="0" i="0">
+                <a:solidFill>
+                  <a:srgbClr val="FFFFFF"/>
+                </a:solidFill>
+                <a:latin typeface="Calibri"/>
+              </a:rPr>
+              <a:t>Autopsy instructions that generate repeated questions where you work or study. Which element is missing?</a:t>
+            </a:r>
+          </a:p>
+          <a:p>
+            <a:pPr algn="l">
+              <a:spcAft>
+                <a:spcPts val="1800"/>
+              </a:spcAft>
+            </a:pPr>
+            <a:r>
+              <a:rPr sz="1800" b="1">
+                <a:solidFill>
+                  <a:srgbClr val="C9931A"/>
+                </a:solidFill>
+                <a:latin typeface="Calibri"/>
+              </a:rPr>
+              <a:t>5.  </a:t>
+            </a:r>
+            <a:r>
+              <a:rPr sz="1800" b="0" i="0">
+                <a:solidFill>
+                  <a:srgbClr val="FFFFFF"/>
+                </a:solidFill>
+                <a:latin typeface="Calibri"/>
+              </a:rPr>
+              <a:t>Should front-line staff grant borderline claims without approval? Argue the reciprocity math.</a:t>
+            </a:r>
+          </a:p>
+        </p:txBody>
+      </p:sp>
+      <p:sp>
+        <p:nvSpPr>
+          <p:cNvPr id="4" name="TextBox 3" descr="Footer"/>
+          <p:cNvSpPr txBox="1"/>
+          <p:nvPr/>
+        </p:nvSpPr>
+        <p:spPr>
+          <a:xfrm>
+            <a:off x="502920" y="6446520"/>
+            <a:ext cx="5486400" cy="320040"/>
+          </a:xfrm>
+          <a:prstGeom prst="rect">
+            <a:avLst/>
+          </a:prstGeom>
+          <a:noFill/>
+        </p:spPr>
+        <p:txBody>
+          <a:bodyPr wrap="none">
+            <a:spAutoFit/>
+          </a:bodyPr>
+          <a:lstStyle/>
+          <a:p>
+            <a:r>
+              <a:rPr sz="1000">
+                <a:solidFill>
+                  <a:srgbClr val="A8C4B2"/>
+                </a:solidFill>
+                <a:latin typeface="Calibri"/>
+              </a:rPr>
+              <a:t>BADM 225 · Chapter 6</a:t>
+            </a:r>
+          </a:p>
+        </p:txBody>
+      </p:sp>
+    </p:spTree>
+  </p:cSld>
+  <p:clrMapOvr>
+    <a:masterClrMapping/>
+  </p:clrMapOvr>
+</p:sld>
+</file>
+
+<file path=ppt/slides/slide32.xml><?xml version="1.0" encoding="utf-8"?>
+<p:sld xmlns:a="http://schemas.openxmlformats.org/drawingml/2006/main" xmlns:p="http://schemas.openxmlformats.org/presentationml/2006/main" xmlns:r="http://schemas.openxmlformats.org/officeDocument/2006/relationships">
+  <p:cSld>
+    <p:bg>
+      <p:bgPr>
+        <a:solidFill>
+          <a:srgbClr val="FFFFFF"/>
+        </a:solidFill>
+        <a:effectLst/>
+      </p:bgPr>
+    </p:bg>
+    <p:spTree>
+      <p:nvGrpSpPr>
+        <p:cNvPr id="1" name=""/>
+        <p:cNvGrpSpPr/>
+        <p:nvPr/>
+      </p:nvGrpSpPr>
+      <p:grpSpPr/>
+      <p:sp>
+        <p:nvSpPr>
+          <p:cNvPr id="2" name="Title 1" descr="Slide title: Your next steps"/>
+          <p:cNvSpPr>
+            <a:spLocks noGrp="1"/>
+          </p:cNvSpPr>
+          <p:nvPr>
+            <p:ph type="title"/>
+          </p:nvPr>
+        </p:nvSpPr>
+        <p:spPr>
+          <a:xfrm>
+            <a:off x="502920" y="411480"/>
+            <a:ext cx="11155680" cy="914400"/>
+          </a:xfrm>
+        </p:spPr>
+        <p:txBody>
+          <a:bodyPr wrap="square"/>
+          <a:lstStyle/>
+          <a:p>
+            <a:pPr algn="l"/>
+            <a:r>
+              <a:rPr sz="3200" b="1">
+                <a:solidFill>
+                  <a:srgbClr val="0E4D33"/>
+                </a:solidFill>
+                <a:latin typeface="Cambria"/>
+              </a:rPr>
+              <a:t>Your next steps</a:t>
+            </a:r>
+          </a:p>
+        </p:txBody>
+      </p:sp>
+      <p:sp>
+        <p:nvSpPr>
+          <p:cNvPr id="3" name="TextBox 2" descr="Footer: BADM 225 · Chapter 6"/>
+          <p:cNvSpPr txBox="1"/>
+          <p:nvPr/>
+        </p:nvSpPr>
+        <p:spPr>
+          <a:xfrm>
+            <a:off x="502920" y="6446520"/>
+            <a:ext cx="5486400" cy="320040"/>
+          </a:xfrm>
+          <a:prstGeom prst="rect">
+            <a:avLst/>
+          </a:prstGeom>
+          <a:noFill/>
+        </p:spPr>
+        <p:txBody>
+          <a:bodyPr wrap="none">
+            <a:spAutoFit/>
+          </a:bodyPr>
+          <a:lstStyle/>
+          <a:p>
+            <a:r>
+              <a:rPr sz="1000">
+                <a:solidFill>
+                  <a:srgbClr val="5E6B64"/>
+                </a:solidFill>
+                <a:latin typeface="Calibri"/>
+              </a:rPr>
+              <a:t>BADM 225 · Chapter 6</a:t>
+            </a:r>
+          </a:p>
+        </p:txBody>
+      </p:sp>
+      <p:sp>
+        <p:nvSpPr>
+          <p:cNvPr id="4" name="TextBox 3" descr="Slide number 32"/>
+          <p:cNvSpPr txBox="1"/>
+          <p:nvPr/>
+        </p:nvSpPr>
+        <p:spPr>
+          <a:xfrm>
+            <a:off x="11247120" y="6446520"/>
+            <a:ext cx="640080" cy="320040"/>
+          </a:xfrm>
+          <a:prstGeom prst="rect">
+            <a:avLst/>
+          </a:prstGeom>
+          <a:noFill/>
+        </p:spPr>
+        <p:txBody>
+          <a:bodyPr wrap="none">
+            <a:spAutoFit/>
+          </a:bodyPr>
+          <a:lstStyle/>
+          <a:p>
+            <a:pPr algn="r"/>
+            <a:r>
+              <a:rPr sz="1000">
+                <a:solidFill>
+                  <a:srgbClr val="5E6B64"/>
+                </a:solidFill>
+                <a:latin typeface="Calibri"/>
+              </a:rPr>
+              <a:t>32</a:t>
+            </a:r>
+          </a:p>
+        </p:txBody>
+      </p:sp>
+      <p:sp>
+        <p:nvSpPr>
+          <p:cNvPr id="5" name="TextBox 4" descr="Key points"/>
+          <p:cNvSpPr txBox="1"/>
+          <p:nvPr/>
+        </p:nvSpPr>
+        <p:spPr>
+          <a:xfrm>
+            <a:off x="548640" y="1554480"/>
+            <a:ext cx="11064240" cy="4663440"/>
+          </a:xfrm>
+          <a:prstGeom prst="rect">
+            <a:avLst/>
+          </a:prstGeom>
+          <a:noFill/>
+        </p:spPr>
+        <p:txBody>
+          <a:bodyPr wrap="square">
+            <a:spAutoFit/>
+          </a:bodyPr>
+          <a:lstStyle/>
+          <a:p>
+            <a:pPr algn="l">
+              <a:spcAft>
+                <a:spcPts val="1200"/>
+              </a:spcAft>
+            </a:pPr>
+            <a:r>
+              <a:rPr sz="1700">
+                <a:solidFill>
+                  <a:srgbClr val="8A6410"/>
+                </a:solidFill>
+                <a:latin typeface="Calibri"/>
+              </a:rPr>
+              <a:t>▪  </a:t>
+            </a:r>
+            <a:r>
+              <a:rPr sz="1700" b="1">
+                <a:solidFill>
+                  <a:srgbClr val="0E4D33"/>
+                </a:solidFill>
+                <a:latin typeface="Calibri"/>
+              </a:rPr>
+              <a:t>Practice:  </a:t>
+            </a:r>
+            <a:r>
+              <a:rPr sz="1700" b="0" i="0">
+                <a:solidFill>
+                  <a:srgbClr val="212A26"/>
+                </a:solidFill>
+                <a:latin typeface="Calibri"/>
+              </a:rPr>
+              <a:t>Course site → Chapter 6 → Practice questions (instant feedback, unlimited tries).</a:t>
+            </a:r>
+          </a:p>
+          <a:p>
+            <a:pPr algn="l">
+              <a:spcAft>
+                <a:spcPts val="1200"/>
+              </a:spcAft>
+            </a:pPr>
+            <a:r>
+              <a:rPr sz="1700">
+                <a:solidFill>
+                  <a:srgbClr val="8A6410"/>
+                </a:solidFill>
+                <a:latin typeface="Calibri"/>
+              </a:rPr>
+              <a:t>▪  </a:t>
+            </a:r>
+            <a:r>
+              <a:rPr sz="1700" b="1">
+                <a:solidFill>
+                  <a:srgbClr val="0E4D33"/>
+                </a:solidFill>
+                <a:latin typeface="Calibri"/>
+              </a:rPr>
+              <a:t>Graded:  </a:t>
+            </a:r>
+            <a:r>
+              <a:rPr sz="1700" b="0" i="0">
+                <a:solidFill>
+                  <a:srgbClr val="212A26"/>
+                </a:solidFill>
+                <a:latin typeface="Calibri"/>
+              </a:rPr>
+              <a:t>Complete the Chapter 6 homework on the site; paste your completion code into the Blackboard assignment before the weekly deadline.</a:t>
+            </a:r>
+          </a:p>
+          <a:p>
+            <a:pPr algn="l">
+              <a:spcAft>
+                <a:spcPts val="1200"/>
+              </a:spcAft>
+            </a:pPr>
+            <a:r>
+              <a:rPr sz="1700">
+                <a:solidFill>
+                  <a:srgbClr val="8A6410"/>
+                </a:solidFill>
+                <a:latin typeface="Calibri"/>
+              </a:rPr>
+              <a:t>▪  </a:t>
+            </a:r>
+            <a:r>
+              <a:rPr sz="1700" b="1">
+                <a:solidFill>
+                  <a:srgbClr val="0E4D33"/>
+                </a:solidFill>
+                <a:latin typeface="Calibri"/>
+              </a:rPr>
+              <a:t>Write:  </a:t>
+            </a:r>
+            <a:r>
+              <a:rPr sz="1700" b="0" i="0">
+                <a:solidFill>
+                  <a:srgbClr val="212A26"/>
+                </a:solidFill>
+                <a:latin typeface="Calibri"/>
+              </a:rPr>
+              <a:t>Your introductory letter (this unit's assignment) — Figure 1's request pattern in letter dress.</a:t>
+            </a:r>
+          </a:p>
+          <a:p>
+            <a:pPr algn="l">
+              <a:spcAft>
+                <a:spcPts val="1200"/>
+              </a:spcAft>
+            </a:pPr>
+            <a:r>
+              <a:rPr sz="1700">
+                <a:solidFill>
+                  <a:srgbClr val="8A6410"/>
+                </a:solidFill>
+                <a:latin typeface="Calibri"/>
+              </a:rPr>
+              <a:t>▪  </a:t>
+            </a:r>
+            <a:r>
+              <a:rPr sz="1700" b="1">
+                <a:solidFill>
+                  <a:srgbClr val="0E4D33"/>
+                </a:solidFill>
+                <a:latin typeface="Calibri"/>
+              </a:rPr>
+              <a:t>Send:  </a:t>
+            </a:r>
+            <a:r>
+              <a:rPr sz="1700" b="0" i="0">
+                <a:solidFill>
+                  <a:srgbClr val="212A26"/>
+                </a:solidFill>
+                <a:latin typeface="Calibri"/>
+              </a:rPr>
+              <a:t>One real five-S goodwill note this week. Note what comes back.</a:t>
+            </a:r>
+          </a:p>
+          <a:p>
+            <a:pPr algn="l">
+              <a:spcAft>
+                <a:spcPts val="1200"/>
+              </a:spcAft>
+            </a:pPr>
+            <a:r>
+              <a:rPr sz="1700">
+                <a:solidFill>
+                  <a:srgbClr val="8A6410"/>
+                </a:solidFill>
+                <a:latin typeface="Calibri"/>
+              </a:rPr>
+              <a:t>▪  </a:t>
+            </a:r>
+            <a:r>
+              <a:rPr sz="1700" b="1">
+                <a:solidFill>
+                  <a:srgbClr val="0E4D33"/>
+                </a:solidFill>
+                <a:latin typeface="Calibri"/>
+              </a:rPr>
+              <a:t>Coming next:  </a:t>
+            </a:r>
+            <a:r>
+              <a:rPr sz="1700" b="0" i="0">
+                <a:solidFill>
+                  <a:srgbClr val="212A26"/>
+                </a:solidFill>
+                <a:latin typeface="Calibri"/>
+              </a:rPr>
+              <a:t>Chapter 7 — negative messages: when the answer is no and the reader's day is about to get worse.</a:t>
             </a:r>
           </a:p>
         </p:txBody>

--- a/slides/ch06-positive-and-neutral-messages.pptx
+++ b/slides/ch06-positive-and-neutral-messages.pptx
@@ -6101,7 +6101,7 @@
       <p:grpSpPr/>
       <p:sp>
         <p:nvSpPr>
-          <p:cNvPr id="2" name="Title 1" descr="Slide title: The five-S test"/>
+          <p:cNvPr id="2" name="Title 1" descr="Slide title: The five-quality test"/>
           <p:cNvSpPr>
             <a:spLocks noGrp="1"/>
           </p:cNvSpPr>
@@ -6127,7 +6127,7 @@
                 </a:solidFill>
                 <a:latin typeface="Cambria"/>
               </a:rPr>
-              <a:t>The five-S test</a:t>
+              <a:t>The five-quality test</a:t>
             </a:r>
           </a:p>
         </p:txBody>
@@ -7349,7 +7349,7 @@
                 </a:solidFill>
                 <a:latin typeface="Calibri"/>
               </a:rPr>
-              <a:t>send one five-S note this week. Actually send it.</a:t>
+              <a:t>send one five-quality note this week. Actually send it.</a:t>
             </a:r>
           </a:p>
         </p:txBody>
@@ -9775,7 +9775,7 @@
                 </a:solidFill>
                 <a:latin typeface="Calibri"/>
               </a:rPr>
-              <a:t>goodwill that passes the five-S test — the highest-return mail there is.</a:t>
+              <a:t>goodwill that passes the five-quality test — the highest-return mail there is.</a:t>
             </a:r>
           </a:p>
         </p:txBody>
@@ -12371,7 +12371,7 @@
                 </a:solidFill>
                 <a:latin typeface="Calibri"/>
               </a:rPr>
-              <a:t>The five-S note that reaches a personnel file outlives every hallway compliment.</a:t>
+              <a:t>The five-quality note that reaches a personnel file outlives every hallway compliment.</a:t>
             </a:r>
           </a:p>
         </p:txBody>
@@ -13246,7 +13246,7 @@
                 </a:solidFill>
                 <a:latin typeface="Calibri"/>
               </a:rPr>
-              <a:t>Goodwill passes five-S; ink for milestones; never AI — the pause is the message.</a:t>
+              <a:t>Goodwill passes five-quality; ink for milestones; never AI — the pause is the message.</a:t>
             </a:r>
           </a:p>
         </p:txBody>
@@ -14335,7 +14335,7 @@
                 </a:solidFill>
                 <a:latin typeface="Calibri"/>
               </a:rPr>
-              <a:t>One real five-S goodwill note this week. Note what comes back.</a:t>
+              <a:t>One real five-quality goodwill note this week. Note what comes back.</a:t>
             </a:r>
           </a:p>
           <a:p>

--- a/slides/ch06-positive-and-neutral-messages.pptx
+++ b/slides/ch06-positive-and-neutral-messages.pptx
@@ -6033,7 +6033,7 @@
                 </a:solidFill>
                 <a:latin typeface="Calibri"/>
               </a:rPr>
-              <a:t>BADM 225 · Chapter 6</a:t>
+              <a:t>BADM 225 · Chapter 6  ·  © Derek D. Bussan</a:t>
             </a:r>
           </a:p>
         </p:txBody>
@@ -6161,7 +6161,7 @@
                 </a:solidFill>
                 <a:latin typeface="Calibri"/>
               </a:rPr>
-              <a:t>BADM 225 · Chapter 6</a:t>
+              <a:t>BADM 225 · Chapter 6  ·  © Derek D. Bussan</a:t>
             </a:r>
           </a:p>
         </p:txBody>
@@ -6829,7 +6829,7 @@
                 </a:solidFill>
                 <a:latin typeface="Calibri"/>
               </a:rPr>
-              <a:t>BADM 225 · Chapter 6</a:t>
+              <a:t>BADM 225 · Chapter 6  ·  © Derek D. Bussan</a:t>
             </a:r>
           </a:p>
         </p:txBody>
@@ -7116,7 +7116,7 @@
                 </a:solidFill>
                 <a:latin typeface="Calibri"/>
               </a:rPr>
-              <a:t>BADM 225 · Chapter 6</a:t>
+              <a:t>BADM 225 · Chapter 6  ·  © Derek D. Bussan</a:t>
             </a:r>
           </a:p>
         </p:txBody>
@@ -7520,7 +7520,7 @@
                 </a:solidFill>
                 <a:latin typeface="Calibri"/>
               </a:rPr>
-              <a:t>BADM 225 · Chapter 6</a:t>
+              <a:t>BADM 225 · Chapter 6  ·  © Derek D. Bussan</a:t>
             </a:r>
           </a:p>
         </p:txBody>
@@ -7648,7 +7648,7 @@
                 </a:solidFill>
                 <a:latin typeface="Calibri"/>
               </a:rPr>
-              <a:t>BADM 225 · Chapter 6</a:t>
+              <a:t>BADM 225 · Chapter 6  ·  © Derek D. Bussan</a:t>
             </a:r>
           </a:p>
         </p:txBody>
@@ -8316,7 +8316,7 @@
                 </a:solidFill>
                 <a:latin typeface="Calibri"/>
               </a:rPr>
-              <a:t>BADM 225 · Chapter 6</a:t>
+              <a:t>BADM 225 · Chapter 6  ·  © Derek D. Bussan</a:t>
             </a:r>
           </a:p>
         </p:txBody>
@@ -8603,7 +8603,7 @@
                 </a:solidFill>
                 <a:latin typeface="Calibri"/>
               </a:rPr>
-              <a:t>BADM 225 · Chapter 6</a:t>
+              <a:t>BADM 225 · Chapter 6  ·  © Derek D. Bussan</a:t>
             </a:r>
           </a:p>
         </p:txBody>
@@ -9132,7 +9132,7 @@
                 </a:solidFill>
                 <a:latin typeface="Calibri"/>
               </a:rPr>
-              <a:t>BADM 225 · Chapter 6</a:t>
+              <a:t>BADM 225 · Chapter 6  ·  © Derek D. Bussan</a:t>
             </a:r>
           </a:p>
         </p:txBody>
@@ -9260,7 +9260,7 @@
                 </a:solidFill>
                 <a:latin typeface="Calibri"/>
               </a:rPr>
-              <a:t>BADM 225 · Chapter 6</a:t>
+              <a:t>BADM 225 · Chapter 6  ·  © Derek D. Bussan</a:t>
             </a:r>
           </a:p>
         </p:txBody>
@@ -9547,7 +9547,7 @@
                 </a:solidFill>
                 <a:latin typeface="Calibri"/>
               </a:rPr>
-              <a:t>BADM 225 · Chapter 6</a:t>
+              <a:t>BADM 225 · Chapter 6  ·  © Derek D. Bussan</a:t>
             </a:r>
           </a:p>
         </p:txBody>
@@ -9868,7 +9868,7 @@
                 </a:solidFill>
                 <a:latin typeface="Calibri"/>
               </a:rPr>
-              <a:t>BADM 225 · Chapter 6</a:t>
+              <a:t>BADM 225 · Chapter 6  ·  © Derek D. Bussan</a:t>
             </a:r>
           </a:p>
         </p:txBody>
@@ -10536,7 +10536,7 @@
                 </a:solidFill>
                 <a:latin typeface="Calibri"/>
               </a:rPr>
-              <a:t>BADM 225 · Chapter 6</a:t>
+              <a:t>BADM 225 · Chapter 6  ·  © Derek D. Bussan</a:t>
             </a:r>
           </a:p>
         </p:txBody>
@@ -10901,7 +10901,7 @@
                 </a:solidFill>
                 <a:latin typeface="Calibri"/>
               </a:rPr>
-              <a:t>BADM 225 · Chapter 6</a:t>
+              <a:t>BADM 225 · Chapter 6  ·  © Derek D. Bussan</a:t>
             </a:r>
           </a:p>
         </p:txBody>
@@ -11029,7 +11029,7 @@
                 </a:solidFill>
                 <a:latin typeface="Calibri"/>
               </a:rPr>
-              <a:t>BADM 225 · Chapter 6</a:t>
+              <a:t>BADM 225 · Chapter 6  ·  © Derek D. Bussan</a:t>
             </a:r>
           </a:p>
         </p:txBody>
@@ -11316,7 +11316,7 @@
                 </a:solidFill>
                 <a:latin typeface="Calibri"/>
               </a:rPr>
-              <a:t>BADM 225 · Chapter 6</a:t>
+              <a:t>BADM 225 · Chapter 6  ·  © Derek D. Bussan</a:t>
             </a:r>
           </a:p>
         </p:txBody>
@@ -11603,7 +11603,7 @@
                 </a:solidFill>
                 <a:latin typeface="Calibri"/>
               </a:rPr>
-              <a:t>BADM 225 · Chapter 6</a:t>
+              <a:t>BADM 225 · Chapter 6  ·  © Derek D. Bussan</a:t>
             </a:r>
           </a:p>
         </p:txBody>
@@ -11890,7 +11890,7 @@
                 </a:solidFill>
                 <a:latin typeface="Calibri"/>
               </a:rPr>
-              <a:t>BADM 225 · Chapter 6</a:t>
+              <a:t>BADM 225 · Chapter 6  ·  © Derek D. Bussan</a:t>
             </a:r>
           </a:p>
         </p:txBody>
@@ -12177,7 +12177,7 @@
                 </a:solidFill>
                 <a:latin typeface="Calibri"/>
               </a:rPr>
-              <a:t>BADM 225 · Chapter 6</a:t>
+              <a:t>BADM 225 · Chapter 6  ·  © Derek D. Bussan</a:t>
             </a:r>
           </a:p>
         </p:txBody>
@@ -12464,7 +12464,7 @@
                 </a:solidFill>
                 <a:latin typeface="Calibri"/>
               </a:rPr>
-              <a:t>BADM 225 · Chapter 6</a:t>
+              <a:t>BADM 225 · Chapter 6  ·  © Derek D. Bussan</a:t>
             </a:r>
           </a:p>
         </p:txBody>
@@ -12751,7 +12751,7 @@
                 </a:solidFill>
                 <a:latin typeface="Calibri"/>
               </a:rPr>
-              <a:t>BADM 225 · Chapter 6</a:t>
+              <a:t>BADM 225 · Chapter 6  ·  © Derek D. Bussan</a:t>
             </a:r>
           </a:p>
         </p:txBody>
@@ -13566,7 +13566,7 @@
                 </a:solidFill>
                 <a:latin typeface="Calibri"/>
               </a:rPr>
-              <a:t>BADM 225 · Chapter 6</a:t>
+              <a:t>BADM 225 · Chapter 6  ·  © Derek D. Bussan</a:t>
             </a:r>
           </a:p>
         </p:txBody>
@@ -13772,7 +13772,7 @@
                 </a:solidFill>
                 <a:latin typeface="Calibri"/>
               </a:rPr>
-              <a:t>BADM 225 · Chapter 6</a:t>
+              <a:t>BADM 225 · Chapter 6  ·  © Derek D. Bussan</a:t>
             </a:r>
           </a:p>
         </p:txBody>
@@ -14048,7 +14048,7 @@
                 </a:solidFill>
                 <a:latin typeface="Calibri"/>
               </a:rPr>
-              <a:t>BADM 225 · Chapter 6</a:t>
+              <a:t>BADM 225 · Chapter 6  ·  © Derek D. Bussan</a:t>
             </a:r>
           </a:p>
         </p:txBody>
@@ -14141,7 +14141,7 @@
                 </a:solidFill>
                 <a:latin typeface="Calibri"/>
               </a:rPr>
-              <a:t>BADM 225 · Chapter 6</a:t>
+              <a:t>BADM 225 · Chapter 6  ·  © Derek D. Bussan</a:t>
             </a:r>
           </a:p>
         </p:txBody>
@@ -14462,7 +14462,7 @@
                 </a:solidFill>
                 <a:latin typeface="Calibri"/>
               </a:rPr>
-              <a:t>BADM 225 · Chapter 6</a:t>
+              <a:t>BADM 225 · Chapter 6  ·  © Derek D. Bussan</a:t>
             </a:r>
           </a:p>
         </p:txBody>
@@ -15024,7 +15024,7 @@
                 </a:solidFill>
                 <a:latin typeface="Calibri"/>
               </a:rPr>
-              <a:t>BADM 225 · Chapter 6</a:t>
+              <a:t>BADM 225 · Chapter 6  ·  © Derek D. Bussan</a:t>
             </a:r>
           </a:p>
         </p:txBody>
@@ -15664,7 +15664,7 @@
                 </a:solidFill>
                 <a:latin typeface="Calibri"/>
               </a:rPr>
-              <a:t>BADM 225 · Chapter 6</a:t>
+              <a:t>BADM 225 · Chapter 6  ·  © Derek D. Bussan</a:t>
             </a:r>
           </a:p>
         </p:txBody>
@@ -15792,7 +15792,7 @@
                 </a:solidFill>
                 <a:latin typeface="Calibri"/>
               </a:rPr>
-              <a:t>BADM 225 · Chapter 6</a:t>
+              <a:t>BADM 225 · Chapter 6  ·  © Derek D. Bussan</a:t>
             </a:r>
           </a:p>
         </p:txBody>
@@ -16352,7 +16352,7 @@
                 </a:solidFill>
                 <a:latin typeface="Calibri"/>
               </a:rPr>
-              <a:t>BADM 225 · Chapter 6</a:t>
+              <a:t>BADM 225 · Chapter 6  ·  © Derek D. Bussan</a:t>
             </a:r>
           </a:p>
         </p:txBody>
@@ -16914,7 +16914,7 @@
                 </a:solidFill>
                 <a:latin typeface="Calibri"/>
               </a:rPr>
-              <a:t>BADM 225 · Chapter 6</a:t>
+              <a:t>BADM 225 · Chapter 6  ·  © Derek D. Bussan</a:t>
             </a:r>
           </a:p>
         </p:txBody>

--- a/slides/ch06-positive-and-neutral-messages.pptx
+++ b/slides/ch06-positive-and-neutral-messages.pptx
@@ -5862,7 +5862,7 @@
                 </a:solidFill>
                 <a:latin typeface="Calibri"/>
               </a:rPr>
-              <a:t>BADM 225 · Chapter 6  ·  Original instructional material — no publisher content</a:t>
+              <a:t>BADM 225 · Chapter 6  ·  Original material © 2026 Derek D. Bussan, PhD, MBA  ·  No publisher content</a:t>
             </a:r>
           </a:p>
         </p:txBody>
